--- a/lectures/Lecture 9.1 - Concurrency.pptx
+++ b/lectures/Lecture 9.1 - Concurrency.pptx
@@ -9,9 +9,6 @@
   </p:notesMasterIdLst>
   <p:sldIdLst>
     <p:sldId id="256" r:id="rId2"/>
-    <p:sldId id="257" r:id="rId3"/>
-    <p:sldId id="258" r:id="rId4"/>
-    <p:sldId id="259" r:id="rId5"/>
     <p:sldId id="260" r:id="rId6"/>
     <p:sldId id="261" r:id="rId7"/>
     <p:sldId id="262" r:id="rId8"/>
@@ -2135,7 +2132,7 @@
             </a:pPr>
             <a:r>
               <a:rPr lang="en-US" dirty="0"/>
-              <a:t>This is the reframe the whole lecture hangs on, and leading with the bug makes it land harder than asserting it cold - now the thesis is the answer to a question they actually have. Say it out loud twice, it comes back at the end. The 'your chat app barely has shared state' point is worth dwelling on: the reason they've never been bitten isn't that their code is safe, it's that appending messages doesn't really contend on a shared value yet. The first counter or balance they add changes that.</a:t>
+              <a:t>This is the reframe the whole lecture hangs on, and leading with the bug makes it land harder than asserting it cold - now the thesis is the answer to a question they actually have. Say it out loud twice, it comes back at the end. The 'your chat app barely has shared state' point is worth dwelling on: they haven't been bitten yet because appending messages doesn't really contend on a shared value, which is luck about the shape of the app rather than anything safe about the code. The first counter or balance they add changes that.</a:t>
             </a:r>
             <a:endParaRPr dirty="0"/>
           </a:p>
@@ -2451,7 +2448,7 @@
             </a:pPr>
             <a:r>
               <a:rPr lang="en-US" dirty="0"/>
-              <a:t>The one distinction that matters: processes are isolated from each other, but threads inside a single process share memory. That shared-memory property is what makes threads fast (no copying) and also what makes them dangerous (two threads stepping on the same variable). Both of those facts come from the same place, which is a nice thing to point out.</a:t>
+              <a:t>The distinction that matters here is that processes are isolated from each other while threads inside a single process share memory. That shared-memory property is what makes threads fast (no copying) and also what makes them dangerous (two threads stepping on the same variable). Both of those facts come from the same place, which is a nice thing to point out.</a:t>
             </a:r>
             <a:endParaRPr dirty="0"/>
           </a:p>
@@ -2460,160 +2457,6 @@
       <p:sp>
         <p:nvSpPr>
           <p:cNvPr id="223" name="Google Shape;223;g3e498caeefa_0_46:notes"/>
-          <p:cNvSpPr txBox="1">
-            <a:spLocks noGrp="1"/>
-          </p:cNvSpPr>
-          <p:nvPr>
-            <p:ph type="sldNum" idx="12"/>
-          </p:nvPr>
-        </p:nvSpPr>
-        <p:spPr>
-          <a:xfrm>
-            <a:off x="0" y="0"/>
-            <a:ext cx="3000000" cy="3000000"/>
-          </a:xfrm>
-          <a:prstGeom prst="rect">
-            <a:avLst/>
-          </a:prstGeom>
-          <a:noFill/>
-          <a:ln>
-            <a:noFill/>
-          </a:ln>
-        </p:spPr>
-        <p:txBody>
-          <a:bodyPr spcFirstLastPara="1" wrap="square" lIns="91425" tIns="91425" rIns="91425" bIns="91425" anchor="ctr" anchorCtr="0">
-            <a:noAutofit/>
-          </a:bodyPr>
-          <a:lstStyle/>
-          <a:p>
-            <a:pPr marL="0" lvl="0" indent="0" algn="l" rtl="0">
-              <a:spcBef>
-                <a:spcPts val="0"/>
-              </a:spcBef>
-              <a:spcAft>
-                <a:spcPts val="0"/>
-              </a:spcAft>
-              <a:buNone/>
-            </a:pPr>
-            <a:endParaRPr/>
-          </a:p>
-        </p:txBody>
-      </p:sp>
-    </p:spTree>
-  </p:cSld>
-  <p:clrMapOvr>
-    <a:masterClrMapping/>
-  </p:clrMapOvr>
-</p:notes>
-</file>
-
-<file path=ppt/notesSlides/notesSlide2.xml><?xml version="1.0" encoding="utf-8"?>
-<p:notes xmlns:a="http://schemas.openxmlformats.org/drawingml/2006/main" xmlns:r="http://schemas.openxmlformats.org/officeDocument/2006/relationships" xmlns:p="http://schemas.openxmlformats.org/presentationml/2006/main" showMasterSp="0" showMasterPhAnim="0">
-  <p:cSld>
-    <p:spTree>
-      <p:nvGrpSpPr>
-        <p:cNvPr id="1" name="Shape 89"/>
-        <p:cNvGrpSpPr/>
-        <p:nvPr/>
-      </p:nvGrpSpPr>
-      <p:grpSpPr>
-        <a:xfrm>
-          <a:off x="0" y="0"/>
-          <a:ext cx="0" cy="0"/>
-          <a:chOff x="0" y="0"/>
-          <a:chExt cx="0" cy="0"/>
-        </a:xfrm>
-      </p:grpSpPr>
-      <p:sp>
-        <p:nvSpPr>
-          <p:cNvPr id="90" name="Google Shape;90;g3e498caeefa_0_609:notes"/>
-          <p:cNvSpPr>
-            <a:spLocks noGrp="1" noRot="1" noChangeAspect="1"/>
-          </p:cNvSpPr>
-          <p:nvPr>
-            <p:ph type="sldImg" idx="2"/>
-          </p:nvPr>
-        </p:nvSpPr>
-        <p:spPr>
-          <a:xfrm>
-            <a:off x="-1166813" y="0"/>
-            <a:ext cx="5334001" cy="3000375"/>
-          </a:xfrm>
-          <a:custGeom>
-            <a:avLst/>
-            <a:gdLst/>
-            <a:ahLst/>
-            <a:cxnLst/>
-            <a:rect l="l" t="t" r="r" b="b"/>
-            <a:pathLst>
-              <a:path w="120000" h="120000" extrusionOk="0">
-                <a:moveTo>
-                  <a:pt x="0" y="0"/>
-                </a:moveTo>
-                <a:lnTo>
-                  <a:pt x="120000" y="0"/>
-                </a:lnTo>
-                <a:lnTo>
-                  <a:pt x="120000" y="120000"/>
-                </a:lnTo>
-                <a:lnTo>
-                  <a:pt x="0" y="120000"/>
-                </a:lnTo>
-                <a:close/>
-              </a:path>
-            </a:pathLst>
-          </a:custGeom>
-          <a:noFill/>
-          <a:ln>
-            <a:noFill/>
-          </a:ln>
-        </p:spPr>
-      </p:sp>
-      <p:sp>
-        <p:nvSpPr>
-          <p:cNvPr id="91" name="Google Shape;91;g3e498caeefa_0_609:notes"/>
-          <p:cNvSpPr txBox="1">
-            <a:spLocks noGrp="1"/>
-          </p:cNvSpPr>
-          <p:nvPr>
-            <p:ph type="body" idx="1"/>
-          </p:nvPr>
-        </p:nvSpPr>
-        <p:spPr>
-          <a:xfrm>
-            <a:off x="0" y="0"/>
-            <a:ext cx="3000000" cy="3000000"/>
-          </a:xfrm>
-          <a:prstGeom prst="rect">
-            <a:avLst/>
-          </a:prstGeom>
-          <a:noFill/>
-          <a:ln>
-            <a:noFill/>
-          </a:ln>
-        </p:spPr>
-        <p:txBody>
-          <a:bodyPr spcFirstLastPara="1" wrap="square" lIns="91425" tIns="45700" rIns="91425" bIns="45700" anchor="t" anchorCtr="0">
-            <a:noAutofit/>
-          </a:bodyPr>
-          <a:lstStyle/>
-          <a:p>
-            <a:pPr marL="0" lvl="0" indent="0" algn="l" rtl="0">
-              <a:spcBef>
-                <a:spcPts val="0"/>
-              </a:spcBef>
-              <a:spcAft>
-                <a:spcPts val="0"/>
-              </a:spcAft>
-              <a:buNone/>
-            </a:pPr>
-            <a:endParaRPr dirty="0"/>
-          </a:p>
-        </p:txBody>
-      </p:sp>
-      <p:sp>
-        <p:nvSpPr>
-          <p:cNvPr id="92" name="Google Shape;92;g3e498caeefa_0_609:notes"/>
           <p:cNvSpPr txBox="1">
             <a:spLocks noGrp="1"/>
           </p:cNvSpPr>
@@ -2763,7 +2606,7 @@
             </a:pPr>
             <a:r>
               <a:rPr lang="en-US" dirty="0"/>
-              <a:t>The one distinction that matters: processes are isolated from each other, but threads inside a single process share memory. That shared-memory property is what makes threads fast (no copying) and also what makes them dangerous (two threads stepping on the same variable). Both of those facts come from the same place, which is a nice thing to point out.</a:t>
+              <a:t>The distinction that matters here is that processes are isolated from each other while threads inside a single process share memory. That shared-memory property is what makes threads fast (no copying) and also what makes them dangerous (two threads stepping on the same variable). Both of those facts come from the same place, which is a nice thing to point out.</a:t>
             </a:r>
             <a:endParaRPr dirty="0"/>
           </a:p>
@@ -2921,7 +2764,7 @@
             </a:pPr>
             <a:r>
               <a:rPr lang="en-US" dirty="0"/>
-              <a:t>The 'any shared variable might change between line N and line N+1' framing is the intuition I want them to leave with, and it's literally what happened in the withdrawal: between T1's read and T1's write, T2 moved the balance underneath it. Single-threaded code is predictable, line N then line N+1. Multi-threaded code isn't, because the world can shift in between. Once they feel that, every race example explains itself.</a:t>
+              <a:t>The 'any shared variable might change between line N and line N+1' framing is the intuition I want them to leave with, and it's literally what happened in the withdrawal: between T1's read and T1's write, T2 moved the balance underneath it. Single-threaded code goes line N then line N+1 and stays predictable, and multi-threaded code just doesn't get that guarantee, because the world can shift in the gap. Once they feel that, every race example after this explains itself.</a:t>
             </a:r>
             <a:endParaRPr dirty="0"/>
           </a:p>
@@ -4253,7 +4096,7 @@
             </a:pPr>
             <a:r>
               <a:rPr lang="en-US" dirty="0"/>
-              <a:t>The payoff wasn't only 'you can scale to 1,000 servers,' it was 'two requests can run at the same time without stepping on each other,' because there's no per-request memory for them to step on.</a:t>
+              <a:t>What statelessness bought wasn't only 'you can scale to 1,000 servers' - it also means two requests can run at the same time without stepping on each other, because there's no per-request memory sitting there for them to step on.</a:t>
             </a:r>
             <a:endParaRPr dirty="0"/>
           </a:p>
@@ -4262,164 +4105,6 @@
       <p:sp>
         <p:nvSpPr>
           <p:cNvPr id="296" name="Google Shape;296;p16:notes"/>
-          <p:cNvSpPr txBox="1">
-            <a:spLocks noGrp="1"/>
-          </p:cNvSpPr>
-          <p:nvPr>
-            <p:ph type="sldNum" idx="12"/>
-          </p:nvPr>
-        </p:nvSpPr>
-        <p:spPr>
-          <a:xfrm>
-            <a:off x="0" y="0"/>
-            <a:ext cx="3000000" cy="3000000"/>
-          </a:xfrm>
-          <a:prstGeom prst="rect">
-            <a:avLst/>
-          </a:prstGeom>
-          <a:noFill/>
-          <a:ln>
-            <a:noFill/>
-          </a:ln>
-        </p:spPr>
-        <p:txBody>
-          <a:bodyPr spcFirstLastPara="1" wrap="square" lIns="91425" tIns="91425" rIns="91425" bIns="91425" anchor="ctr" anchorCtr="0">
-            <a:noAutofit/>
-          </a:bodyPr>
-          <a:lstStyle/>
-          <a:p>
-            <a:pPr marL="0" lvl="0" indent="0" algn="l" rtl="0">
-              <a:spcBef>
-                <a:spcPts val="0"/>
-              </a:spcBef>
-              <a:spcAft>
-                <a:spcPts val="0"/>
-              </a:spcAft>
-              <a:buNone/>
-            </a:pPr>
-            <a:endParaRPr/>
-          </a:p>
-        </p:txBody>
-      </p:sp>
-    </p:spTree>
-  </p:cSld>
-  <p:clrMapOvr>
-    <a:masterClrMapping/>
-  </p:clrMapOvr>
-</p:notes>
-</file>
-
-<file path=ppt/notesSlides/notesSlide3.xml><?xml version="1.0" encoding="utf-8"?>
-<p:notes xmlns:a="http://schemas.openxmlformats.org/drawingml/2006/main" xmlns:r="http://schemas.openxmlformats.org/officeDocument/2006/relationships" xmlns:p="http://schemas.openxmlformats.org/presentationml/2006/main" showMasterSp="0" showMasterPhAnim="0">
-  <p:cSld>
-    <p:spTree>
-      <p:nvGrpSpPr>
-        <p:cNvPr id="1" name="Shape 98"/>
-        <p:cNvGrpSpPr/>
-        <p:nvPr/>
-      </p:nvGrpSpPr>
-      <p:grpSpPr>
-        <a:xfrm>
-          <a:off x="0" y="0"/>
-          <a:ext cx="0" cy="0"/>
-          <a:chOff x="0" y="0"/>
-          <a:chExt cx="0" cy="0"/>
-        </a:xfrm>
-      </p:grpSpPr>
-      <p:sp>
-        <p:nvSpPr>
-          <p:cNvPr id="99" name="Google Shape;99;g3e498caeefa_0_692:notes"/>
-          <p:cNvSpPr>
-            <a:spLocks noGrp="1" noRot="1" noChangeAspect="1"/>
-          </p:cNvSpPr>
-          <p:nvPr>
-            <p:ph type="sldImg" idx="2"/>
-          </p:nvPr>
-        </p:nvSpPr>
-        <p:spPr>
-          <a:xfrm>
-            <a:off x="0" y="0"/>
-            <a:ext cx="3000000" cy="3000000"/>
-          </a:xfrm>
-          <a:custGeom>
-            <a:avLst/>
-            <a:gdLst/>
-            <a:ahLst/>
-            <a:cxnLst/>
-            <a:rect l="l" t="t" r="r" b="b"/>
-            <a:pathLst>
-              <a:path w="120000" h="120000" extrusionOk="0">
-                <a:moveTo>
-                  <a:pt x="0" y="0"/>
-                </a:moveTo>
-                <a:lnTo>
-                  <a:pt x="120000" y="0"/>
-                </a:lnTo>
-                <a:lnTo>
-                  <a:pt x="120000" y="120000"/>
-                </a:lnTo>
-                <a:lnTo>
-                  <a:pt x="0" y="120000"/>
-                </a:lnTo>
-                <a:close/>
-              </a:path>
-            </a:pathLst>
-          </a:custGeom>
-          <a:noFill/>
-          <a:ln>
-            <a:noFill/>
-          </a:ln>
-        </p:spPr>
-      </p:sp>
-      <p:sp>
-        <p:nvSpPr>
-          <p:cNvPr id="100" name="Google Shape;100;g3e498caeefa_0_692:notes"/>
-          <p:cNvSpPr txBox="1">
-            <a:spLocks noGrp="1"/>
-          </p:cNvSpPr>
-          <p:nvPr>
-            <p:ph type="body" idx="1"/>
-          </p:nvPr>
-        </p:nvSpPr>
-        <p:spPr>
-          <a:xfrm>
-            <a:off x="0" y="0"/>
-            <a:ext cx="3000000" cy="3000000"/>
-          </a:xfrm>
-          <a:prstGeom prst="rect">
-            <a:avLst/>
-          </a:prstGeom>
-          <a:noFill/>
-          <a:ln>
-            <a:noFill/>
-          </a:ln>
-        </p:spPr>
-        <p:txBody>
-          <a:bodyPr spcFirstLastPara="1" wrap="square" lIns="91425" tIns="45700" rIns="91425" bIns="45700" anchor="t" anchorCtr="0">
-            <a:noAutofit/>
-          </a:bodyPr>
-          <a:lstStyle/>
-          <a:p>
-            <a:pPr marL="0" lvl="0" indent="0" algn="l" rtl="0">
-              <a:spcBef>
-                <a:spcPts val="0"/>
-              </a:spcBef>
-              <a:spcAft>
-                <a:spcPts val="0"/>
-              </a:spcAft>
-              <a:buNone/>
-            </a:pPr>
-            <a:r>
-              <a:rPr lang="en-US" dirty="0"/>
-              <a:t>The four shape rules are really just 'make the PR cheap to review.' Small + scoped means the reviewer can hold the whole diff in their head. Described means they don't have to reverse-engineer your intent. Green means they're not wasting their time looking at broken code. Each one is individually small, all four together change a team's review culture entirely. The 'especially your own' bit is the one to land hard - a PR you opened against yourself is still useful because it forces you to look at your own diff with fresh eyes before it hits main, which catches a surprising amount of dumb stuff. And on a 3-person team it gives the other two a real chance to flag issues they'd otherwise only discover after the fact.</a:t>
-            </a:r>
-            <a:endParaRPr dirty="0"/>
-          </a:p>
-        </p:txBody>
-      </p:sp>
-      <p:sp>
-        <p:nvSpPr>
-          <p:cNvPr id="101" name="Google Shape;101;g3e498caeefa_0_692:notes"/>
           <p:cNvSpPr txBox="1">
             <a:spLocks noGrp="1"/>
           </p:cNvSpPr>
@@ -5043,7 +4728,7 @@
             </a:pPr>
             <a:r>
               <a:rPr lang="en-US" dirty="0"/>
-              <a:t>Transactions are the database's answer to 'how do two things happen at once without corrupting each other.' Under the hood it's locks; from your code's perspective it's just a BEGIN-COMMIT wrapper. The database is doing the hard part for you, which is exactly why it's the right place to solve this instead of trying to coordinate it in application code. Flag the word 'lock' here - it comes back hard in the Java coda.</a:t>
+              <a:t>Transactions are the database's answer to 'how do two things happen at once without corrupting each other.' Underneath it's all locks, and from your code's perspective it's a BEGIN-COMMIT wrapper and nothing more. The database is doing the hard part for you, which is exactly why it's the right place to solve this instead of trying to coordinate it in application code. Flag the word 'lock' here - it comes back hard in the Java coda.</a:t>
             </a:r>
             <a:endParaRPr dirty="0"/>
           </a:p>
@@ -5201,7 +4886,7 @@
             </a:pPr>
             <a:r>
               <a:rPr lang="en-US" dirty="0"/>
-              <a:t>Transactions are the database's answer to 'how do two things happen at once without corrupting each other.' Under the hood it's locks; from your code's perspective it's just a BEGIN-COMMIT wrapper. The database is doing the hard part for you, which is exactly why it's the right place to solve this instead of trying to coordinate it in application code. Flag the word 'lock' here - it comes back hard in the Java coda.</a:t>
+              <a:t>Transactions are the database's answer to 'how do two things happen at once without corrupting each other.' Underneath it's all locks, and from your code's perspective it's a BEGIN-COMMIT wrapper and nothing more. The database is doing the hard part for you, which is exactly why it's the right place to solve this instead of trying to coordinate it in application code. Flag the word 'lock' here - it comes back hard in the Java coda.</a:t>
             </a:r>
             <a:endParaRPr dirty="0"/>
           </a:p>
@@ -5359,7 +5044,7 @@
             </a:pPr>
             <a:r>
               <a:rPr lang="en-US" dirty="0"/>
-              <a:t>Transactions are the database's answer to 'how do two things happen at once without corrupting each other.' Under the hood it's locks; from your code's perspective it's just a BEGIN-COMMIT wrapper. The database is doing the hard part for you, which is exactly why it's the right place to solve this instead of trying to coordinate it in application code. Flag the word 'lock' here - it comes back hard in the Java coda.</a:t>
+              <a:t>Transactions are the database's answer to 'how do two things happen at once without corrupting each other.' Underneath it's all locks, and from your code's perspective it's a BEGIN-COMMIT wrapper and nothing more. The database is doing the hard part for you, which is exactly why it's the right place to solve this instead of trying to coordinate it in application code. Flag the word 'lock' here - it comes back hard in the Java coda.</a:t>
             </a:r>
             <a:endParaRPr dirty="0"/>
           </a:p>
@@ -6142,404 +5827,6 @@
 </p:notes>
 </file>
 
-<file path=ppt/notesSlides/notesSlide4.xml><?xml version="1.0" encoding="utf-8"?>
-<p:notes xmlns:a="http://schemas.openxmlformats.org/drawingml/2006/main" xmlns:r="http://schemas.openxmlformats.org/officeDocument/2006/relationships" xmlns:p="http://schemas.openxmlformats.org/presentationml/2006/main" showMasterSp="0" showMasterPhAnim="0">
-  <p:cSld>
-    <p:spTree>
-      <p:nvGrpSpPr>
-        <p:cNvPr id="1" name="Shape 105"/>
-        <p:cNvGrpSpPr/>
-        <p:nvPr/>
-      </p:nvGrpSpPr>
-      <p:grpSpPr>
-        <a:xfrm>
-          <a:off x="0" y="0"/>
-          <a:ext cx="0" cy="0"/>
-          <a:chOff x="0" y="0"/>
-          <a:chExt cx="0" cy="0"/>
-        </a:xfrm>
-      </p:grpSpPr>
-      <p:sp>
-        <p:nvSpPr>
-          <p:cNvPr id="106" name="Google Shape;106;g3e498caeefa_0_526:notes"/>
-          <p:cNvSpPr>
-            <a:spLocks noGrp="1" noRot="1" noChangeAspect="1"/>
-          </p:cNvSpPr>
-          <p:nvPr>
-            <p:ph type="sldImg" idx="2"/>
-          </p:nvPr>
-        </p:nvSpPr>
-        <p:spPr>
-          <a:xfrm>
-            <a:off x="0" y="0"/>
-            <a:ext cx="3000000" cy="3000000"/>
-          </a:xfrm>
-          <a:custGeom>
-            <a:avLst/>
-            <a:gdLst/>
-            <a:ahLst/>
-            <a:cxnLst/>
-            <a:rect l="l" t="t" r="r" b="b"/>
-            <a:pathLst>
-              <a:path w="120000" h="120000" extrusionOk="0">
-                <a:moveTo>
-                  <a:pt x="0" y="0"/>
-                </a:moveTo>
-                <a:lnTo>
-                  <a:pt x="120000" y="0"/>
-                </a:lnTo>
-                <a:lnTo>
-                  <a:pt x="120000" y="120000"/>
-                </a:lnTo>
-                <a:lnTo>
-                  <a:pt x="0" y="120000"/>
-                </a:lnTo>
-                <a:close/>
-              </a:path>
-            </a:pathLst>
-          </a:custGeom>
-          <a:noFill/>
-          <a:ln>
-            <a:noFill/>
-          </a:ln>
-        </p:spPr>
-      </p:sp>
-      <p:sp>
-        <p:nvSpPr>
-          <p:cNvPr id="107" name="Google Shape;107;g3e498caeefa_0_526:notes"/>
-          <p:cNvSpPr txBox="1">
-            <a:spLocks noGrp="1"/>
-          </p:cNvSpPr>
-          <p:nvPr>
-            <p:ph type="body" idx="1"/>
-          </p:nvPr>
-        </p:nvSpPr>
-        <p:spPr>
-          <a:xfrm>
-            <a:off x="0" y="0"/>
-            <a:ext cx="3000000" cy="3000000"/>
-          </a:xfrm>
-          <a:prstGeom prst="rect">
-            <a:avLst/>
-          </a:prstGeom>
-          <a:noFill/>
-          <a:ln>
-            <a:noFill/>
-          </a:ln>
-        </p:spPr>
-        <p:txBody>
-          <a:bodyPr spcFirstLastPara="1" wrap="square" lIns="91425" tIns="45700" rIns="91425" bIns="45700" anchor="t" anchorCtr="0">
-            <a:noAutofit/>
-          </a:bodyPr>
-          <a:lstStyle/>
-          <a:p>
-            <a:pPr marL="0" lvl="0" indent="0" algn="l" rtl="0">
-              <a:spcBef>
-                <a:spcPts val="0"/>
-              </a:spcBef>
-              <a:spcAft>
-                <a:spcPts val="0"/>
-              </a:spcAft>
-              <a:buNone/>
-            </a:pPr>
-            <a:r>
-              <a:rPr lang="en-US" dirty="0"/>
-              <a:t>name: Tests</a:t>
-            </a:r>
-            <a:endParaRPr dirty="0"/>
-          </a:p>
-          <a:p>
-            <a:pPr marL="0" lvl="0" indent="0" algn="l" rtl="0">
-              <a:spcBef>
-                <a:spcPts val="0"/>
-              </a:spcBef>
-              <a:spcAft>
-                <a:spcPts val="0"/>
-              </a:spcAft>
-              <a:buNone/>
-            </a:pPr>
-            <a:endParaRPr dirty="0"/>
-          </a:p>
-          <a:p>
-            <a:pPr marL="0" lvl="0" indent="0" algn="l" rtl="0">
-              <a:spcBef>
-                <a:spcPts val="0"/>
-              </a:spcBef>
-              <a:spcAft>
-                <a:spcPts val="0"/>
-              </a:spcAft>
-              <a:buNone/>
-            </a:pPr>
-            <a:r>
-              <a:rPr lang="en-US" dirty="0"/>
-              <a:t>on: [push, </a:t>
-            </a:r>
-            <a:r>
-              <a:rPr lang="en-US" dirty="0" err="1"/>
-              <a:t>pull_request</a:t>
-            </a:r>
-            <a:r>
-              <a:rPr lang="en-US" dirty="0"/>
-              <a:t>]</a:t>
-            </a:r>
-            <a:endParaRPr dirty="0"/>
-          </a:p>
-          <a:p>
-            <a:pPr marL="0" lvl="0" indent="0" algn="l" rtl="0">
-              <a:spcBef>
-                <a:spcPts val="0"/>
-              </a:spcBef>
-              <a:spcAft>
-                <a:spcPts val="0"/>
-              </a:spcAft>
-              <a:buNone/>
-            </a:pPr>
-            <a:endParaRPr dirty="0"/>
-          </a:p>
-          <a:p>
-            <a:pPr marL="0" lvl="0" indent="0" algn="l" rtl="0">
-              <a:spcBef>
-                <a:spcPts val="0"/>
-              </a:spcBef>
-              <a:spcAft>
-                <a:spcPts val="0"/>
-              </a:spcAft>
-              <a:buNone/>
-            </a:pPr>
-            <a:r>
-              <a:rPr lang="en-US" dirty="0"/>
-              <a:t>jobs:</a:t>
-            </a:r>
-            <a:endParaRPr dirty="0"/>
-          </a:p>
-          <a:p>
-            <a:pPr marL="0" lvl="0" indent="0" algn="l" rtl="0">
-              <a:spcBef>
-                <a:spcPts val="0"/>
-              </a:spcBef>
-              <a:spcAft>
-                <a:spcPts val="0"/>
-              </a:spcAft>
-              <a:buNone/>
-            </a:pPr>
-            <a:r>
-              <a:rPr lang="en-US" dirty="0"/>
-              <a:t>  test:</a:t>
-            </a:r>
-            <a:endParaRPr dirty="0"/>
-          </a:p>
-          <a:p>
-            <a:pPr marL="0" lvl="0" indent="0" algn="l" rtl="0">
-              <a:spcBef>
-                <a:spcPts val="0"/>
-              </a:spcBef>
-              <a:spcAft>
-                <a:spcPts val="0"/>
-              </a:spcAft>
-              <a:buNone/>
-            </a:pPr>
-            <a:r>
-              <a:rPr lang="en-US" dirty="0"/>
-              <a:t>    runs-on: ubuntu-latest</a:t>
-            </a:r>
-            <a:endParaRPr dirty="0"/>
-          </a:p>
-          <a:p>
-            <a:pPr marL="0" lvl="0" indent="0" algn="l" rtl="0">
-              <a:spcBef>
-                <a:spcPts val="0"/>
-              </a:spcBef>
-              <a:spcAft>
-                <a:spcPts val="0"/>
-              </a:spcAft>
-              <a:buNone/>
-            </a:pPr>
-            <a:r>
-              <a:rPr lang="en-US" dirty="0"/>
-              <a:t>    steps:</a:t>
-            </a:r>
-            <a:endParaRPr dirty="0"/>
-          </a:p>
-          <a:p>
-            <a:pPr marL="0" lvl="0" indent="0" algn="l" rtl="0">
-              <a:spcBef>
-                <a:spcPts val="0"/>
-              </a:spcBef>
-              <a:spcAft>
-                <a:spcPts val="0"/>
-              </a:spcAft>
-              <a:buNone/>
-            </a:pPr>
-            <a:r>
-              <a:rPr lang="en-US" dirty="0"/>
-              <a:t>      - uses: actions/checkout@v6</a:t>
-            </a:r>
-            <a:endParaRPr dirty="0"/>
-          </a:p>
-          <a:p>
-            <a:pPr marL="0" lvl="0" indent="0" algn="l" rtl="0">
-              <a:spcBef>
-                <a:spcPts val="0"/>
-              </a:spcBef>
-              <a:spcAft>
-                <a:spcPts val="0"/>
-              </a:spcAft>
-              <a:buNone/>
-            </a:pPr>
-            <a:r>
-              <a:rPr lang="en-US" dirty="0"/>
-              <a:t>      - uses: actions/setup-python@v6</a:t>
-            </a:r>
-            <a:endParaRPr dirty="0"/>
-          </a:p>
-          <a:p>
-            <a:pPr marL="0" lvl="0" indent="0" algn="l" rtl="0">
-              <a:spcBef>
-                <a:spcPts val="0"/>
-              </a:spcBef>
-              <a:spcAft>
-                <a:spcPts val="0"/>
-              </a:spcAft>
-              <a:buNone/>
-            </a:pPr>
-            <a:r>
-              <a:rPr lang="en-US" dirty="0"/>
-              <a:t>        with:</a:t>
-            </a:r>
-            <a:endParaRPr dirty="0"/>
-          </a:p>
-          <a:p>
-            <a:pPr marL="0" lvl="0" indent="0" algn="l" rtl="0">
-              <a:spcBef>
-                <a:spcPts val="0"/>
-              </a:spcBef>
-              <a:spcAft>
-                <a:spcPts val="0"/>
-              </a:spcAft>
-              <a:buNone/>
-            </a:pPr>
-            <a:r>
-              <a:rPr lang="en-US" dirty="0"/>
-              <a:t>          python-version: "3.12"</a:t>
-            </a:r>
-            <a:endParaRPr dirty="0"/>
-          </a:p>
-          <a:p>
-            <a:pPr marL="0" lvl="0" indent="0" algn="l" rtl="0">
-              <a:spcBef>
-                <a:spcPts val="0"/>
-              </a:spcBef>
-              <a:spcAft>
-                <a:spcPts val="0"/>
-              </a:spcAft>
-              <a:buNone/>
-            </a:pPr>
-            <a:endParaRPr dirty="0"/>
-          </a:p>
-          <a:p>
-            <a:pPr marL="0" lvl="0" indent="0" algn="l" rtl="0">
-              <a:spcBef>
-                <a:spcPts val="0"/>
-              </a:spcBef>
-              <a:spcAft>
-                <a:spcPts val="0"/>
-              </a:spcAft>
-              <a:buNone/>
-            </a:pPr>
-            <a:r>
-              <a:rPr lang="en-US" dirty="0"/>
-              <a:t>      - run: pip install -r </a:t>
-            </a:r>
-            <a:r>
-              <a:rPr lang="en-US" dirty="0" err="1"/>
-              <a:t>requirements.txt</a:t>
-            </a:r>
-            <a:endParaRPr dirty="0"/>
-          </a:p>
-          <a:p>
-            <a:pPr marL="0" lvl="0" indent="0" algn="l" rtl="0">
-              <a:spcBef>
-                <a:spcPts val="0"/>
-              </a:spcBef>
-              <a:spcAft>
-                <a:spcPts val="0"/>
-              </a:spcAft>
-              <a:buNone/>
-            </a:pPr>
-            <a:r>
-              <a:rPr lang="en-US" dirty="0"/>
-              <a:t>      - run: </a:t>
-            </a:r>
-            <a:r>
-              <a:rPr lang="en-US" dirty="0" err="1"/>
-              <a:t>pytest</a:t>
-            </a:r>
-            <a:endParaRPr dirty="0"/>
-          </a:p>
-          <a:p>
-            <a:pPr marL="0" lvl="0" indent="0" algn="l" rtl="0">
-              <a:spcBef>
-                <a:spcPts val="0"/>
-              </a:spcBef>
-              <a:spcAft>
-                <a:spcPts val="0"/>
-              </a:spcAft>
-              <a:buNone/>
-            </a:pPr>
-            <a:endParaRPr dirty="0"/>
-          </a:p>
-        </p:txBody>
-      </p:sp>
-      <p:sp>
-        <p:nvSpPr>
-          <p:cNvPr id="108" name="Google Shape;108;g3e498caeefa_0_526:notes"/>
-          <p:cNvSpPr txBox="1">
-            <a:spLocks noGrp="1"/>
-          </p:cNvSpPr>
-          <p:nvPr>
-            <p:ph type="sldNum" idx="12"/>
-          </p:nvPr>
-        </p:nvSpPr>
-        <p:spPr>
-          <a:xfrm>
-            <a:off x="0" y="0"/>
-            <a:ext cx="3000000" cy="3000000"/>
-          </a:xfrm>
-          <a:prstGeom prst="rect">
-            <a:avLst/>
-          </a:prstGeom>
-          <a:noFill/>
-          <a:ln>
-            <a:noFill/>
-          </a:ln>
-        </p:spPr>
-        <p:txBody>
-          <a:bodyPr spcFirstLastPara="1" wrap="square" lIns="91425" tIns="91425" rIns="91425" bIns="91425" anchor="ctr" anchorCtr="0">
-            <a:noAutofit/>
-          </a:bodyPr>
-          <a:lstStyle/>
-          <a:p>
-            <a:pPr marL="0" lvl="0" indent="0" algn="l" rtl="0">
-              <a:spcBef>
-                <a:spcPts val="0"/>
-              </a:spcBef>
-              <a:spcAft>
-                <a:spcPts val="0"/>
-              </a:spcAft>
-              <a:buNone/>
-            </a:pPr>
-            <a:endParaRPr/>
-          </a:p>
-        </p:txBody>
-      </p:sp>
-    </p:spTree>
-  </p:cSld>
-  <p:clrMapOvr>
-    <a:masterClrMapping/>
-  </p:clrMapOvr>
-</p:notes>
-</file>
-
 <file path=ppt/notesSlides/notesSlide40.xml><?xml version="1.0" encoding="utf-8"?>
 <p:notes xmlns:a="http://schemas.openxmlformats.org/drawingml/2006/main" xmlns:r="http://schemas.openxmlformats.org/officeDocument/2006/relationships" xmlns:p="http://schemas.openxmlformats.org/presentationml/2006/main" showMasterSp="0" showMasterPhAnim="0">
   <p:cSld>
@@ -7158,7 +6445,7 @@
             </a:pPr>
             <a:r>
               <a:rPr lang="en-US" dirty="0"/>
-              <a:t>The conceptual capstone. They know Java from their prior CS course, but not threads or locks. The point of this coda is to connect that to today's database transaction and explain why the lock had to move out of memory and into the database. They're not going to write any of this - it's here to make the concept click, not to add a skill.</a:t>
+              <a:t>The conceptual capstone. They know Java from their prior CS course, but not threads or locks. The point of this coda is to connect that to today's database transaction and explain why the lock had to move out of memory and into the database. They're not gonna write any of this, it's here to make the concept click rather than to hand them another skill.</a:t>
             </a:r>
             <a:endParaRPr dirty="0"/>
           </a:p>
@@ -24552,183 +23839,6 @@
 </p:sld>
 </file>
 
-<file path=ppt/slides/slide2.xml><?xml version="1.0" encoding="utf-8"?>
-<p:sld xmlns:a="http://schemas.openxmlformats.org/drawingml/2006/main" xmlns:r="http://schemas.openxmlformats.org/officeDocument/2006/relationships" xmlns:p="http://schemas.openxmlformats.org/presentationml/2006/main">
-  <p:cSld>
-    <p:bg>
-      <p:bgPr>
-        <a:solidFill>
-          <a:srgbClr val="FFFFFF"/>
-        </a:solidFill>
-        <a:effectLst/>
-      </p:bgPr>
-    </p:bg>
-    <p:spTree>
-      <p:nvGrpSpPr>
-        <p:cNvPr id="1" name="Shape 93"/>
-        <p:cNvGrpSpPr/>
-        <p:nvPr/>
-      </p:nvGrpSpPr>
-      <p:grpSpPr>
-        <a:xfrm>
-          <a:off x="0" y="0"/>
-          <a:ext cx="0" cy="0"/>
-          <a:chOff x="0" y="0"/>
-          <a:chExt cx="0" cy="0"/>
-        </a:xfrm>
-      </p:grpSpPr>
-      <p:sp>
-        <p:nvSpPr>
-          <p:cNvPr id="94" name="Google Shape;94;g3e498caeefa_0_609"/>
-          <p:cNvSpPr txBox="1"/>
-          <p:nvPr/>
-        </p:nvSpPr>
-        <p:spPr>
-          <a:xfrm>
-            <a:off x="731520" y="365760"/>
-            <a:ext cx="10728600" cy="646500"/>
-          </a:xfrm>
-          <a:prstGeom prst="rect">
-            <a:avLst/>
-          </a:prstGeom>
-          <a:noFill/>
-          <a:ln>
-            <a:noFill/>
-          </a:ln>
-        </p:spPr>
-        <p:txBody>
-          <a:bodyPr spcFirstLastPara="1" wrap="square" lIns="91425" tIns="45700" rIns="91425" bIns="45700" anchor="t" anchorCtr="0">
-            <a:spAutoFit/>
-          </a:bodyPr>
-          <a:lstStyle/>
-          <a:p>
-            <a:pPr marL="0" marR="0" lvl="0" indent="0" algn="l" rtl="0">
-              <a:spcBef>
-                <a:spcPts val="0"/>
-              </a:spcBef>
-              <a:spcAft>
-                <a:spcPts val="0"/>
-              </a:spcAft>
-              <a:buNone/>
-            </a:pPr>
-            <a:r>
-              <a:rPr lang="en-US" sz="3600" b="1" i="0" u="none" strike="noStrike" cap="none">
-                <a:solidFill>
-                  <a:srgbClr val="1A1A2E"/>
-                </a:solidFill>
-                <a:latin typeface="Calibri"/>
-                <a:ea typeface="Calibri"/>
-                <a:cs typeface="Calibri"/>
-                <a:sym typeface="Calibri"/>
-              </a:rPr>
-              <a:t>Continuous Integration = tests, automatic</a:t>
-            </a:r>
-            <a:endParaRPr/>
-          </a:p>
-        </p:txBody>
-      </p:sp>
-      <p:sp>
-        <p:nvSpPr>
-          <p:cNvPr id="95" name="Google Shape;95;g3e498caeefa_0_609"/>
-          <p:cNvSpPr txBox="1"/>
-          <p:nvPr/>
-        </p:nvSpPr>
-        <p:spPr>
-          <a:xfrm>
-            <a:off x="914400" y="1463040"/>
-            <a:ext cx="10362900" cy="307800"/>
-          </a:xfrm>
-          <a:prstGeom prst="rect">
-            <a:avLst/>
-          </a:prstGeom>
-          <a:noFill/>
-          <a:ln>
-            <a:noFill/>
-          </a:ln>
-        </p:spPr>
-        <p:txBody>
-          <a:bodyPr spcFirstLastPara="1" wrap="square" lIns="91425" tIns="45700" rIns="91425" bIns="45700" anchor="t" anchorCtr="0">
-            <a:spAutoFit/>
-          </a:bodyPr>
-          <a:lstStyle/>
-          <a:p>
-            <a:pPr marL="0" marR="0" lvl="0" indent="0" algn="l" rtl="0">
-              <a:spcBef>
-                <a:spcPts val="600"/>
-              </a:spcBef>
-              <a:spcAft>
-                <a:spcPts val="0"/>
-              </a:spcAft>
-              <a:buNone/>
-            </a:pPr>
-            <a:endParaRPr/>
-          </a:p>
-        </p:txBody>
-      </p:sp>
-      <p:pic>
-        <p:nvPicPr>
-          <p:cNvPr id="96" name="Google Shape;96;g3e498caeefa_0_609"/>
-          <p:cNvPicPr preferRelativeResize="0"/>
-          <p:nvPr/>
-        </p:nvPicPr>
-        <p:blipFill>
-          <a:blip r:embed="rId3">
-            <a:alphaModFix/>
-          </a:blip>
-          <a:stretch>
-            <a:fillRect/>
-          </a:stretch>
-        </p:blipFill>
-        <p:spPr>
-          <a:xfrm>
-            <a:off x="658675" y="1310025"/>
-            <a:ext cx="10728602" cy="3792725"/>
-          </a:xfrm>
-          <a:prstGeom prst="rect">
-            <a:avLst/>
-          </a:prstGeom>
-          <a:noFill/>
-          <a:ln>
-            <a:noFill/>
-          </a:ln>
-        </p:spPr>
-      </p:pic>
-      <p:pic>
-        <p:nvPicPr>
-          <p:cNvPr id="97" name="Google Shape;97;g3e498caeefa_0_609"/>
-          <p:cNvPicPr preferRelativeResize="0"/>
-          <p:nvPr/>
-        </p:nvPicPr>
-        <p:blipFill>
-          <a:blip r:embed="rId4">
-            <a:alphaModFix/>
-          </a:blip>
-          <a:stretch>
-            <a:fillRect/>
-          </a:stretch>
-        </p:blipFill>
-        <p:spPr>
-          <a:xfrm>
-            <a:off x="1834963" y="1770850"/>
-            <a:ext cx="8521726" cy="4099050"/>
-          </a:xfrm>
-          <a:prstGeom prst="rect">
-            <a:avLst/>
-          </a:prstGeom>
-          <a:noFill/>
-          <a:ln>
-            <a:noFill/>
-          </a:ln>
-        </p:spPr>
-      </p:pic>
-    </p:spTree>
-  </p:cSld>
-  <p:clrMapOvr>
-    <a:masterClrMapping/>
-  </p:clrMapOvr>
-</p:sld>
-</file>
-
 <file path=ppt/slides/slide20.xml><?xml version="1.0" encoding="utf-8"?>
 <p:sld xmlns:a="http://schemas.openxmlformats.org/drawingml/2006/main" xmlns:r="http://schemas.openxmlformats.org/officeDocument/2006/relationships" xmlns:p="http://schemas.openxmlformats.org/presentationml/2006/main">
   <p:cSld>
@@ -29485,407 +28595,6 @@
               </a:rPr>
               <a:t>  ruled out before your handler code even runs.</a:t>
             </a:r>
-            <a:endParaRPr/>
-          </a:p>
-        </p:txBody>
-      </p:sp>
-    </p:spTree>
-  </p:cSld>
-  <p:clrMapOvr>
-    <a:masterClrMapping/>
-  </p:clrMapOvr>
-</p:sld>
-</file>
-
-<file path=ppt/slides/slide3.xml><?xml version="1.0" encoding="utf-8"?>
-<p:sld xmlns:a="http://schemas.openxmlformats.org/drawingml/2006/main" xmlns:r="http://schemas.openxmlformats.org/officeDocument/2006/relationships" xmlns:p="http://schemas.openxmlformats.org/presentationml/2006/main">
-  <p:cSld>
-    <p:bg>
-      <p:bgPr>
-        <a:solidFill>
-          <a:srgbClr val="FFFFFF"/>
-        </a:solidFill>
-        <a:effectLst/>
-      </p:bgPr>
-    </p:bg>
-    <p:spTree>
-      <p:nvGrpSpPr>
-        <p:cNvPr id="1" name="Shape 102"/>
-        <p:cNvGrpSpPr/>
-        <p:nvPr/>
-      </p:nvGrpSpPr>
-      <p:grpSpPr>
-        <a:xfrm>
-          <a:off x="0" y="0"/>
-          <a:ext cx="0" cy="0"/>
-          <a:chOff x="0" y="0"/>
-          <a:chExt cx="0" cy="0"/>
-        </a:xfrm>
-      </p:grpSpPr>
-      <p:sp>
-        <p:nvSpPr>
-          <p:cNvPr id="103" name="Google Shape;103;g3e498caeefa_0_692"/>
-          <p:cNvSpPr txBox="1"/>
-          <p:nvPr/>
-        </p:nvSpPr>
-        <p:spPr>
-          <a:xfrm>
-            <a:off x="731520" y="365760"/>
-            <a:ext cx="10728600" cy="646500"/>
-          </a:xfrm>
-          <a:prstGeom prst="rect">
-            <a:avLst/>
-          </a:prstGeom>
-          <a:noFill/>
-          <a:ln>
-            <a:noFill/>
-          </a:ln>
-        </p:spPr>
-        <p:txBody>
-          <a:bodyPr spcFirstLastPara="1" wrap="square" lIns="91425" tIns="45700" rIns="91425" bIns="45700" anchor="t" anchorCtr="0">
-            <a:spAutoFit/>
-          </a:bodyPr>
-          <a:lstStyle/>
-          <a:p>
-            <a:pPr marL="0" marR="0" lvl="0" indent="0" algn="l" rtl="0">
-              <a:spcBef>
-                <a:spcPts val="0"/>
-              </a:spcBef>
-              <a:spcAft>
-                <a:spcPts val="0"/>
-              </a:spcAft>
-              <a:buNone/>
-            </a:pPr>
-            <a:r>
-              <a:rPr lang="en-US" sz="3600" b="1" i="0" u="none" strike="noStrike" cap="none">
-                <a:solidFill>
-                  <a:srgbClr val="1A1A2E"/>
-                </a:solidFill>
-                <a:latin typeface="Calibri"/>
-                <a:ea typeface="Calibri"/>
-                <a:cs typeface="Calibri"/>
-                <a:sym typeface="Calibri"/>
-              </a:rPr>
-              <a:t>What a good PR looks like</a:t>
-            </a:r>
-            <a:endParaRPr/>
-          </a:p>
-        </p:txBody>
-      </p:sp>
-      <p:sp>
-        <p:nvSpPr>
-          <p:cNvPr id="104" name="Google Shape;104;g3e498caeefa_0_692"/>
-          <p:cNvSpPr txBox="1"/>
-          <p:nvPr/>
-        </p:nvSpPr>
-        <p:spPr>
-          <a:xfrm>
-            <a:off x="914400" y="1463040"/>
-            <a:ext cx="10362900" cy="2616600"/>
-          </a:xfrm>
-          <a:prstGeom prst="rect">
-            <a:avLst/>
-          </a:prstGeom>
-          <a:noFill/>
-          <a:ln>
-            <a:noFill/>
-          </a:ln>
-        </p:spPr>
-        <p:txBody>
-          <a:bodyPr spcFirstLastPara="1" wrap="square" lIns="91425" tIns="45700" rIns="91425" bIns="45700" anchor="t" anchorCtr="0">
-            <a:spAutoFit/>
-          </a:bodyPr>
-          <a:lstStyle/>
-          <a:p>
-            <a:pPr marL="457200" marR="0" lvl="1" indent="0" algn="l" rtl="0">
-              <a:spcBef>
-                <a:spcPts val="0"/>
-              </a:spcBef>
-              <a:spcAft>
-                <a:spcPts val="0"/>
-              </a:spcAft>
-              <a:buNone/>
-            </a:pPr>
-            <a:r>
-              <a:rPr lang="en-US" sz="2000" b="0" i="0" u="none" strike="noStrike" cap="none">
-                <a:solidFill>
-                  <a:srgbClr val="666677"/>
-                </a:solidFill>
-                <a:latin typeface="Calibri"/>
-                <a:ea typeface="Calibri"/>
-                <a:cs typeface="Calibri"/>
-                <a:sym typeface="Calibri"/>
-              </a:rPr>
-              <a:t>  </a:t>
-            </a:r>
-            <a:r>
-              <a:rPr lang="en-US" sz="2000" b="1" i="0" u="none" strike="noStrike" cap="none">
-                <a:solidFill>
-                  <a:srgbClr val="666677"/>
-                </a:solidFill>
-                <a:latin typeface="Calibri"/>
-                <a:ea typeface="Calibri"/>
-                <a:cs typeface="Calibri"/>
-                <a:sym typeface="Calibri"/>
-              </a:rPr>
-              <a:t>Small.</a:t>
-            </a:r>
-            <a:r>
-              <a:rPr lang="en-US" sz="2000" b="0" i="0" u="none" strike="noStrike" cap="none">
-                <a:solidFill>
-                  <a:srgbClr val="666677"/>
-                </a:solidFill>
-                <a:latin typeface="Calibri"/>
-                <a:ea typeface="Calibri"/>
-                <a:cs typeface="Calibri"/>
-                <a:sym typeface="Calibri"/>
-              </a:rPr>
-              <a:t> A few hundred lines max. Bigger diffs get skimmed, and</a:t>
-            </a:r>
-            <a:r>
-              <a:rPr lang="en-US"/>
-              <a:t> </a:t>
-            </a:r>
-            <a:r>
-              <a:rPr lang="en-US" sz="2000" b="0" i="0" u="none" strike="noStrike" cap="none">
-                <a:solidFill>
-                  <a:srgbClr val="666677"/>
-                </a:solidFill>
-                <a:latin typeface="Calibri"/>
-                <a:ea typeface="Calibri"/>
-                <a:cs typeface="Calibri"/>
-                <a:sym typeface="Calibri"/>
-              </a:rPr>
-              <a:t>a skim isn't review.</a:t>
-            </a:r>
-            <a:endParaRPr sz="2000" b="0" i="0" u="none" strike="noStrike" cap="none">
-              <a:solidFill>
-                <a:srgbClr val="666677"/>
-              </a:solidFill>
-              <a:latin typeface="Calibri"/>
-              <a:ea typeface="Calibri"/>
-              <a:cs typeface="Calibri"/>
-              <a:sym typeface="Calibri"/>
-            </a:endParaRPr>
-          </a:p>
-          <a:p>
-            <a:pPr marL="457200" marR="0" lvl="1" indent="0" algn="l" rtl="0">
-              <a:spcBef>
-                <a:spcPts val="600"/>
-              </a:spcBef>
-              <a:spcAft>
-                <a:spcPts val="0"/>
-              </a:spcAft>
-              <a:buNone/>
-            </a:pPr>
-            <a:r>
-              <a:rPr lang="en-US" sz="2000" b="0" i="0" u="none" strike="noStrike" cap="none">
-                <a:solidFill>
-                  <a:srgbClr val="666677"/>
-                </a:solidFill>
-                <a:latin typeface="Calibri"/>
-                <a:ea typeface="Calibri"/>
-                <a:cs typeface="Calibri"/>
-                <a:sym typeface="Calibri"/>
-              </a:rPr>
-              <a:t>  </a:t>
-            </a:r>
-            <a:r>
-              <a:rPr lang="en-US" sz="2000" b="1">
-                <a:solidFill>
-                  <a:srgbClr val="666677"/>
-                </a:solidFill>
-                <a:latin typeface="Calibri"/>
-                <a:ea typeface="Calibri"/>
-                <a:cs typeface="Calibri"/>
-                <a:sym typeface="Calibri"/>
-              </a:rPr>
-              <a:t>Scoped.</a:t>
-            </a:r>
-            <a:r>
-              <a:rPr lang="en-US" sz="2000">
-                <a:solidFill>
-                  <a:srgbClr val="666677"/>
-                </a:solidFill>
-                <a:latin typeface="Calibri"/>
-                <a:ea typeface="Calibri"/>
-                <a:cs typeface="Calibri"/>
-                <a:sym typeface="Calibri"/>
-              </a:rPr>
-              <a:t> One thing. "Add login" or "fix the message-ordering bug"</a:t>
-            </a:r>
-            <a:endParaRPr>
-              <a:solidFill>
-                <a:schemeClr val="dk1"/>
-              </a:solidFill>
-            </a:endParaRPr>
-          </a:p>
-          <a:p>
-            <a:pPr marL="457200" lvl="1" indent="0" algn="l" rtl="0">
-              <a:spcBef>
-                <a:spcPts val="600"/>
-              </a:spcBef>
-              <a:spcAft>
-                <a:spcPts val="0"/>
-              </a:spcAft>
-              <a:buClr>
-                <a:schemeClr val="dk1"/>
-              </a:buClr>
-              <a:buFont typeface="Arial"/>
-              <a:buNone/>
-            </a:pPr>
-            <a:r>
-              <a:rPr lang="en-US" sz="2000">
-                <a:solidFill>
-                  <a:srgbClr val="666677"/>
-                </a:solidFill>
-                <a:latin typeface="Calibri"/>
-                <a:ea typeface="Calibri"/>
-                <a:cs typeface="Calibri"/>
-                <a:sym typeface="Calibri"/>
-              </a:rPr>
-              <a:t>    not "add login + refactor the database + new color scheme."</a:t>
-            </a:r>
-            <a:endParaRPr sz="2000" b="1">
-              <a:solidFill>
-                <a:srgbClr val="666677"/>
-              </a:solidFill>
-              <a:latin typeface="Calibri"/>
-              <a:ea typeface="Calibri"/>
-              <a:cs typeface="Calibri"/>
-              <a:sym typeface="Calibri"/>
-            </a:endParaRPr>
-          </a:p>
-          <a:p>
-            <a:pPr marL="457200" marR="0" lvl="1" indent="0" algn="l" rtl="0">
-              <a:spcBef>
-                <a:spcPts val="600"/>
-              </a:spcBef>
-              <a:spcAft>
-                <a:spcPts val="0"/>
-              </a:spcAft>
-              <a:buNone/>
-            </a:pPr>
-            <a:r>
-              <a:rPr lang="en-US" sz="2000" b="0" i="0" u="none" strike="noStrike" cap="none">
-                <a:solidFill>
-                  <a:srgbClr val="666677"/>
-                </a:solidFill>
-                <a:latin typeface="Calibri"/>
-                <a:ea typeface="Calibri"/>
-                <a:cs typeface="Calibri"/>
-                <a:sym typeface="Calibri"/>
-              </a:rPr>
-              <a:t>  </a:t>
-            </a:r>
-            <a:r>
-              <a:rPr lang="en-US" sz="2000" b="1" i="0" u="none" strike="noStrike" cap="none">
-                <a:solidFill>
-                  <a:srgbClr val="666677"/>
-                </a:solidFill>
-                <a:latin typeface="Calibri"/>
-                <a:ea typeface="Calibri"/>
-                <a:cs typeface="Calibri"/>
-                <a:sym typeface="Calibri"/>
-              </a:rPr>
-              <a:t>Described.</a:t>
-            </a:r>
-            <a:r>
-              <a:rPr lang="en-US" sz="2000" b="0" i="0" u="none" strike="noStrike" cap="none">
-                <a:solidFill>
-                  <a:srgbClr val="666677"/>
-                </a:solidFill>
-                <a:latin typeface="Calibri"/>
-                <a:ea typeface="Calibri"/>
-                <a:cs typeface="Calibri"/>
-                <a:sym typeface="Calibri"/>
-              </a:rPr>
-              <a:t> A few sentences in the body: what changes, why,</a:t>
-            </a:r>
-            <a:endParaRPr/>
-          </a:p>
-          <a:p>
-            <a:pPr marL="457200" marR="0" lvl="1" indent="0" algn="l" rtl="0">
-              <a:spcBef>
-                <a:spcPts val="600"/>
-              </a:spcBef>
-              <a:spcAft>
-                <a:spcPts val="0"/>
-              </a:spcAft>
-              <a:buNone/>
-            </a:pPr>
-            <a:r>
-              <a:rPr lang="en-US" sz="2000" b="0" i="0" u="none" strike="noStrike" cap="none">
-                <a:solidFill>
-                  <a:srgbClr val="666677"/>
-                </a:solidFill>
-                <a:latin typeface="Calibri"/>
-                <a:ea typeface="Calibri"/>
-                <a:cs typeface="Calibri"/>
-                <a:sym typeface="Calibri"/>
-              </a:rPr>
-              <a:t>    and anything a reviewer should look at first.</a:t>
-            </a:r>
-            <a:endParaRPr/>
-          </a:p>
-          <a:p>
-            <a:pPr marL="457200" marR="0" lvl="1" indent="0" algn="l" rtl="0">
-              <a:spcBef>
-                <a:spcPts val="600"/>
-              </a:spcBef>
-              <a:spcAft>
-                <a:spcPts val="0"/>
-              </a:spcAft>
-              <a:buNone/>
-            </a:pPr>
-            <a:r>
-              <a:rPr lang="en-US" sz="2000" b="0" i="0" u="none" strike="noStrike" cap="none">
-                <a:solidFill>
-                  <a:srgbClr val="666677"/>
-                </a:solidFill>
-                <a:latin typeface="Calibri"/>
-                <a:ea typeface="Calibri"/>
-                <a:cs typeface="Calibri"/>
-                <a:sym typeface="Calibri"/>
-              </a:rPr>
-              <a:t>  </a:t>
-            </a:r>
-            <a:r>
-              <a:rPr lang="en-US" sz="2000" b="1" i="0" u="none" strike="noStrike" cap="none">
-                <a:solidFill>
-                  <a:srgbClr val="666677"/>
-                </a:solidFill>
-                <a:latin typeface="Calibri"/>
-                <a:ea typeface="Calibri"/>
-                <a:cs typeface="Calibri"/>
-                <a:sym typeface="Calibri"/>
-              </a:rPr>
-              <a:t>Green.</a:t>
-            </a:r>
-            <a:r>
-              <a:rPr lang="en-US" sz="2000" b="0" i="0" u="none" strike="noStrike" cap="none">
-                <a:solidFill>
-                  <a:srgbClr val="666677"/>
-                </a:solidFill>
-                <a:latin typeface="Calibri"/>
-                <a:ea typeface="Calibri"/>
-                <a:cs typeface="Calibri"/>
-                <a:sym typeface="Calibri"/>
-              </a:rPr>
-              <a:t> CI passes before you ask anyone to look.</a:t>
-            </a:r>
-            <a:endParaRPr/>
-          </a:p>
-          <a:p>
-            <a:pPr marL="457200" marR="0" lvl="1" indent="0" algn="l" rtl="0">
-              <a:spcBef>
-                <a:spcPts val="600"/>
-              </a:spcBef>
-              <a:spcAft>
-                <a:spcPts val="0"/>
-              </a:spcAft>
-              <a:buNone/>
-            </a:pPr>
             <a:endParaRPr/>
           </a:p>
         </p:txBody>
@@ -34369,711 +33078,6 @@
         <p14:creationId xmlns:p14="http://schemas.microsoft.com/office/powerpoint/2010/main" val="566189946"/>
       </p:ext>
     </p:extLst>
-  </p:cSld>
-  <p:clrMapOvr>
-    <a:masterClrMapping/>
-  </p:clrMapOvr>
-</p:sld>
-</file>
-
-<file path=ppt/slides/slide4.xml><?xml version="1.0" encoding="utf-8"?>
-<p:sld xmlns:a="http://schemas.openxmlformats.org/drawingml/2006/main" xmlns:r="http://schemas.openxmlformats.org/officeDocument/2006/relationships" xmlns:p="http://schemas.openxmlformats.org/presentationml/2006/main">
-  <p:cSld>
-    <p:bg>
-      <p:bgPr>
-        <a:solidFill>
-          <a:srgbClr val="FFFFFF"/>
-        </a:solidFill>
-        <a:effectLst/>
-      </p:bgPr>
-    </p:bg>
-    <p:spTree>
-      <p:nvGrpSpPr>
-        <p:cNvPr id="1" name="Shape 109"/>
-        <p:cNvGrpSpPr/>
-        <p:nvPr/>
-      </p:nvGrpSpPr>
-      <p:grpSpPr>
-        <a:xfrm>
-          <a:off x="0" y="0"/>
-          <a:ext cx="0" cy="0"/>
-          <a:chOff x="0" y="0"/>
-          <a:chExt cx="0" cy="0"/>
-        </a:xfrm>
-      </p:grpSpPr>
-      <p:sp>
-        <p:nvSpPr>
-          <p:cNvPr id="110" name="Google Shape;110;g3e498caeefa_0_526"/>
-          <p:cNvSpPr txBox="1"/>
-          <p:nvPr/>
-        </p:nvSpPr>
-        <p:spPr>
-          <a:xfrm>
-            <a:off x="731520" y="274320"/>
-            <a:ext cx="10728600" cy="800400"/>
-          </a:xfrm>
-          <a:prstGeom prst="rect">
-            <a:avLst/>
-          </a:prstGeom>
-          <a:noFill/>
-          <a:ln>
-            <a:noFill/>
-          </a:ln>
-        </p:spPr>
-        <p:txBody>
-          <a:bodyPr spcFirstLastPara="1" wrap="square" lIns="91425" tIns="45700" rIns="91425" bIns="45700" anchor="t" anchorCtr="0">
-            <a:spAutoFit/>
-          </a:bodyPr>
-          <a:lstStyle/>
-          <a:p>
-            <a:pPr marL="0" marR="0" lvl="0" indent="0" algn="l" rtl="0">
-              <a:spcBef>
-                <a:spcPts val="0"/>
-              </a:spcBef>
-              <a:spcAft>
-                <a:spcPts val="0"/>
-              </a:spcAft>
-              <a:buNone/>
-            </a:pPr>
-            <a:r>
-              <a:rPr lang="en-US" sz="1600" b="1" i="0" u="none" strike="noStrike" cap="none">
-                <a:solidFill>
-                  <a:srgbClr val="FFFFFF"/>
-                </a:solidFill>
-                <a:latin typeface="Calibri"/>
-                <a:ea typeface="Calibri"/>
-                <a:cs typeface="Calibri"/>
-                <a:sym typeface="Calibri"/>
-              </a:rPr>
-              <a:t>TRY IT  </a:t>
-            </a:r>
-            <a:endParaRPr/>
-          </a:p>
-          <a:p>
-            <a:pPr marL="0" marR="0" lvl="0" indent="0" algn="l" rtl="0">
-              <a:spcBef>
-                <a:spcPts val="0"/>
-              </a:spcBef>
-              <a:spcAft>
-                <a:spcPts val="0"/>
-              </a:spcAft>
-              <a:buNone/>
-            </a:pPr>
-            <a:r>
-              <a:rPr lang="en-US" sz="3000" b="1">
-                <a:solidFill>
-                  <a:srgbClr val="1A1A2E"/>
-                </a:solidFill>
-                <a:latin typeface="Calibri"/>
-                <a:ea typeface="Calibri"/>
-                <a:cs typeface="Calibri"/>
-                <a:sym typeface="Calibri"/>
-              </a:rPr>
-              <a:t>Write the workflow for your final project</a:t>
-            </a:r>
-            <a:endParaRPr/>
-          </a:p>
-        </p:txBody>
-      </p:sp>
-      <p:sp>
-        <p:nvSpPr>
-          <p:cNvPr id="111" name="Google Shape;111;g3e498caeefa_0_526"/>
-          <p:cNvSpPr/>
-          <p:nvPr/>
-        </p:nvSpPr>
-        <p:spPr>
-          <a:xfrm>
-            <a:off x="640080" y="228600"/>
-            <a:ext cx="1097400" cy="365700"/>
-          </a:xfrm>
-          <a:prstGeom prst="roundRect">
-            <a:avLst>
-              <a:gd name="adj" fmla="val 16667"/>
-            </a:avLst>
-          </a:prstGeom>
-          <a:solidFill>
-            <a:srgbClr val="5B21B6"/>
-          </a:solidFill>
-          <a:ln>
-            <a:noFill/>
-          </a:ln>
-          <a:effectLst>
-            <a:outerShdw blurRad="40000" dist="23000" dir="5400000" rotWithShape="0">
-              <a:srgbClr val="000000">
-                <a:alpha val="34900"/>
-              </a:srgbClr>
-            </a:outerShdw>
-          </a:effectLst>
-        </p:spPr>
-        <p:txBody>
-          <a:bodyPr spcFirstLastPara="1" wrap="square" lIns="91425" tIns="45700" rIns="91425" bIns="45700" anchor="ctr" anchorCtr="0">
-            <a:noAutofit/>
-          </a:bodyPr>
-          <a:lstStyle/>
-          <a:p>
-            <a:pPr marL="0" marR="0" lvl="0" indent="0" algn="ctr" rtl="0">
-              <a:spcBef>
-                <a:spcPts val="0"/>
-              </a:spcBef>
-              <a:spcAft>
-                <a:spcPts val="0"/>
-              </a:spcAft>
-              <a:buNone/>
-            </a:pPr>
-            <a:endParaRPr sz="1800">
-              <a:solidFill>
-                <a:schemeClr val="dk1"/>
-              </a:solidFill>
-              <a:latin typeface="Calibri"/>
-              <a:ea typeface="Calibri"/>
-              <a:cs typeface="Calibri"/>
-              <a:sym typeface="Calibri"/>
-            </a:endParaRPr>
-          </a:p>
-        </p:txBody>
-      </p:sp>
-      <p:sp>
-        <p:nvSpPr>
-          <p:cNvPr id="112" name="Google Shape;112;g3e498caeefa_0_526"/>
-          <p:cNvSpPr/>
-          <p:nvPr/>
-        </p:nvSpPr>
-        <p:spPr>
-          <a:xfrm>
-            <a:off x="731520" y="1371600"/>
-            <a:ext cx="10728600" cy="5029200"/>
-          </a:xfrm>
-          <a:prstGeom prst="roundRect">
-            <a:avLst>
-              <a:gd name="adj" fmla="val 16667"/>
-            </a:avLst>
-          </a:prstGeom>
-          <a:solidFill>
-            <a:srgbClr val="F0F0F4"/>
-          </a:solidFill>
-          <a:ln w="12700" cap="flat" cmpd="sng">
-            <a:solidFill>
-              <a:srgbClr val="EEEEF0"/>
-            </a:solidFill>
-            <a:prstDash val="solid"/>
-            <a:round/>
-            <a:headEnd type="none" w="sm" len="sm"/>
-            <a:tailEnd type="none" w="sm" len="sm"/>
-          </a:ln>
-          <a:effectLst>
-            <a:outerShdw blurRad="40000" dist="23000" dir="5400000" rotWithShape="0">
-              <a:srgbClr val="000000">
-                <a:alpha val="34900"/>
-              </a:srgbClr>
-            </a:outerShdw>
-          </a:effectLst>
-        </p:spPr>
-        <p:txBody>
-          <a:bodyPr spcFirstLastPara="1" wrap="square" lIns="91425" tIns="45700" rIns="91425" bIns="45700" anchor="ctr" anchorCtr="0">
-            <a:noAutofit/>
-          </a:bodyPr>
-          <a:lstStyle/>
-          <a:p>
-            <a:pPr marL="0" marR="0" lvl="0" indent="0" algn="ctr" rtl="0">
-              <a:spcBef>
-                <a:spcPts val="0"/>
-              </a:spcBef>
-              <a:spcAft>
-                <a:spcPts val="0"/>
-              </a:spcAft>
-              <a:buNone/>
-            </a:pPr>
-            <a:endParaRPr sz="1800">
-              <a:solidFill>
-                <a:schemeClr val="dk1"/>
-              </a:solidFill>
-              <a:latin typeface="Calibri"/>
-              <a:ea typeface="Calibri"/>
-              <a:cs typeface="Calibri"/>
-              <a:sym typeface="Calibri"/>
-            </a:endParaRPr>
-          </a:p>
-        </p:txBody>
-      </p:sp>
-      <p:sp>
-        <p:nvSpPr>
-          <p:cNvPr id="113" name="Google Shape;113;g3e498caeefa_0_526"/>
-          <p:cNvSpPr txBox="1"/>
-          <p:nvPr/>
-        </p:nvSpPr>
-        <p:spPr>
-          <a:xfrm>
-            <a:off x="1005840" y="1554480"/>
-            <a:ext cx="10179900" cy="4684500"/>
-          </a:xfrm>
-          <a:prstGeom prst="rect">
-            <a:avLst/>
-          </a:prstGeom>
-          <a:noFill/>
-          <a:ln>
-            <a:noFill/>
-          </a:ln>
-        </p:spPr>
-        <p:txBody>
-          <a:bodyPr spcFirstLastPara="1" wrap="square" lIns="91425" tIns="45700" rIns="91425" bIns="45700" anchor="t" anchorCtr="0">
-            <a:spAutoFit/>
-          </a:bodyPr>
-          <a:lstStyle/>
-          <a:p>
-            <a:pPr marL="0" marR="0" lvl="0" indent="0" algn="l" rtl="0">
-              <a:spcBef>
-                <a:spcPts val="0"/>
-              </a:spcBef>
-              <a:spcAft>
-                <a:spcPts val="0"/>
-              </a:spcAft>
-              <a:buNone/>
-            </a:pPr>
-            <a:r>
-              <a:rPr lang="en-US" sz="1500" b="1">
-                <a:solidFill>
-                  <a:srgbClr val="333344"/>
-                </a:solidFill>
-                <a:latin typeface="Courier New"/>
-                <a:ea typeface="Courier New"/>
-                <a:cs typeface="Courier New"/>
-                <a:sym typeface="Courier New"/>
-              </a:rPr>
-              <a:t># Goal: a .github/workflows/test.yml that runs pytest on every</a:t>
-            </a:r>
-            <a:endParaRPr sz="1600"/>
-          </a:p>
-          <a:p>
-            <a:pPr marL="0" marR="0" lvl="0" indent="0" algn="l" rtl="0">
-              <a:spcBef>
-                <a:spcPts val="200"/>
-              </a:spcBef>
-              <a:spcAft>
-                <a:spcPts val="0"/>
-              </a:spcAft>
-              <a:buNone/>
-            </a:pPr>
-            <a:r>
-              <a:rPr lang="en-US" sz="1500" b="1">
-                <a:solidFill>
-                  <a:srgbClr val="333344"/>
-                </a:solidFill>
-                <a:latin typeface="Courier New"/>
-                <a:ea typeface="Courier New"/>
-                <a:cs typeface="Courier New"/>
-                <a:sym typeface="Courier New"/>
-              </a:rPr>
-              <a:t># push and on every pull request, using Python 3.12.</a:t>
-            </a:r>
-            <a:endParaRPr sz="1600"/>
-          </a:p>
-          <a:p>
-            <a:pPr marL="0" marR="0" lvl="0" indent="0" algn="l" rtl="0">
-              <a:spcBef>
-                <a:spcPts val="200"/>
-              </a:spcBef>
-              <a:spcAft>
-                <a:spcPts val="0"/>
-              </a:spcAft>
-              <a:buNone/>
-            </a:pPr>
-            <a:r>
-              <a:rPr lang="en-US" sz="1500" b="1">
-                <a:solidFill>
-                  <a:srgbClr val="333344"/>
-                </a:solidFill>
-                <a:latin typeface="Courier New"/>
-                <a:ea typeface="Courier New"/>
-                <a:cs typeface="Courier New"/>
-                <a:sym typeface="Courier New"/>
-              </a:rPr>
-              <a:t># Fill in the blanks.</a:t>
-            </a:r>
-            <a:endParaRPr sz="1600"/>
-          </a:p>
-          <a:p>
-            <a:pPr marL="0" marR="0" lvl="0" indent="0" algn="l" rtl="0">
-              <a:spcBef>
-                <a:spcPts val="200"/>
-              </a:spcBef>
-              <a:spcAft>
-                <a:spcPts val="0"/>
-              </a:spcAft>
-              <a:buNone/>
-            </a:pPr>
-            <a:endParaRPr sz="1500" b="1">
-              <a:solidFill>
-                <a:srgbClr val="333344"/>
-              </a:solidFill>
-              <a:latin typeface="Courier New"/>
-              <a:ea typeface="Courier New"/>
-              <a:cs typeface="Courier New"/>
-              <a:sym typeface="Courier New"/>
-            </a:endParaRPr>
-          </a:p>
-          <a:p>
-            <a:pPr marL="0" marR="0" lvl="0" indent="0" algn="l" rtl="0">
-              <a:spcBef>
-                <a:spcPts val="200"/>
-              </a:spcBef>
-              <a:spcAft>
-                <a:spcPts val="0"/>
-              </a:spcAft>
-              <a:buNone/>
-            </a:pPr>
-            <a:r>
-              <a:rPr lang="en-US" sz="1500" b="1">
-                <a:solidFill>
-                  <a:srgbClr val="333344"/>
-                </a:solidFill>
-                <a:latin typeface="Courier New"/>
-                <a:ea typeface="Courier New"/>
-                <a:cs typeface="Courier New"/>
-                <a:sym typeface="Courier New"/>
-              </a:rPr>
-              <a:t>name: Tests</a:t>
-            </a:r>
-            <a:endParaRPr sz="1500" b="1">
-              <a:solidFill>
-                <a:srgbClr val="333344"/>
-              </a:solidFill>
-              <a:latin typeface="Courier New"/>
-              <a:ea typeface="Courier New"/>
-              <a:cs typeface="Courier New"/>
-              <a:sym typeface="Courier New"/>
-            </a:endParaRPr>
-          </a:p>
-          <a:p>
-            <a:pPr marL="0" marR="0" lvl="0" indent="0" algn="l" rtl="0">
-              <a:spcBef>
-                <a:spcPts val="200"/>
-              </a:spcBef>
-              <a:spcAft>
-                <a:spcPts val="0"/>
-              </a:spcAft>
-              <a:buNone/>
-            </a:pPr>
-            <a:r>
-              <a:rPr lang="en-US" sz="1500" b="1">
-                <a:solidFill>
-                  <a:srgbClr val="B0B0C0"/>
-                </a:solidFill>
-                <a:latin typeface="Courier New"/>
-                <a:ea typeface="Courier New"/>
-                <a:cs typeface="Courier New"/>
-                <a:sym typeface="Courier New"/>
-              </a:rPr>
-              <a:t>on: [________, ________]</a:t>
-            </a:r>
-            <a:endParaRPr sz="1600"/>
-          </a:p>
-          <a:p>
-            <a:pPr marL="0" marR="0" lvl="0" indent="0" algn="l" rtl="0">
-              <a:spcBef>
-                <a:spcPts val="200"/>
-              </a:spcBef>
-              <a:spcAft>
-                <a:spcPts val="0"/>
-              </a:spcAft>
-              <a:buNone/>
-            </a:pPr>
-            <a:endParaRPr sz="1500" b="1">
-              <a:solidFill>
-                <a:srgbClr val="B0B0C0"/>
-              </a:solidFill>
-              <a:latin typeface="Courier New"/>
-              <a:ea typeface="Courier New"/>
-              <a:cs typeface="Courier New"/>
-              <a:sym typeface="Courier New"/>
-            </a:endParaRPr>
-          </a:p>
-          <a:p>
-            <a:pPr marL="0" marR="0" lvl="0" indent="0" algn="l" rtl="0">
-              <a:spcBef>
-                <a:spcPts val="200"/>
-              </a:spcBef>
-              <a:spcAft>
-                <a:spcPts val="0"/>
-              </a:spcAft>
-              <a:buNone/>
-            </a:pPr>
-            <a:r>
-              <a:rPr lang="en-US" sz="1500" b="1">
-                <a:solidFill>
-                  <a:srgbClr val="333344"/>
-                </a:solidFill>
-                <a:latin typeface="Courier New"/>
-                <a:ea typeface="Courier New"/>
-                <a:cs typeface="Courier New"/>
-                <a:sym typeface="Courier New"/>
-              </a:rPr>
-              <a:t>jobs:</a:t>
-            </a:r>
-            <a:endParaRPr sz="1600"/>
-          </a:p>
-          <a:p>
-            <a:pPr marL="0" marR="0" lvl="0" indent="0" algn="l" rtl="0">
-              <a:spcBef>
-                <a:spcPts val="200"/>
-              </a:spcBef>
-              <a:spcAft>
-                <a:spcPts val="0"/>
-              </a:spcAft>
-              <a:buNone/>
-            </a:pPr>
-            <a:r>
-              <a:rPr lang="en-US" sz="1500" b="1">
-                <a:solidFill>
-                  <a:srgbClr val="333344"/>
-                </a:solidFill>
-                <a:latin typeface="Courier New"/>
-                <a:ea typeface="Courier New"/>
-                <a:cs typeface="Courier New"/>
-                <a:sym typeface="Courier New"/>
-              </a:rPr>
-              <a:t>  test:</a:t>
-            </a:r>
-            <a:endParaRPr sz="1600"/>
-          </a:p>
-          <a:p>
-            <a:pPr marL="0" marR="0" lvl="0" indent="0" algn="l" rtl="0">
-              <a:spcBef>
-                <a:spcPts val="200"/>
-              </a:spcBef>
-              <a:spcAft>
-                <a:spcPts val="0"/>
-              </a:spcAft>
-              <a:buNone/>
-            </a:pPr>
-            <a:r>
-              <a:rPr lang="en-US" sz="1500" b="1">
-                <a:solidFill>
-                  <a:srgbClr val="B0B0C0"/>
-                </a:solidFill>
-                <a:latin typeface="Courier New"/>
-                <a:ea typeface="Courier New"/>
-                <a:cs typeface="Courier New"/>
-                <a:sym typeface="Courier New"/>
-              </a:rPr>
-              <a:t>    runs-on: ________</a:t>
-            </a:r>
-            <a:endParaRPr sz="1500" b="1">
-              <a:solidFill>
-                <a:srgbClr val="B0B0C0"/>
-              </a:solidFill>
-              <a:latin typeface="Courier New"/>
-              <a:ea typeface="Courier New"/>
-              <a:cs typeface="Courier New"/>
-              <a:sym typeface="Courier New"/>
-            </a:endParaRPr>
-          </a:p>
-          <a:p>
-            <a:pPr marL="0" marR="0" lvl="0" indent="0" algn="l" rtl="0">
-              <a:spcBef>
-                <a:spcPts val="200"/>
-              </a:spcBef>
-              <a:spcAft>
-                <a:spcPts val="0"/>
-              </a:spcAft>
-              <a:buNone/>
-            </a:pPr>
-            <a:r>
-              <a:rPr lang="en-US" sz="1500" b="1">
-                <a:solidFill>
-                  <a:srgbClr val="333344"/>
-                </a:solidFill>
-                <a:latin typeface="Courier New"/>
-                <a:ea typeface="Courier New"/>
-                <a:cs typeface="Courier New"/>
-                <a:sym typeface="Courier New"/>
-              </a:rPr>
-              <a:t>    steps:</a:t>
-            </a:r>
-            <a:endParaRPr sz="1600"/>
-          </a:p>
-          <a:p>
-            <a:pPr marL="0" marR="0" lvl="0" indent="0" algn="l" rtl="0">
-              <a:spcBef>
-                <a:spcPts val="200"/>
-              </a:spcBef>
-              <a:spcAft>
-                <a:spcPts val="0"/>
-              </a:spcAft>
-              <a:buNone/>
-            </a:pPr>
-            <a:r>
-              <a:rPr lang="en-US" sz="1500" b="1">
-                <a:solidFill>
-                  <a:srgbClr val="B0B0C0"/>
-                </a:solidFill>
-                <a:latin typeface="Courier New"/>
-                <a:ea typeface="Courier New"/>
-                <a:cs typeface="Courier New"/>
-                <a:sym typeface="Courier New"/>
-              </a:rPr>
-              <a:t>      - uses: actions/________@v6</a:t>
-            </a:r>
-            <a:endParaRPr sz="1500" b="1">
-              <a:solidFill>
-                <a:srgbClr val="B0B0C0"/>
-              </a:solidFill>
-              <a:latin typeface="Courier New"/>
-              <a:ea typeface="Courier New"/>
-              <a:cs typeface="Courier New"/>
-              <a:sym typeface="Courier New"/>
-            </a:endParaRPr>
-          </a:p>
-          <a:p>
-            <a:pPr marL="0" marR="0" lvl="0" indent="0" algn="l" rtl="0">
-              <a:spcBef>
-                <a:spcPts val="200"/>
-              </a:spcBef>
-              <a:spcAft>
-                <a:spcPts val="0"/>
-              </a:spcAft>
-              <a:buNone/>
-            </a:pPr>
-            <a:r>
-              <a:rPr lang="en-US" sz="1500" b="1">
-                <a:solidFill>
-                  <a:srgbClr val="333344"/>
-                </a:solidFill>
-                <a:latin typeface="Courier New"/>
-                <a:ea typeface="Courier New"/>
-                <a:cs typeface="Courier New"/>
-                <a:sym typeface="Courier New"/>
-              </a:rPr>
-              <a:t>      - uses: actions/setup-python@v6</a:t>
-            </a:r>
-            <a:endParaRPr sz="1600"/>
-          </a:p>
-          <a:p>
-            <a:pPr marL="0" marR="0" lvl="0" indent="0" algn="l" rtl="0">
-              <a:spcBef>
-                <a:spcPts val="200"/>
-              </a:spcBef>
-              <a:spcAft>
-                <a:spcPts val="0"/>
-              </a:spcAft>
-              <a:buNone/>
-            </a:pPr>
-            <a:r>
-              <a:rPr lang="en-US" sz="1500" b="1">
-                <a:solidFill>
-                  <a:srgbClr val="333344"/>
-                </a:solidFill>
-                <a:latin typeface="Courier New"/>
-                <a:ea typeface="Courier New"/>
-                <a:cs typeface="Courier New"/>
-                <a:sym typeface="Courier New"/>
-              </a:rPr>
-              <a:t>        with:</a:t>
-            </a:r>
-            <a:endParaRPr sz="1600"/>
-          </a:p>
-          <a:p>
-            <a:pPr marL="0" marR="0" lvl="0" indent="0" algn="l" rtl="0">
-              <a:spcBef>
-                <a:spcPts val="200"/>
-              </a:spcBef>
-              <a:spcAft>
-                <a:spcPts val="0"/>
-              </a:spcAft>
-              <a:buNone/>
-            </a:pPr>
-            <a:r>
-              <a:rPr lang="en-US" sz="1500" b="1">
-                <a:solidFill>
-                  <a:srgbClr val="B0B0C0"/>
-                </a:solidFill>
-                <a:latin typeface="Courier New"/>
-                <a:ea typeface="Courier New"/>
-                <a:cs typeface="Courier New"/>
-                <a:sym typeface="Courier New"/>
-              </a:rPr>
-              <a:t>          python-version: ________</a:t>
-            </a:r>
-            <a:endParaRPr sz="1600"/>
-          </a:p>
-          <a:p>
-            <a:pPr marL="0" marR="0" lvl="0" indent="0" algn="l" rtl="0">
-              <a:spcBef>
-                <a:spcPts val="200"/>
-              </a:spcBef>
-              <a:spcAft>
-                <a:spcPts val="0"/>
-              </a:spcAft>
-              <a:buNone/>
-            </a:pPr>
-            <a:endParaRPr sz="1500" b="1">
-              <a:solidFill>
-                <a:srgbClr val="B0B0C0"/>
-              </a:solidFill>
-              <a:latin typeface="Courier New"/>
-              <a:ea typeface="Courier New"/>
-              <a:cs typeface="Courier New"/>
-              <a:sym typeface="Courier New"/>
-            </a:endParaRPr>
-          </a:p>
-          <a:p>
-            <a:pPr marL="0" marR="0" lvl="0" indent="0" algn="l" rtl="0">
-              <a:spcBef>
-                <a:spcPts val="200"/>
-              </a:spcBef>
-              <a:spcAft>
-                <a:spcPts val="0"/>
-              </a:spcAft>
-              <a:buNone/>
-            </a:pPr>
-            <a:r>
-              <a:rPr lang="en-US" sz="1500" b="1">
-                <a:solidFill>
-                  <a:srgbClr val="B0B0C0"/>
-                </a:solidFill>
-                <a:latin typeface="Courier New"/>
-                <a:ea typeface="Courier New"/>
-                <a:cs typeface="Courier New"/>
-                <a:sym typeface="Courier New"/>
-              </a:rPr>
-              <a:t>      - run: _______________________</a:t>
-            </a:r>
-            <a:endParaRPr sz="1500" b="1">
-              <a:solidFill>
-                <a:srgbClr val="B0B0C0"/>
-              </a:solidFill>
-              <a:latin typeface="Courier New"/>
-              <a:ea typeface="Courier New"/>
-              <a:cs typeface="Courier New"/>
-              <a:sym typeface="Courier New"/>
-            </a:endParaRPr>
-          </a:p>
-          <a:p>
-            <a:pPr marL="0" marR="0" lvl="0" indent="0" algn="l" rtl="0">
-              <a:spcBef>
-                <a:spcPts val="200"/>
-              </a:spcBef>
-              <a:spcAft>
-                <a:spcPts val="0"/>
-              </a:spcAft>
-              <a:buNone/>
-            </a:pPr>
-            <a:r>
-              <a:rPr lang="en-US" sz="1500" b="1">
-                <a:solidFill>
-                  <a:srgbClr val="B0B0C0"/>
-                </a:solidFill>
-                <a:latin typeface="Courier New"/>
-                <a:ea typeface="Courier New"/>
-                <a:cs typeface="Courier New"/>
-                <a:sym typeface="Courier New"/>
-              </a:rPr>
-              <a:t>      - run: ________</a:t>
-            </a:r>
-            <a:endParaRPr sz="1600"/>
-          </a:p>
-        </p:txBody>
-      </p:sp>
-    </p:spTree>
   </p:cSld>
   <p:clrMapOvr>
     <a:masterClrMapping/>

--- a/lectures/Lecture 9.1 - Concurrency.pptx
+++ b/lectures/Lecture 9.1 - Concurrency.pptx
@@ -1015,20 +1015,9 @@
           </a:bodyPr>
           <a:lstStyle/>
           <a:p>
-            <a:pPr marL="0" lvl="0" indent="0" algn="l" rtl="0">
-              <a:spcBef>
-                <a:spcPts val="0"/>
-              </a:spcBef>
-              <a:spcAft>
-                <a:spcPts val="0"/>
-              </a:spcAft>
-              <a:buNone/>
-            </a:pPr>
-            <a:r>
-              <a:rPr lang="en-US" dirty="0"/>
-              <a:t>Walk this one slowly, line by line. The key moment is the second row: T2 reads the balance and sees 100, not 90, because T1 hasn't written its update yet. Both then compute 90 independently and both write 90, and the second write quietly overwrites the first. One whole withdrawal leaves no trace. This is about as common as concurrency bugs get in web apps, so it's worth making sure everyone actually sees the interleaving before moving on.</a:t>
-            </a:r>
-            <a:endParaRPr dirty="0"/>
+            <a:r>
+              <a:t>Walk line by line. Key row: T2 sees 100, T1 hasn't written yet.</a:t>
+            </a:r>
           </a:p>
         </p:txBody>
       </p:sp>
@@ -1173,20 +1162,9 @@
           </a:bodyPr>
           <a:lstStyle/>
           <a:p>
-            <a:pPr marL="0" lvl="0" indent="0" algn="l" rtl="0">
-              <a:spcBef>
-                <a:spcPts val="0"/>
-              </a:spcBef>
-              <a:spcAft>
-                <a:spcPts val="0"/>
-              </a:spcAft>
-              <a:buNone/>
-            </a:pPr>
-            <a:r>
-              <a:rPr lang="en-US" dirty="0"/>
-              <a:t>Walk this one slowly, line by line. The key moment is the second row: T2 reads the balance and sees 100, not 90, because T1 hasn't written its update yet. Both then compute 90 independently and both write 90, and the second write quietly overwrites the first. One whole withdrawal leaves no trace. This is about as common as concurrency bugs get in web apps, so it's worth making sure everyone actually sees the interleaving before moving on.</a:t>
-            </a:r>
-            <a:endParaRPr dirty="0"/>
+            <a:r>
+              <a:t>Walk line by line. Key row: T2 sees 100, T1 hasn't written yet.</a:t>
+            </a:r>
           </a:p>
         </p:txBody>
       </p:sp>
@@ -1331,20 +1309,9 @@
           </a:bodyPr>
           <a:lstStyle/>
           <a:p>
-            <a:pPr marL="0" lvl="0" indent="0" algn="l" rtl="0">
-              <a:spcBef>
-                <a:spcPts val="0"/>
-              </a:spcBef>
-              <a:spcAft>
-                <a:spcPts val="0"/>
-              </a:spcAft>
-              <a:buNone/>
-            </a:pPr>
-            <a:r>
-              <a:rPr lang="en-US" dirty="0"/>
-              <a:t>Walk this one slowly, line by line. The key moment is the second row: T2 reads the balance and sees 100, not 90, because T1 hasn't written its update yet. Both then compute 90 independently and both write 90, and the second write quietly overwrites the first. One whole withdrawal leaves no trace. This is about as common as concurrency bugs get in web apps, so it's worth making sure everyone actually sees the interleaving before moving on.</a:t>
-            </a:r>
-            <a:endParaRPr dirty="0"/>
+            <a:r>
+              <a:t>Walk line by line. Key row: T2 sees 100, T1 hasn't written yet.</a:t>
+            </a:r>
           </a:p>
         </p:txBody>
       </p:sp>
@@ -1489,20 +1456,9 @@
           </a:bodyPr>
           <a:lstStyle/>
           <a:p>
-            <a:pPr marL="0" lvl="0" indent="0" algn="l" rtl="0">
-              <a:spcBef>
-                <a:spcPts val="0"/>
-              </a:spcBef>
-              <a:spcAft>
-                <a:spcPts val="0"/>
-              </a:spcAft>
-              <a:buNone/>
-            </a:pPr>
-            <a:r>
-              <a:rPr lang="en-US" dirty="0"/>
-              <a:t>Walk this one slowly, line by line. The key moment is the second row: T2 reads the balance and sees 100, not 90, because T1 hasn't written its update yet. Both then compute 90 independently and both write 90, and the second write quietly overwrites the first. One whole withdrawal leaves no trace. This is about as common as concurrency bugs get in web apps, so it's worth making sure everyone actually sees the interleaving before moving on.</a:t>
-            </a:r>
-            <a:endParaRPr dirty="0"/>
+            <a:r>
+              <a:t>Walk line by line. Key row: T2 sees 100, T1 hasn't written yet.</a:t>
+            </a:r>
           </a:p>
         </p:txBody>
       </p:sp>
@@ -1647,20 +1603,9 @@
           </a:bodyPr>
           <a:lstStyle/>
           <a:p>
-            <a:pPr marL="0" lvl="0" indent="0" algn="l" rtl="0">
-              <a:spcBef>
-                <a:spcPts val="0"/>
-              </a:spcBef>
-              <a:spcAft>
-                <a:spcPts val="0"/>
-              </a:spcAft>
-              <a:buNone/>
-            </a:pPr>
-            <a:r>
-              <a:rPr lang="en-US" dirty="0"/>
-              <a:t>Naming the bug is the point of this slide. Once 'read-modify-write' is a shape you can name, you start spotting it everywhere: balance updates, inventory decrements, a vote counter, a like count, marking a row as done. Every one of those reads a value, computes a new one from it, and writes it back, and every one is vulnerable in exactly this way. The vocabulary is what makes the pattern visible, so say the name out loud a couple times.</a:t>
-            </a:r>
-            <a:endParaRPr dirty="0"/>
+            <a:r>
+              <a:t>Say 'read-modify-write' out loud twice.</a:t>
+            </a:r>
           </a:p>
         </p:txBody>
       </p:sp>
@@ -1805,20 +1750,9 @@
           </a:bodyPr>
           <a:lstStyle/>
           <a:p>
-            <a:pPr marL="0" lvl="0" indent="0" algn="l" rtl="0">
-              <a:spcBef>
-                <a:spcPts val="0"/>
-              </a:spcBef>
-              <a:spcAft>
-                <a:spcPts val="0"/>
-              </a:spcAft>
-              <a:buNone/>
-            </a:pPr>
-            <a:r>
-              <a:rPr lang="en-US" dirty="0"/>
-              <a:t>Naming the bug is the point of this slide. Once 'read-modify-write' is a shape you can name, you start spotting it everywhere: balance updates, inventory decrements, a vote counter, a like count, marking a row as done. Every one of those reads a value, computes a new one from it, and writes it back, and every one is vulnerable in exactly this way. The vocabulary is what makes the pattern visible, so say the name out loud a couple times.</a:t>
-            </a:r>
-            <a:endParaRPr dirty="0"/>
+            <a:r>
+              <a:t>Say 'read-modify-write' out loud twice.</a:t>
+            </a:r>
           </a:p>
         </p:txBody>
       </p:sp>
@@ -1963,20 +1897,9 @@
           </a:bodyPr>
           <a:lstStyle/>
           <a:p>
-            <a:pPr marL="0" lvl="0" indent="0" algn="l" rtl="0">
-              <a:spcBef>
-                <a:spcPts val="0"/>
-              </a:spcBef>
-              <a:spcAft>
-                <a:spcPts val="0"/>
-              </a:spcAft>
-              <a:buNone/>
-            </a:pPr>
-            <a:r>
-              <a:rPr lang="en-US" dirty="0"/>
-              <a:t>This is the generalization slide. The bank account makes it feel like a money thing, but it's a shared-state thing, and the gallery is here so they stop thinking 'I'm not writing a bank, I'm fine.' Worth pulling the second shape out explicitly: the bank is read-modify-write, but the store and the signup are check-then-act, where you check a condition (one in stock, name not taken) and act on it, and the condition stops being true in the gap. Same family of bug, slightly different smell.</a:t>
-            </a:r>
-            <a:endParaRPr dirty="0"/>
+            <a:r>
+              <a:t>Point out: store and signup are check-then-act, bank is read-modify-write.</a:t>
+            </a:r>
           </a:p>
         </p:txBody>
       </p:sp>
@@ -2121,20 +2044,9 @@
           </a:bodyPr>
           <a:lstStyle/>
           <a:p>
-            <a:pPr marL="0" lvl="0" indent="0" algn="l" rtl="0">
-              <a:spcBef>
-                <a:spcPts val="0"/>
-              </a:spcBef>
-              <a:spcAft>
-                <a:spcPts val="0"/>
-              </a:spcAft>
-              <a:buNone/>
-            </a:pPr>
-            <a:r>
-              <a:rPr lang="en-US" dirty="0"/>
-              <a:t>This is the reframe the whole lecture hangs on, and leading with the bug makes it land harder than asserting it cold - now the thesis is the answer to a question they actually have. Say it out loud twice, it comes back at the end. The 'your chat app barely has shared state' point is worth dwelling on: they haven't been bitten yet because appending messages doesn't really contend on a shared value, which is luck about the shape of the app rather than anything safe about the code. The first counter or balance they add changes that.</a:t>
-            </a:r>
-            <a:endParaRPr dirty="0"/>
+            <a:r>
+              <a:t>Say it twice, comes back at the end. Appends don't contend, first counter will.</a:t>
+            </a:r>
           </a:p>
         </p:txBody>
       </p:sp>
@@ -2278,22 +2190,7 @@
             <a:noAutofit/>
           </a:bodyPr>
           <a:lstStyle/>
-          <a:p>
-            <a:pPr marL="0" lvl="0" indent="0" algn="l" rtl="0">
-              <a:spcBef>
-                <a:spcPts val="0"/>
-              </a:spcBef>
-              <a:spcAft>
-                <a:spcPts val="0"/>
-              </a:spcAft>
-              <a:buNone/>
-            </a:pPr>
-            <a:r>
-              <a:rPr lang="en-US" dirty="0"/>
-              <a:t>Vocabulary section, now motivated by the bug. Everything downstream leans on process-vs-thread being clear, so don't rush it. They have a concrete bug in hand to attach the abstractions to.</a:t>
-            </a:r>
-            <a:endParaRPr dirty="0"/>
-          </a:p>
+          <a:p/>
         </p:txBody>
       </p:sp>
       <p:sp>
@@ -2437,20 +2334,9 @@
           </a:bodyPr>
           <a:lstStyle/>
           <a:p>
-            <a:pPr marL="0" lvl="0" indent="0" algn="l" rtl="0">
-              <a:spcBef>
-                <a:spcPts val="0"/>
-              </a:spcBef>
-              <a:spcAft>
-                <a:spcPts val="0"/>
-              </a:spcAft>
-              <a:buNone/>
-            </a:pPr>
-            <a:r>
-              <a:rPr lang="en-US" dirty="0"/>
-              <a:t>The distinction that matters here is that processes are isolated from each other while threads inside a single process share memory. That shared-memory property is what makes threads fast (no copying) and also what makes them dangerous (two threads stepping on the same variable). Both of those facts come from the same place, which is a nice thing to point out.</a:t>
-            </a:r>
-            <a:endParaRPr dirty="0"/>
+            <a:r>
+              <a:t>Shared memory: same reason threads are fast (no copying) and dangerous.</a:t>
+            </a:r>
           </a:p>
         </p:txBody>
       </p:sp>
@@ -2595,20 +2481,9 @@
           </a:bodyPr>
           <a:lstStyle/>
           <a:p>
-            <a:pPr marL="0" lvl="0" indent="0" algn="l" rtl="0">
-              <a:spcBef>
-                <a:spcPts val="0"/>
-              </a:spcBef>
-              <a:spcAft>
-                <a:spcPts val="0"/>
-              </a:spcAft>
-              <a:buNone/>
-            </a:pPr>
-            <a:r>
-              <a:rPr lang="en-US" dirty="0"/>
-              <a:t>The distinction that matters here is that processes are isolated from each other while threads inside a single process share memory. That shared-memory property is what makes threads fast (no copying) and also what makes them dangerous (two threads stepping on the same variable). Both of those facts come from the same place, which is a nice thing to point out.</a:t>
-            </a:r>
-            <a:endParaRPr dirty="0"/>
+            <a:r>
+              <a:t>Shared memory: same reason threads are fast (no copying) and dangerous.</a:t>
+            </a:r>
           </a:p>
         </p:txBody>
       </p:sp>
@@ -2752,22 +2627,7 @@
             <a:noAutofit/>
           </a:bodyPr>
           <a:lstStyle/>
-          <a:p>
-            <a:pPr marL="0" lvl="0" indent="0" algn="l" rtl="0">
-              <a:spcBef>
-                <a:spcPts val="0"/>
-              </a:spcBef>
-              <a:spcAft>
-                <a:spcPts val="0"/>
-              </a:spcAft>
-              <a:buNone/>
-            </a:pPr>
-            <a:r>
-              <a:rPr lang="en-US" dirty="0"/>
-              <a:t>The 'any shared variable might change between line N and line N+1' framing is the intuition I want them to leave with, and it's literally what happened in the withdrawal: between T1's read and T1's write, T2 moved the balance underneath it. Single-threaded code goes line N then line N+1 and stays predictable, and multi-threaded code just doesn't get that guarantee, because the world can shift in the gap. Once they feel that, every race example after this explains itself.</a:t>
-            </a:r>
-            <a:endParaRPr dirty="0"/>
-          </a:p>
+          <a:p/>
         </p:txBody>
       </p:sp>
       <p:sp>
@@ -2911,28 +2771,9 @@
           </a:bodyPr>
           <a:lstStyle/>
           <a:p>
-            <a:pPr marL="0" lvl="0" indent="0" algn="l" rtl="0">
-              <a:spcBef>
-                <a:spcPts val="0"/>
-              </a:spcBef>
-              <a:spcAft>
-                <a:spcPts val="0"/>
-              </a:spcAft>
-              <a:buNone/>
-            </a:pPr>
-            <a:r>
-              <a:rPr lang="en-US" dirty="0"/>
-              <a:t>Reinforce the 5.1 and 6.1 connections hard here. They've spent weeks living in a single-threaded world (the browser) and now they're seeing that the server has options the browser never did, which is a big part of why </a:t>
-            </a:r>
-            <a:r>
-              <a:rPr lang="en-US" dirty="0" err="1"/>
-              <a:t>FastAPI</a:t>
-            </a:r>
-            <a:r>
-              <a:rPr lang="en-US" dirty="0"/>
-              <a:t> looks so different from anything they wrote on the front end. Helpful to say that out loud.</a:t>
-            </a:r>
-            <a:endParaRPr dirty="0"/>
+            <a:r>
+              <a:t>Say: this is why FastAPI looks different from front-end code.</a:t>
+            </a:r>
           </a:p>
         </p:txBody>
       </p:sp>
@@ -3076,30 +2917,7 @@
             <a:noAutofit/>
           </a:bodyPr>
           <a:lstStyle/>
-          <a:p>
-            <a:pPr marL="0" lvl="0" indent="0" algn="l" rtl="0">
-              <a:spcBef>
-                <a:spcPts val="0"/>
-              </a:spcBef>
-              <a:spcAft>
-                <a:spcPts val="0"/>
-              </a:spcAft>
-              <a:buNone/>
-            </a:pPr>
-            <a:r>
-              <a:rPr lang="en-US" dirty="0"/>
-              <a:t>Two models, the old way and the modern way. </a:t>
-            </a:r>
-            <a:r>
-              <a:rPr lang="en-US" dirty="0" err="1"/>
-              <a:t>FastAPI</a:t>
-            </a:r>
-            <a:r>
-              <a:rPr lang="en-US" dirty="0"/>
-              <a:t> does the modern way by default, which is part of why they haven't had to think about any of this yet.</a:t>
-            </a:r>
-            <a:endParaRPr dirty="0"/>
-          </a:p>
+          <a:p/>
         </p:txBody>
       </p:sp>
       <p:sp>
@@ -3243,20 +3061,9 @@
           </a:bodyPr>
           <a:lstStyle/>
           <a:p>
-            <a:pPr marL="0" lvl="0" indent="0" algn="l" rtl="0">
-              <a:spcBef>
-                <a:spcPts val="0"/>
-              </a:spcBef>
-              <a:spcAft>
-                <a:spcPts val="0"/>
-              </a:spcAft>
-              <a:buNone/>
-            </a:pPr>
-            <a:r>
-              <a:rPr lang="en-US" dirty="0"/>
-              <a:t>Thread-per-request is simple but wasteful. Each thread is mostly idle, blocked on I/O, and yet it still costs a full 1 MB of stack plus scheduler overhead. I want them to feel the inefficiency before the next slide hands them the alternative, otherwise the event loop just sounds like 'another option' instead of 'the reason the industry switched.'</a:t>
-            </a:r>
-            <a:endParaRPr dirty="0"/>
+            <a:r>
+              <a:t>Next slide: event loop is why the industry switched.</a:t>
+            </a:r>
           </a:p>
         </p:txBody>
       </p:sp>
@@ -3401,20 +3208,9 @@
           </a:bodyPr>
           <a:lstStyle/>
           <a:p>
-            <a:pPr marL="0" lvl="0" indent="0" algn="l" rtl="0">
-              <a:spcBef>
-                <a:spcPts val="0"/>
-              </a:spcBef>
-              <a:spcAft>
-                <a:spcPts val="0"/>
-              </a:spcAft>
-              <a:buNone/>
-            </a:pPr>
-            <a:r>
-              <a:rPr lang="en-US" dirty="0"/>
-              <a:t>The event loop is the modern default for web servers, and it's the server-side version of what the browser has been doing all along, which is why async/await matters in Python too: it's how you tell the event loop 'I'm about to wait on something, feel free to go run another request in the meantime.'</a:t>
-            </a:r>
-            <a:endParaRPr dirty="0"/>
+            <a:r>
+              <a:t>Server-side version of what the browser does. await = 'I'm waiting, run another request.'</a:t>
+            </a:r>
           </a:p>
         </p:txBody>
       </p:sp>
@@ -3558,26 +3354,7 @@
             <a:noAutofit/>
           </a:bodyPr>
           <a:lstStyle/>
-          <a:p>
-            <a:pPr marL="0" lvl="0" indent="0" algn="l" rtl="0">
-              <a:spcBef>
-                <a:spcPts val="0"/>
-              </a:spcBef>
-              <a:spcAft>
-                <a:spcPts val="0"/>
-              </a:spcAft>
-              <a:buNone/>
-            </a:pPr>
-            <a:r>
-              <a:rPr lang="en-US" dirty="0" err="1"/>
-              <a:t>FastAPI's</a:t>
-            </a:r>
-            <a:r>
-              <a:rPr lang="en-US" dirty="0"/>
-              <a:t> pragmatic mixed model is a big part of why they haven't had to think about any of this yet. Sync endpoints run in a thread pool, async endpoints run on the event loop, same public API, totally different machinery underneath, and you get to stay ignorant of the machinery until you actually need it.</a:t>
-            </a:r>
-            <a:endParaRPr dirty="0"/>
-          </a:p>
+          <a:p/>
         </p:txBody>
       </p:sp>
       <p:sp>
@@ -3721,44 +3498,9 @@
           </a:bodyPr>
           <a:lstStyle/>
           <a:p>
-            <a:pPr marL="0" lvl="0" indent="0" algn="l" rtl="0">
-              <a:spcBef>
-                <a:spcPts val="0"/>
-              </a:spcBef>
-              <a:spcAft>
-                <a:spcPts val="0"/>
-              </a:spcAft>
-              <a:buNone/>
-            </a:pPr>
-            <a:r>
-              <a:rPr lang="en-US" dirty="0"/>
-              <a:t>Walk this one as carefully as the bank race. The trap is that the code reads totally fine line by line - stash the user, do some work, use the user - and it would pass every single-request test you wrote for it. The bug needs two requests overlapping on the same process, and as soon as </a:t>
-            </a:r>
-            <a:r>
-              <a:rPr lang="en-US" dirty="0" err="1"/>
-              <a:t>FastAPI's</a:t>
-            </a:r>
-            <a:r>
-              <a:rPr lang="en-US" dirty="0"/>
-              <a:t> thread pool gives you that (or an async def endpoint hits an await), the global gets clobbered between the stash and the read. Tie it back to the bank race directly: same lost-update flavor, but happening at the REQUEST layer through a Python global instead of at the DATA layer through a row. This is precisely the bug statelessness rules out by design, which is why we don't stash per-request stuff at module scope in the first place. Mention that the fix in real code is to pass values down as arguments (or use a request-scoped dependency injection primitive in </a:t>
-            </a:r>
-            <a:r>
-              <a:rPr lang="en-US" dirty="0" err="1"/>
-              <a:t>FastAPI</a:t>
-            </a:r>
-            <a:r>
-              <a:rPr lang="en-US" dirty="0"/>
-              <a:t>, </a:t>
-            </a:r>
-            <a:r>
-              <a:rPr lang="en-US" dirty="0" err="1"/>
-              <a:t>contextvars</a:t>
-            </a:r>
-            <a:r>
-              <a:rPr lang="en-US" dirty="0"/>
-              <a:t> under the hood) - but the deeper lesson is that the platform already pushes you toward the safe shape.</a:t>
-            </a:r>
-            <a:endParaRPr dirty="0"/>
+            <a:r>
+              <a:t>Walk it slowly. Lost update at request layer via a global. Fix: pass as arguments.</a:t>
+            </a:r>
           </a:p>
         </p:txBody>
       </p:sp>
@@ -3903,44 +3645,9 @@
           </a:bodyPr>
           <a:lstStyle/>
           <a:p>
-            <a:pPr marL="0" lvl="0" indent="0" algn="l" rtl="0">
-              <a:spcBef>
-                <a:spcPts val="0"/>
-              </a:spcBef>
-              <a:spcAft>
-                <a:spcPts val="0"/>
-              </a:spcAft>
-              <a:buNone/>
-            </a:pPr>
-            <a:r>
-              <a:rPr lang="en-US" dirty="0"/>
-              <a:t>Walk this one as carefully as the bank race. The trap is that the code reads totally fine line by line - stash the user, do some work, use the user - and it would pass every single-request test you wrote for it. The bug needs two requests overlapping on the same process, and as soon as </a:t>
-            </a:r>
-            <a:r>
-              <a:rPr lang="en-US" dirty="0" err="1"/>
-              <a:t>FastAPI's</a:t>
-            </a:r>
-            <a:r>
-              <a:rPr lang="en-US" dirty="0"/>
-              <a:t> thread pool gives you that (or an async def endpoint hits an await), the global gets clobbered between the stash and the read. Tie it back to the bank race directly: same lost-update flavor, but happening at the REQUEST layer through a Python global instead of at the DATA layer through a row. This is precisely the bug statelessness rules out by design, which is why we don't stash per-request stuff at module scope in the first place. Mention that the fix in real code is to pass values down as arguments (or use a request-scoped dependency injection primitive in </a:t>
-            </a:r>
-            <a:r>
-              <a:rPr lang="en-US" dirty="0" err="1"/>
-              <a:t>FastAPI</a:t>
-            </a:r>
-            <a:r>
-              <a:rPr lang="en-US" dirty="0"/>
-              <a:t>, </a:t>
-            </a:r>
-            <a:r>
-              <a:rPr lang="en-US" dirty="0" err="1"/>
-              <a:t>contextvars</a:t>
-            </a:r>
-            <a:r>
-              <a:rPr lang="en-US" dirty="0"/>
-              <a:t> under the hood) - but the deeper lesson is that the platform already pushes you toward the safe shape.</a:t>
-            </a:r>
-            <a:endParaRPr dirty="0"/>
+            <a:r>
+              <a:t>Walk it slowly. Lost update at request layer via a global. Fix: pass as arguments.</a:t>
+            </a:r>
           </a:p>
         </p:txBody>
       </p:sp>
@@ -4084,22 +3791,7 @@
             <a:noAutofit/>
           </a:bodyPr>
           <a:lstStyle/>
-          <a:p>
-            <a:pPr marL="0" lvl="0" indent="0" algn="l" rtl="0">
-              <a:spcBef>
-                <a:spcPts val="0"/>
-              </a:spcBef>
-              <a:spcAft>
-                <a:spcPts val="0"/>
-              </a:spcAft>
-              <a:buNone/>
-            </a:pPr>
-            <a:r>
-              <a:rPr lang="en-US" dirty="0"/>
-              <a:t>What statelessness bought wasn't only 'you can scale to 1,000 servers' - it also means two requests can run at the same time without stepping on each other, because there's no per-request memory sitting there for them to step on.</a:t>
-            </a:r>
-            <a:endParaRPr dirty="0"/>
-          </a:p>
+          <a:p/>
         </p:txBody>
       </p:sp>
       <p:sp>
@@ -4243,20 +3935,9 @@
           </a:bodyPr>
           <a:lstStyle/>
           <a:p>
-            <a:pPr marL="0" lvl="0" indent="0" algn="l" rtl="0">
-              <a:spcBef>
-                <a:spcPts val="0"/>
-              </a:spcBef>
-              <a:spcAft>
-                <a:spcPts val="0"/>
-              </a:spcAft>
-              <a:buNone/>
-            </a:pPr>
-            <a:r>
-              <a:rPr lang="en-US" dirty="0"/>
-              <a:t>The bug we opened with lives in the database, not in the request handling. Both things are true at once - statelessness saves you at the request layer, and shared database state still bites you. Step back for a beat here, the back half of the lecture hinges on this.</a:t>
-            </a:r>
-            <a:endParaRPr dirty="0"/>
+            <a:r>
+              <a:t>Pause a beat before revealing the answer.</a:t>
+            </a:r>
           </a:p>
         </p:txBody>
       </p:sp>
@@ -4401,20 +4082,9 @@
           </a:bodyPr>
           <a:lstStyle/>
           <a:p>
-            <a:pPr marL="0" lvl="0" indent="0" algn="l" rtl="0">
-              <a:spcBef>
-                <a:spcPts val="0"/>
-              </a:spcBef>
-              <a:spcAft>
-                <a:spcPts val="0"/>
-              </a:spcAft>
-              <a:buNone/>
-            </a:pPr>
-            <a:r>
-              <a:rPr lang="en-US" dirty="0"/>
-              <a:t>The bug we opened with lives in the database, not in the request handling. Both things are true at once - statelessness saves you at the request layer, and shared database state still bites you. Step back for a beat here, the back half of the lecture hinges on this.</a:t>
-            </a:r>
-            <a:endParaRPr dirty="0"/>
+            <a:r>
+              <a:t>Pause a beat before revealing the answer.</a:t>
+            </a:r>
           </a:p>
         </p:txBody>
       </p:sp>
@@ -4558,22 +4228,7 @@
             <a:noAutofit/>
           </a:bodyPr>
           <a:lstStyle/>
-          <a:p>
-            <a:pPr marL="0" lvl="0" indent="0" algn="l" rtl="0">
-              <a:spcBef>
-                <a:spcPts val="0"/>
-              </a:spcBef>
-              <a:spcAft>
-                <a:spcPts val="0"/>
-              </a:spcAft>
-              <a:buNone/>
-            </a:pPr>
-            <a:r>
-              <a:rPr lang="en-US" dirty="0"/>
-              <a:t>The race was the cold open; this is the fix. The key idea is that the database already knows how to do this for you, and you reach it with a small BEGIN-COMMIT wrapper.</a:t>
-            </a:r>
-            <a:endParaRPr dirty="0"/>
-          </a:p>
+          <a:p/>
         </p:txBody>
       </p:sp>
       <p:sp>
@@ -4717,20 +4372,9 @@
           </a:bodyPr>
           <a:lstStyle/>
           <a:p>
-            <a:pPr marL="0" lvl="0" indent="0" algn="l" rtl="0">
-              <a:spcBef>
-                <a:spcPts val="0"/>
-              </a:spcBef>
-              <a:spcAft>
-                <a:spcPts val="0"/>
-              </a:spcAft>
-              <a:buNone/>
-            </a:pPr>
-            <a:r>
-              <a:rPr lang="en-US" dirty="0"/>
-              <a:t>Transactions are the database's answer to 'how do two things happen at once without corrupting each other.' Underneath it's all locks, and from your code's perspective it's a BEGIN-COMMIT wrapper and nothing more. The database is doing the hard part for you, which is exactly why it's the right place to solve this instead of trying to coordinate it in application code. Flag the word 'lock' here - it comes back hard in the Java coda.</a:t>
-            </a:r>
-            <a:endParaRPr dirty="0"/>
+            <a:r>
+              <a:t>Flag the word 'lock', comes back in the Java coda.</a:t>
+            </a:r>
           </a:p>
         </p:txBody>
       </p:sp>
@@ -4875,20 +4519,9 @@
           </a:bodyPr>
           <a:lstStyle/>
           <a:p>
-            <a:pPr marL="0" lvl="0" indent="0" algn="l" rtl="0">
-              <a:spcBef>
-                <a:spcPts val="0"/>
-              </a:spcBef>
-              <a:spcAft>
-                <a:spcPts val="0"/>
-              </a:spcAft>
-              <a:buNone/>
-            </a:pPr>
-            <a:r>
-              <a:rPr lang="en-US" dirty="0"/>
-              <a:t>Transactions are the database's answer to 'how do two things happen at once without corrupting each other.' Underneath it's all locks, and from your code's perspective it's a BEGIN-COMMIT wrapper and nothing more. The database is doing the hard part for you, which is exactly why it's the right place to solve this instead of trying to coordinate it in application code. Flag the word 'lock' here - it comes back hard in the Java coda.</a:t>
-            </a:r>
-            <a:endParaRPr dirty="0"/>
+            <a:r>
+              <a:t>Flag the word 'lock', comes back in the Java coda.</a:t>
+            </a:r>
           </a:p>
         </p:txBody>
       </p:sp>
@@ -5033,20 +4666,9 @@
           </a:bodyPr>
           <a:lstStyle/>
           <a:p>
-            <a:pPr marL="0" lvl="0" indent="0" algn="l" rtl="0">
-              <a:spcBef>
-                <a:spcPts val="0"/>
-              </a:spcBef>
-              <a:spcAft>
-                <a:spcPts val="0"/>
-              </a:spcAft>
-              <a:buNone/>
-            </a:pPr>
-            <a:r>
-              <a:rPr lang="en-US" dirty="0"/>
-              <a:t>Transactions are the database's answer to 'how do two things happen at once without corrupting each other.' Underneath it's all locks, and from your code's perspective it's a BEGIN-COMMIT wrapper and nothing more. The database is doing the hard part for you, which is exactly why it's the right place to solve this instead of trying to coordinate it in application code. Flag the word 'lock' here - it comes back hard in the Java coda.</a:t>
-            </a:r>
-            <a:endParaRPr dirty="0"/>
+            <a:r>
+              <a:t>Flag the word 'lock', comes back in the Java coda.</a:t>
+            </a:r>
           </a:p>
         </p:txBody>
       </p:sp>
@@ -5191,28 +4813,9 @@
           </a:bodyPr>
           <a:lstStyle/>
           <a:p>
-            <a:pPr marL="0" lvl="0" indent="0" algn="l" rtl="0">
-              <a:spcBef>
-                <a:spcPts val="0"/>
-              </a:spcBef>
-              <a:spcAft>
-                <a:spcPts val="0"/>
-              </a:spcAft>
-              <a:buNone/>
-            </a:pPr>
-            <a:r>
-              <a:rPr lang="en-US" dirty="0"/>
-              <a:t>Two pieces make this safe: </a:t>
-            </a:r>
-            <a:r>
-              <a:rPr lang="en-US" dirty="0" err="1"/>
-              <a:t>db.engine.begin</a:t>
-            </a:r>
-            <a:r>
-              <a:rPr lang="en-US" dirty="0"/>
-              <a:t>() wraps the whole thing in a transaction, and the FOR UPDATE clause on the SELECT tells Postgres to lock the row for the duration of the transaction. Without FOR UPDATE the SELECT doesn't lock and the race comes right back, so it's the one small detail they need to remember to actually be safe in practice.</a:t>
-            </a:r>
-            <a:endParaRPr dirty="0"/>
+            <a:r>
+              <a:t>FOR UPDATE is the one detail: without it SELECT doesn't lock, race returns.</a:t>
+            </a:r>
           </a:p>
         </p:txBody>
       </p:sp>
@@ -5357,28 +4960,9 @@
           </a:bodyPr>
           <a:lstStyle/>
           <a:p>
-            <a:pPr marL="0" lvl="0" indent="0" algn="l" rtl="0">
-              <a:spcBef>
-                <a:spcPts val="0"/>
-              </a:spcBef>
-              <a:spcAft>
-                <a:spcPts val="0"/>
-              </a:spcAft>
-              <a:buNone/>
-            </a:pPr>
-            <a:r>
-              <a:rPr lang="en-US" dirty="0"/>
-              <a:t>Two pieces make this safe: </a:t>
-            </a:r>
-            <a:r>
-              <a:rPr lang="en-US" dirty="0" err="1"/>
-              <a:t>db.engine.begin</a:t>
-            </a:r>
-            <a:r>
-              <a:rPr lang="en-US" dirty="0"/>
-              <a:t>() wraps the whole thing in a transaction, and the FOR UPDATE clause on the SELECT tells Postgres to lock the row for the duration of the transaction. Without FOR UPDATE the SELECT doesn't lock and the race comes right back, so it's the one small detail they need to remember to actually be safe in practice.</a:t>
-            </a:r>
-            <a:endParaRPr dirty="0"/>
+            <a:r>
+              <a:t>FOR UPDATE is the one detail: without it SELECT doesn't lock, race returns.</a:t>
+            </a:r>
           </a:p>
         </p:txBody>
       </p:sp>
@@ -5522,30 +5106,7 @@
             <a:noAutofit/>
           </a:bodyPr>
           <a:lstStyle/>
-          <a:p>
-            <a:pPr marL="0" lvl="0" indent="0" algn="l" rtl="0">
-              <a:spcBef>
-                <a:spcPts val="0"/>
-              </a:spcBef>
-              <a:spcAft>
-                <a:spcPts val="0"/>
-              </a:spcAft>
-              <a:buNone/>
-            </a:pPr>
-            <a:r>
-              <a:rPr lang="en-US" dirty="0"/>
-              <a:t>The 6.1 callback makes this land easily. They already understand async/await conceptually from JS, so this is really just 'same tool, different runtime.' The sync-vs-async choice is a practical one, and </a:t>
-            </a:r>
-            <a:r>
-              <a:rPr lang="en-US" dirty="0" err="1"/>
-              <a:t>FastAPI</a:t>
-            </a:r>
-            <a:r>
-              <a:rPr lang="en-US" dirty="0"/>
-              <a:t> handles both gracefully, so it isn't something to agonize over.</a:t>
-            </a:r>
-            <a:endParaRPr dirty="0"/>
-          </a:p>
+          <a:p/>
         </p:txBody>
       </p:sp>
       <p:sp>
@@ -5707,62 +5268,9 @@
           </a:bodyPr>
           <a:lstStyle/>
           <a:p>
-            <a:pPr marL="0" lvl="0" indent="0" algn="l" rtl="0">
-              <a:spcBef>
-                <a:spcPts val="0"/>
-              </a:spcBef>
-              <a:spcAft>
-                <a:spcPts val="0"/>
-              </a:spcAft>
-              <a:buNone/>
-            </a:pPr>
-            <a:r>
-              <a:rPr lang="en-US" dirty="0"/>
-              <a:t>Side by side. The differences are: (a) async def, (b) async with on the connection, and (c) await on the execute call.</a:t>
-            </a:r>
-            <a:br>
-              <a:rPr lang="en-US" dirty="0"/>
-            </a:br>
-            <a:endParaRPr dirty="0"/>
-          </a:p>
-          <a:p>
-            <a:pPr marL="0" lvl="0" indent="0" algn="l" rtl="0">
-              <a:spcBef>
-                <a:spcPts val="0"/>
-              </a:spcBef>
-              <a:spcAft>
-                <a:spcPts val="0"/>
-              </a:spcAft>
-              <a:buNone/>
-            </a:pPr>
-            <a:r>
-              <a:rPr lang="en-US" dirty="0"/>
-              <a:t/>
-            </a:r>
-            <a:br>
-              <a:rPr lang="en-US" dirty="0"/>
-            </a:br>
-            <a:r>
-              <a:rPr lang="en-US" dirty="0"/>
-              <a:t/>
-            </a:r>
-            <a:r>
-              <a:rPr lang="en-US" dirty="0" err="1"/>
-              <a:t/>
-            </a:r>
-            <a:r>
-              <a:rPr lang="en-US" dirty="0"/>
-              <a:t/>
-            </a:r>
-            <a:r>
-              <a:rPr lang="en-US" dirty="0" err="1"/>
-              <a:t/>
-            </a:r>
-            <a:r>
-              <a:rPr lang="en-US" dirty="0"/>
-              <a:t/>
-            </a:r>
-            <a:endParaRPr dirty="0"/>
+            <a:r>
+              <a:t>Differences: async def, async with, await on execute.</a:t>
+            </a:r>
           </a:p>
         </p:txBody>
       </p:sp>
@@ -5918,62 +5426,9 @@
           </a:bodyPr>
           <a:lstStyle/>
           <a:p>
-            <a:pPr marL="0" lvl="0" indent="0" algn="l" rtl="0">
-              <a:spcBef>
-                <a:spcPts val="0"/>
-              </a:spcBef>
-              <a:spcAft>
-                <a:spcPts val="0"/>
-              </a:spcAft>
-              <a:buNone/>
-            </a:pPr>
-            <a:r>
-              <a:rPr lang="en-US" dirty="0"/>
-              <a:t>Side by side. The differences are: (a) async def, (b) async with on the connection, and (c) await on the execute call.</a:t>
-            </a:r>
-            <a:br>
-              <a:rPr lang="en-US" dirty="0"/>
-            </a:br>
-            <a:endParaRPr dirty="0"/>
-          </a:p>
-          <a:p>
-            <a:pPr marL="0" lvl="0" indent="0" algn="l" rtl="0">
-              <a:spcBef>
-                <a:spcPts val="0"/>
-              </a:spcBef>
-              <a:spcAft>
-                <a:spcPts val="0"/>
-              </a:spcAft>
-              <a:buNone/>
-            </a:pPr>
-            <a:r>
-              <a:rPr lang="en-US" dirty="0"/>
-              <a:t/>
-            </a:r>
-            <a:br>
-              <a:rPr lang="en-US" dirty="0"/>
-            </a:br>
-            <a:r>
-              <a:rPr lang="en-US" dirty="0"/>
-              <a:t/>
-            </a:r>
-            <a:r>
-              <a:rPr lang="en-US" dirty="0" err="1"/>
-              <a:t/>
-            </a:r>
-            <a:r>
-              <a:rPr lang="en-US" dirty="0"/>
-              <a:t/>
-            </a:r>
-            <a:r>
-              <a:rPr lang="en-US" dirty="0" err="1"/>
-              <a:t/>
-            </a:r>
-            <a:r>
-              <a:rPr lang="en-US" dirty="0"/>
-              <a:t/>
-            </a:r>
-            <a:endParaRPr dirty="0"/>
+            <a:r>
+              <a:t>Differences: async def, async with, await on execute.</a:t>
+            </a:r>
           </a:p>
         </p:txBody>
       </p:sp>
@@ -6118,20 +5573,9 @@
           </a:bodyPr>
           <a:lstStyle/>
           <a:p>
-            <a:pPr marL="0" lvl="0" indent="0" algn="l" rtl="0">
-              <a:spcBef>
-                <a:spcPts val="0"/>
-              </a:spcBef>
-              <a:spcAft>
-                <a:spcPts val="0"/>
-              </a:spcAft>
-              <a:buNone/>
-            </a:pPr>
-            <a:r>
-              <a:rPr lang="en-US" dirty="0"/>
-              <a:t>The practical guidance is: default to sync, only go async when you have a measured reason. That's the opposite of what a lot of hobbyist tutorials push (they reach for async by default), but it's the right call for actual projects. Reaching for async before you've measured anything is just optimizing a problem you don't have yet, and a coding agent will happily go there if you don't tell it not to.</a:t>
-            </a:r>
-            <a:endParaRPr dirty="0"/>
+            <a:r>
+              <a:t>Default sync, async only when measured. Coding agents go async unprompted.</a:t>
+            </a:r>
           </a:p>
         </p:txBody>
       </p:sp>
@@ -6275,22 +5719,7 @@
             <a:noAutofit/>
           </a:bodyPr>
           <a:lstStyle/>
-          <a:p>
-            <a:pPr marL="0" lvl="0" indent="0" algn="l" rtl="0">
-              <a:spcBef>
-                <a:spcPts val="0"/>
-              </a:spcBef>
-              <a:spcAft>
-                <a:spcPts val="0"/>
-              </a:spcAft>
-              <a:buNone/>
-            </a:pPr>
-            <a:r>
-              <a:rPr lang="en-US" dirty="0"/>
-              <a:t>The GIL gets infinite internet debate and almost never matters in practice for web work. Give them the vocabulary so they don't get scared by a Stack Overflow thread, and tell them plainly not to worry about it for this class. They'll have plenty to worry about without adding the GIL to the pile.</a:t>
-            </a:r>
-            <a:endParaRPr dirty="0"/>
-          </a:p>
+          <a:p/>
         </p:txBody>
       </p:sp>
       <p:sp>
@@ -6434,20 +5863,9 @@
           </a:bodyPr>
           <a:lstStyle/>
           <a:p>
-            <a:pPr marL="0" lvl="0" indent="0" algn="l" rtl="0">
-              <a:spcBef>
-                <a:spcPts val="0"/>
-              </a:spcBef>
-              <a:spcAft>
-                <a:spcPts val="0"/>
-              </a:spcAft>
-              <a:buNone/>
-            </a:pPr>
-            <a:r>
-              <a:rPr lang="en-US" dirty="0"/>
-              <a:t>The conceptual capstone. They know Java from their prior CS course, but not threads or locks. The point of this coda is to connect that to today's database transaction and explain why the lock had to move out of memory and into the database. They're not gonna write any of this, it's here to make the concept click rather than to hand them another skill.</a:t>
-            </a:r>
-            <a:endParaRPr dirty="0"/>
+            <a:r>
+              <a:t>They know Java, not threads or locks. Concept only, they won't write this.</a:t>
+            </a:r>
           </a:p>
         </p:txBody>
       </p:sp>
@@ -6592,20 +6010,9 @@
           </a:bodyPr>
           <a:lstStyle/>
           <a:p>
-            <a:pPr marL="0" lvl="0" indent="0" algn="l" rtl="0">
-              <a:spcBef>
-                <a:spcPts val="0"/>
-              </a:spcBef>
-              <a:spcAft>
-                <a:spcPts val="0"/>
-              </a:spcAft>
-              <a:buNone/>
-            </a:pPr>
-            <a:r>
-              <a:rPr lang="en-US" dirty="0"/>
-              <a:t>The math instinct is (a) - two threads, 1000 each, 2000 total, the same way 100 - 10 - 10 = 80 felt obvious on the cold open. The real answer is (c): count++ is three operations under the hood (load, increment, store), and two threads can both load the same value before either has stored, so increments get lost. Final count varies between runs depending on timing. (b) is wrong because both threads run, they just step on each other; you get MOST of the increments through. (d) is the important wrong answer - Java is happy to compile this; the language itself doesn't protect you from threading bugs, you have to opt into protection. The next slide is how you opt in.</a:t>
-            </a:r>
-            <a:endParaRPr dirty="0"/>
+            <a:r>
+              <a:t>Explain Runnable/start/join, then cold-call. Answer (c): both load before either stores. (d) compiles fine.</a:t>
+            </a:r>
           </a:p>
         </p:txBody>
       </p:sp>
@@ -6750,28 +6157,9 @@
           </a:bodyPr>
           <a:lstStyle/>
           <a:p>
-            <a:pPr marL="0" lvl="0" indent="0" algn="l" rtl="0">
-              <a:spcBef>
-                <a:spcPts val="0"/>
-              </a:spcBef>
-              <a:spcAft>
-                <a:spcPts val="0"/>
-              </a:spcAft>
-              <a:buNone/>
-            </a:pPr>
-            <a:r>
-              <a:rPr lang="en-US" dirty="0"/>
-              <a:t>They haven't necessarily seen Java threading before, so the boilerplate is itself part of what they're being exposed to: a `Runnable` is a piece of code you can hand to a thread, `new Thread(r)` creates one, `.start()` actually runs it, and `.join()` blocks the calling thread until that thread finishes. Real Java would also catch </a:t>
-            </a:r>
-            <a:r>
-              <a:rPr lang="en-US" dirty="0" err="1"/>
-              <a:t>InterruptedException</a:t>
-            </a:r>
-            <a:r>
-              <a:rPr lang="en-US" dirty="0"/>
-              <a:t> off the join; eliding it for the slide. Once the syntax is introduced, call on someone for the prediction. The math instinct is (a) - two threads, 1000 each, 2000 total, the same way 100 - 10 - 10 = 80 felt obvious on the cold open. The real answer is (c): count++ is three operations under the hood (load, increment, store), and two threads can both load the same value before either has stored, so increments get lost. Final count varies between runs depending on timing. (b) is wrong because both threads run, they just step on each other; you get MOST of the increments through. (d) is the important wrong answer - Java is happy to compile this; the language itself doesn't protect you from threading bugs, you have to opt into protection. The next slide is how you opt in.</a:t>
-            </a:r>
-            <a:endParaRPr dirty="0"/>
+            <a:r>
+              <a:t>Explain Runnable/start/join, then cold-call. Answer (c): both load before either stores. (d) compiles fine.</a:t>
+            </a:r>
           </a:p>
         </p:txBody>
       </p:sp>
@@ -6916,28 +6304,9 @@
           </a:bodyPr>
           <a:lstStyle/>
           <a:p>
-            <a:pPr marL="0" lvl="0" indent="0" algn="l" rtl="0">
-              <a:spcBef>
-                <a:spcPts val="0"/>
-              </a:spcBef>
-              <a:spcAft>
-                <a:spcPts val="0"/>
-              </a:spcAft>
-              <a:buNone/>
-            </a:pPr>
-            <a:r>
-              <a:rPr lang="en-US" dirty="0"/>
-              <a:t>They haven't necessarily seen Java threading before, so the boilerplate is itself part of what they're being exposed to: a `Runnable` is a piece of code you can hand to a thread, `new Thread(r)` creates one, `.start()` actually runs it, and `.join()` blocks the calling thread until that thread finishes. Real Java would also catch </a:t>
-            </a:r>
-            <a:r>
-              <a:rPr lang="en-US" dirty="0" err="1"/>
-              <a:t>InterruptedException</a:t>
-            </a:r>
-            <a:r>
-              <a:rPr lang="en-US" dirty="0"/>
-              <a:t> off the join; eliding it for the slide. Once the syntax is introduced, call on someone for the prediction. The math instinct is (a) - two threads, 1000 each, 2000 total, the same way 100 - 10 - 10 = 80 felt obvious on the cold open. The real answer is (c): count++ is three operations under the hood (load, increment, store), and two threads can both load the same value before either has stored, so increments get lost. Final count varies between runs depending on timing. (b) is wrong because both threads run, they just step on each other; you get MOST of the increments through. (d) is the important wrong answer - Java is happy to compile this; the language itself doesn't protect you from threading bugs, you have to opt into protection. The next slide is how you opt in.</a:t>
-            </a:r>
-            <a:endParaRPr dirty="0"/>
+            <a:r>
+              <a:t>Explain Runnable/start/join, then cold-call. Answer (c): both load before either stores. (d) compiles fine.</a:t>
+            </a:r>
           </a:p>
         </p:txBody>
       </p:sp>
@@ -7082,28 +6451,9 @@
           </a:bodyPr>
           <a:lstStyle/>
           <a:p>
-            <a:pPr marL="0" lvl="0" indent="0" algn="l" rtl="0">
-              <a:spcBef>
-                <a:spcPts val="0"/>
-              </a:spcBef>
-              <a:spcAft>
-                <a:spcPts val="0"/>
-              </a:spcAft>
-              <a:buNone/>
-            </a:pPr>
-            <a:r>
-              <a:rPr lang="en-US" dirty="0"/>
-              <a:t>They haven't necessarily seen Java threading before, so the boilerplate is itself part of what they're being exposed to: a `Runnable` is a piece of code you can hand to a thread, `new Thread(r)` creates one, `.start()` actually runs it, and `.join()` blocks the calling thread until that thread finishes. Real Java would also catch </a:t>
-            </a:r>
-            <a:r>
-              <a:rPr lang="en-US" dirty="0" err="1"/>
-              <a:t>InterruptedException</a:t>
-            </a:r>
-            <a:r>
-              <a:rPr lang="en-US" dirty="0"/>
-              <a:t> off the join; eliding it for the slide. Once the syntax is introduced, call on someone for the prediction. The math instinct is (a) - two threads, 1000 each, 2000 total, the same way 100 - 10 - 10 = 80 felt obvious on the cold open. The real answer is (c): count++ is three operations under the hood (load, increment, store), and two threads can both load the same value before either has stored, so increments get lost. Final count varies between runs depending on timing. (b) is wrong because both threads run, they just step on each other; you get MOST of the increments through. (d) is the important wrong answer - Java is happy to compile this; the language itself doesn't protect you from threading bugs, you have to opt into protection. The next slide is how you opt in.</a:t>
-            </a:r>
-            <a:endParaRPr dirty="0"/>
+            <a:r>
+              <a:t>Explain Runnable/start/join, then cold-call. Answer (c): both load before either stores. (d) compiles fine.</a:t>
+            </a:r>
           </a:p>
         </p:txBody>
       </p:sp>
@@ -7248,28 +6598,9 @@
           </a:bodyPr>
           <a:lstStyle/>
           <a:p>
-            <a:pPr marL="0" lvl="0" indent="0" algn="l" rtl="0">
-              <a:spcBef>
-                <a:spcPts val="0"/>
-              </a:spcBef>
-              <a:spcAft>
-                <a:spcPts val="0"/>
-              </a:spcAft>
-              <a:buNone/>
-            </a:pPr>
-            <a:r>
-              <a:rPr lang="en-US" dirty="0"/>
-              <a:t>They haven't necessarily seen Java threading before, so the boilerplate is itself part of what they're being exposed to: a `Runnable` is a piece of code you can hand to a thread, `new Thread(r)` creates one, `.start()` actually runs it, and `.join()` blocks the calling thread until that thread finishes. Real Java would also catch </a:t>
-            </a:r>
-            <a:r>
-              <a:rPr lang="en-US" dirty="0" err="1"/>
-              <a:t>InterruptedException</a:t>
-            </a:r>
-            <a:r>
-              <a:rPr lang="en-US" dirty="0"/>
-              <a:t> off the join; eliding it for the slide. Once the syntax is introduced, call on someone for the prediction. The math instinct is (a) - two threads, 1000 each, 2000 total, the same way 100 - 10 - 10 = 80 felt obvious on the cold open. The real answer is (c): count++ is three operations under the hood (load, increment, store), and two threads can both load the same value before either has stored, so increments get lost. Final count varies between runs depending on timing. (b) is wrong because both threads run, they just step on each other; you get MOST of the increments through. (d) is the important wrong answer - Java is happy to compile this; the language itself doesn't protect you from threading bugs, you have to opt into protection. The next slide is how you opt in.</a:t>
-            </a:r>
-            <a:endParaRPr dirty="0"/>
+            <a:r>
+              <a:t>Explain Runnable/start/join, then cold-call. Answer (c): both load before either stores. (d) compiles fine.</a:t>
+            </a:r>
           </a:p>
         </p:txBody>
       </p:sp>
@@ -7414,161 +6745,9 @@
           </a:bodyPr>
           <a:lstStyle/>
           <a:p>
-            <a:pPr marL="0" lvl="0" indent="0" algn="l" rtl="0">
-              <a:spcBef>
-                <a:spcPts val="0"/>
-              </a:spcBef>
-              <a:spcAft>
-                <a:spcPts val="0"/>
-              </a:spcAft>
-              <a:buClr>
-                <a:schemeClr val="dk1"/>
-              </a:buClr>
-              <a:buSzPts val="1100"/>
-              <a:buFont typeface="Arial"/>
-              <a:buNone/>
-            </a:pPr>
-            <a:r>
-              <a:rPr lang="en-US" dirty="0">
-                <a:solidFill>
-                  <a:schemeClr val="dk1"/>
-                </a:solidFill>
-              </a:rPr>
-              <a:t>// The answer is: somewhere between 1000 and 2000, varies every</a:t>
-            </a:r>
-            <a:endParaRPr dirty="0">
-              <a:solidFill>
-                <a:schemeClr val="dk1"/>
-              </a:solidFill>
-            </a:endParaRPr>
-          </a:p>
-          <a:p>
-            <a:pPr marL="0" lvl="0" indent="0" algn="l" rtl="0">
-              <a:spcBef>
-                <a:spcPts val="0"/>
-              </a:spcBef>
-              <a:spcAft>
-                <a:spcPts val="0"/>
-              </a:spcAft>
-              <a:buClr>
-                <a:schemeClr val="dk1"/>
-              </a:buClr>
-              <a:buSzPts val="1100"/>
-              <a:buFont typeface="Arial"/>
-              <a:buNone/>
-            </a:pPr>
-            <a:r>
-              <a:rPr lang="en-US" dirty="0">
-                <a:solidFill>
-                  <a:schemeClr val="dk1"/>
-                </a:solidFill>
-              </a:rPr>
-              <a:t>// run. count++ is three operations underneath (load, increment, store),</a:t>
-            </a:r>
-            <a:endParaRPr dirty="0">
-              <a:solidFill>
-                <a:schemeClr val="dk1"/>
-              </a:solidFill>
-            </a:endParaRPr>
-          </a:p>
-          <a:p>
-            <a:pPr marL="0" lvl="0" indent="0" algn="l" rtl="0">
-              <a:spcBef>
-                <a:spcPts val="0"/>
-              </a:spcBef>
-              <a:spcAft>
-                <a:spcPts val="0"/>
-              </a:spcAft>
-              <a:buClr>
-                <a:schemeClr val="dk1"/>
-              </a:buClr>
-              <a:buSzPts val="1100"/>
-              <a:buFont typeface="Arial"/>
-              <a:buNone/>
-            </a:pPr>
-            <a:r>
-              <a:rPr lang="en-US" dirty="0">
-                <a:solidFill>
-                  <a:schemeClr val="dk1"/>
-                </a:solidFill>
-              </a:rPr>
-              <a:t>// and two threads can both load the same value before either stores --</a:t>
-            </a:r>
-            <a:endParaRPr dirty="0">
-              <a:solidFill>
-                <a:schemeClr val="dk1"/>
-              </a:solidFill>
-            </a:endParaRPr>
-          </a:p>
-          <a:p>
-            <a:pPr marL="0" lvl="0" indent="0" algn="l" rtl="0">
-              <a:spcBef>
-                <a:spcPts val="0"/>
-              </a:spcBef>
-              <a:spcAft>
-                <a:spcPts val="0"/>
-              </a:spcAft>
-              <a:buClr>
-                <a:schemeClr val="dk1"/>
-              </a:buClr>
-              <a:buSzPts val="1100"/>
-              <a:buFont typeface="Arial"/>
-              <a:buNone/>
-            </a:pPr>
-            <a:r>
-              <a:rPr lang="en-US" dirty="0">
-                <a:solidFill>
-                  <a:schemeClr val="dk1"/>
-                </a:solidFill>
-              </a:rPr>
-              <a:t>// the exact same lost-update shape as the bank withdrawal, just in</a:t>
-            </a:r>
-            <a:endParaRPr dirty="0">
-              <a:solidFill>
-                <a:schemeClr val="dk1"/>
-              </a:solidFill>
-            </a:endParaRPr>
-          </a:p>
-          <a:p>
-            <a:pPr marL="0" lvl="0" indent="0" algn="l" rtl="0">
-              <a:spcBef>
-                <a:spcPts val="0"/>
-              </a:spcBef>
-              <a:spcAft>
-                <a:spcPts val="0"/>
-              </a:spcAft>
-              <a:buClr>
-                <a:schemeClr val="dk1"/>
-              </a:buClr>
-              <a:buSzPts val="1100"/>
-              <a:buFont typeface="Arial"/>
-              <a:buNone/>
-            </a:pPr>
-            <a:r>
-              <a:rPr lang="en-US" dirty="0">
-                <a:solidFill>
-                  <a:schemeClr val="dk1"/>
-                </a:solidFill>
-              </a:rPr>
-              <a:t>// memory instead of in a database row.</a:t>
-            </a:r>
-            <a:endParaRPr dirty="0">
-              <a:solidFill>
-                <a:schemeClr val="dk1"/>
-              </a:solidFill>
-            </a:endParaRPr>
-          </a:p>
-          <a:p>
-            <a:pPr marL="0" lvl="0" indent="0" algn="l" rtl="0">
-              <a:spcBef>
-                <a:spcPts val="0"/>
-              </a:spcBef>
-              <a:spcAft>
-                <a:spcPts val="0"/>
-              </a:spcAft>
-              <a:buNone/>
-            </a:pPr>
-            <a:endParaRPr dirty="0"/>
+            <a:r>
+              <a:t>Explain Runnable/start/join, then cold-call. Answer (c): both load before either stores. (d) compiles fine.</a:t>
+            </a:r>
           </a:p>
         </p:txBody>
       </p:sp>
@@ -7713,20 +6892,9 @@
           </a:bodyPr>
           <a:lstStyle/>
           <a:p>
-            <a:pPr marL="0" lvl="0" indent="0" algn="l" rtl="0">
-              <a:spcBef>
-                <a:spcPts val="0"/>
-              </a:spcBef>
-              <a:spcAft>
-                <a:spcPts val="0"/>
-              </a:spcAft>
-              <a:buNone/>
-            </a:pPr>
-            <a:r>
-              <a:rPr lang="en-US" dirty="0"/>
-              <a:t>Cold open. Don't preamble - put the bug on the screen and let it bother them. The whole reframe of the lecture is that they can write this code today, it'll pass every test, and it'll still be wrong in a way that only shows up once two real users hit it at the same moment.</a:t>
-            </a:r>
-            <a:endParaRPr dirty="0"/>
+            <a:r>
+              <a:t>No preamble, straight to the bank example.</a:t>
+            </a:r>
           </a:p>
         </p:txBody>
       </p:sp>
@@ -7871,61 +7039,9 @@
           </a:bodyPr>
           <a:lstStyle/>
           <a:p>
-            <a:pPr marL="0" lvl="0" indent="0" algn="l" rtl="0">
-              <a:spcBef>
-                <a:spcPts val="0"/>
-              </a:spcBef>
-              <a:spcAft>
-                <a:spcPts val="0"/>
-              </a:spcAft>
-              <a:buClr>
-                <a:schemeClr val="dk1"/>
-              </a:buClr>
-              <a:buSzPts val="1100"/>
-              <a:buFont typeface="Arial"/>
-              <a:buNone/>
-            </a:pPr>
-            <a:r>
-              <a:rPr lang="en-US" dirty="0">
-                <a:solidFill>
-                  <a:schemeClr val="dk1"/>
-                </a:solidFill>
-              </a:rPr>
-              <a:t>(Java also has </a:t>
-            </a:r>
-            <a:r>
-              <a:rPr lang="en-US" dirty="0" err="1">
-                <a:solidFill>
-                  <a:schemeClr val="dk1"/>
-                </a:solidFill>
-              </a:rPr>
-              <a:t>ReentrantLock</a:t>
-            </a:r>
-            <a:r>
-              <a:rPr lang="en-US" dirty="0">
-                <a:solidFill>
-                  <a:schemeClr val="dk1"/>
-                </a:solidFill>
-              </a:rPr>
-              <a:t> for the same idea: lock() / unlock().)</a:t>
-            </a:r>
-            <a:endParaRPr dirty="0">
-              <a:solidFill>
-                <a:schemeClr val="dk1"/>
-              </a:solidFill>
-            </a:endParaRPr>
-          </a:p>
-          <a:p>
-            <a:pPr marL="0" lvl="0" indent="0" algn="l" rtl="0">
-              <a:spcBef>
-                <a:spcPts val="0"/>
-              </a:spcBef>
-              <a:spcAft>
-                <a:spcPts val="0"/>
-              </a:spcAft>
-              <a:buNone/>
-            </a:pPr>
-            <a:endParaRPr dirty="0"/>
+            <a:r>
+              <a:t>ReentrantLock is the same idea, lock()/unlock().</a:t>
+            </a:r>
           </a:p>
         </p:txBody>
       </p:sp>
@@ -8224,60 +7340,9 @@
           </a:bodyPr>
           <a:lstStyle/>
           <a:p>
-            <a:pPr marL="0" lvl="0" indent="0" algn="l" rtl="0">
-              <a:spcBef>
-                <a:spcPts val="0"/>
-              </a:spcBef>
-              <a:spcAft>
-                <a:spcPts val="0"/>
-              </a:spcAft>
-              <a:buNone/>
-            </a:pPr>
-            <a:r>
-              <a:rPr lang="en-US" dirty="0"/>
-              <a:t>Call on someone, don't reveal. The answer is (c). Walk the interleaving: T1 enters transfer(</a:t>
-            </a:r>
-            <a:r>
-              <a:rPr lang="en-US" dirty="0" err="1"/>
-              <a:t>alice</a:t>
-            </a:r>
-            <a:r>
-              <a:rPr lang="en-US" dirty="0"/>
-              <a:t>, bob, 10) and grabs the lock on </a:t>
-            </a:r>
-            <a:r>
-              <a:rPr lang="en-US" dirty="0" err="1"/>
-              <a:t>alice</a:t>
-            </a:r>
-            <a:r>
-              <a:rPr lang="en-US" dirty="0"/>
-              <a:t>. T2 enters transfer(bob, </a:t>
-            </a:r>
-            <a:r>
-              <a:rPr lang="en-US" dirty="0" err="1"/>
-              <a:t>alice</a:t>
-            </a:r>
-            <a:r>
-              <a:rPr lang="en-US" dirty="0"/>
-              <a:t>, 5) and grabs the lock on bob. T1 now tries to enter the inner synchronized(bob) block and WAITS, because T2 holds bob's lock. T2 tries to enter the inner synchronized(</a:t>
-            </a:r>
-            <a:r>
-              <a:rPr lang="en-US" dirty="0" err="1"/>
-              <a:t>alice</a:t>
-            </a:r>
-            <a:r>
-              <a:rPr lang="en-US" dirty="0"/>
-              <a:t>) block and WAITS, because T1 holds </a:t>
-            </a:r>
-            <a:r>
-              <a:rPr lang="en-US" dirty="0" err="1"/>
-              <a:t>alice's</a:t>
-            </a:r>
-            <a:r>
-              <a:rPr lang="en-US" dirty="0"/>
-              <a:t> lock. Both threads are blocked, each waiting for a lock the other holds, and neither will ever release. The program just sits there until you kill it. This is a DEADLOCK. (a) is the no-race answer. (b) is the with-only-one-lock answer. (d) is the trap - Java does NOT detect deadlock, the JVM happily lets your program sit forever; one of the most common ways to find out you have a deadlock in Java is 'production wedged at 3am, take a thread dump, find a lock cycle.' The next slide is the fix, and the punchline of the whole coda.</a:t>
-            </a:r>
-            <a:endParaRPr dirty="0"/>
+            <a:r>
+              <a:t>Cold-call, don't reveal. Answer (c) deadlock. (d) wrong: JVM never detects it.</a:t>
+            </a:r>
           </a:p>
         </p:txBody>
       </p:sp>
@@ -8422,60 +7487,9 @@
           </a:bodyPr>
           <a:lstStyle/>
           <a:p>
-            <a:pPr marL="0" lvl="0" indent="0" algn="l" rtl="0">
-              <a:spcBef>
-                <a:spcPts val="0"/>
-              </a:spcBef>
-              <a:spcAft>
-                <a:spcPts val="0"/>
-              </a:spcAft>
-              <a:buNone/>
-            </a:pPr>
-            <a:r>
-              <a:rPr lang="en-US" dirty="0"/>
-              <a:t>Call on someone, don't reveal. The answer is (c). Walk the interleaving: T1 enters transfer(</a:t>
-            </a:r>
-            <a:r>
-              <a:rPr lang="en-US" dirty="0" err="1"/>
-              <a:t>alice</a:t>
-            </a:r>
-            <a:r>
-              <a:rPr lang="en-US" dirty="0"/>
-              <a:t>, bob, 10) and grabs the lock on </a:t>
-            </a:r>
-            <a:r>
-              <a:rPr lang="en-US" dirty="0" err="1"/>
-              <a:t>alice</a:t>
-            </a:r>
-            <a:r>
-              <a:rPr lang="en-US" dirty="0"/>
-              <a:t>. T2 enters transfer(bob, </a:t>
-            </a:r>
-            <a:r>
-              <a:rPr lang="en-US" dirty="0" err="1"/>
-              <a:t>alice</a:t>
-            </a:r>
-            <a:r>
-              <a:rPr lang="en-US" dirty="0"/>
-              <a:t>, 5) and grabs the lock on bob. T1 now tries to enter the inner synchronized(bob) block and WAITS, because T2 holds bob's lock. T2 tries to enter the inner synchronized(</a:t>
-            </a:r>
-            <a:r>
-              <a:rPr lang="en-US" dirty="0" err="1"/>
-              <a:t>alice</a:t>
-            </a:r>
-            <a:r>
-              <a:rPr lang="en-US" dirty="0"/>
-              <a:t>) block and WAITS, because T1 holds </a:t>
-            </a:r>
-            <a:r>
-              <a:rPr lang="en-US" dirty="0" err="1"/>
-              <a:t>alice's</a:t>
-            </a:r>
-            <a:r>
-              <a:rPr lang="en-US" dirty="0"/>
-              <a:t> lock. Both threads are blocked, each waiting for a lock the other holds, and neither will ever release. The program just sits there until you kill it. This is a DEADLOCK. (a) is the no-race answer. (b) is the with-only-one-lock answer. (d) is the trap - Java does NOT detect deadlock, the JVM happily lets your program sit forever; one of the most common ways to find out you have a deadlock in Java is 'production wedged at 3am, take a thread dump, find a lock cycle.' The next slide is the fix, and the punchline of the whole coda.</a:t>
-            </a:r>
-            <a:endParaRPr dirty="0"/>
+            <a:r>
+              <a:t>Cold-call, don't reveal. Answer (c) deadlock. (d) wrong: JVM never detects it.</a:t>
+            </a:r>
           </a:p>
         </p:txBody>
       </p:sp>
@@ -8620,28 +7634,9 @@
           </a:bodyPr>
           <a:lstStyle/>
           <a:p>
-            <a:pPr marL="0" lvl="0" indent="0" algn="l" rtl="0">
-              <a:spcBef>
-                <a:spcPts val="0"/>
-              </a:spcBef>
-              <a:spcAft>
-                <a:spcPts val="0"/>
-              </a:spcAft>
-              <a:buNone/>
-            </a:pPr>
-            <a:r>
-              <a:rPr lang="en-US" dirty="0"/>
-              <a:t>This is the second 'the database is doing concurrency engineering for you' moment (transactions were the first). Two fixes. The consistent-order fix is the textbook prevention - if every code path grabs locks in the same canonical order (lowest id first, alphabetical, whatever), no cycle can possibly form. It works but requires every contributor to know and follow the rule. The Postgres fix is the magic one: Postgres actively watches the lock-wait graph, and when it sees a cycle, it picks one transaction and aborts it with a </a:t>
-            </a:r>
-            <a:r>
-              <a:rPr lang="en-US" dirty="0" err="1"/>
-              <a:t>DeadlockDetected</a:t>
-            </a:r>
-            <a:r>
-              <a:rPr lang="en-US" dirty="0"/>
-              <a:t> exception. Your handler catches the exception, optionally retries the transaction, and life continues. They are almost certainly not going to hit this in the final project - it shows up once you have multi-row updates racing with each other - but it's worth knowing the DB has your back, since the symptom in pure Java (silent wedge) is brutal to debug.</a:t>
-            </a:r>
-            <a:endParaRPr dirty="0"/>
+            <a:r>
+              <a:t>Consistent order needs every contributor to follow it. Won't hit this in final project.</a:t>
+            </a:r>
           </a:p>
         </p:txBody>
       </p:sp>
@@ -8786,28 +7781,9 @@
           </a:bodyPr>
           <a:lstStyle/>
           <a:p>
-            <a:pPr marL="0" lvl="0" indent="0" algn="l" rtl="0">
-              <a:spcBef>
-                <a:spcPts val="0"/>
-              </a:spcBef>
-              <a:spcAft>
-                <a:spcPts val="0"/>
-              </a:spcAft>
-              <a:buNone/>
-            </a:pPr>
-            <a:r>
-              <a:rPr lang="en-US" dirty="0"/>
-              <a:t>This is the second 'the database is doing concurrency engineering for you' moment (transactions were the first). Two fixes. The consistent-order fix is the textbook prevention - if every code path grabs locks in the same canonical order (lowest id first, alphabetical, whatever), no cycle can possibly form. It works but requires every contributor to know and follow the rule. The Postgres fix is the magic one: Postgres actively watches the lock-wait graph, and when it sees a cycle, it picks one transaction and aborts it with a </a:t>
-            </a:r>
-            <a:r>
-              <a:rPr lang="en-US" dirty="0" err="1"/>
-              <a:t>DeadlockDetected</a:t>
-            </a:r>
-            <a:r>
-              <a:rPr lang="en-US" dirty="0"/>
-              <a:t> exception. Your handler catches the exception, optionally retries the transaction, and life continues. They are almost certainly not going to hit this in the final project - it shows up once you have multi-row updates racing with each other - but it's worth knowing the DB has your back, since the symptom in pure Java (silent wedge) is brutal to debug.</a:t>
-            </a:r>
-            <a:endParaRPr dirty="0"/>
+            <a:r>
+              <a:t>Consistent order needs every contributor to follow it. Won't hit this in final project.</a:t>
+            </a:r>
           </a:p>
         </p:txBody>
       </p:sp>
@@ -8951,22 +7927,7 @@
             <a:noAutofit/>
           </a:bodyPr>
           <a:lstStyle/>
-          <a:p>
-            <a:pPr marL="0" lvl="0" indent="0" algn="l" rtl="0">
-              <a:spcBef>
-                <a:spcPts val="0"/>
-              </a:spcBef>
-              <a:spcAft>
-                <a:spcPts val="0"/>
-              </a:spcAft>
-              <a:buNone/>
-            </a:pPr>
-            <a:r>
-              <a:rPr lang="en-US" dirty="0"/>
-              <a:t>The concept they already know (a lock serializes access to shared state) is exactly right; the only thing that changed is WHERE the shared state is. In a single Java process, memory is shared, so a memory lock works. In a web app you've got multiple processes, maybe multiple machines, and they share nothing except the database, so the lock has to live there too. That's why the fix earlier was a transaction and not a Python version of synchronized. Good place to land the lecture's concept before the recap.</a:t>
-            </a:r>
-            <a:endParaRPr dirty="0"/>
-          </a:p>
+          <a:p/>
         </p:txBody>
       </p:sp>
       <p:sp>
@@ -9110,20 +8071,9 @@
           </a:bodyPr>
           <a:lstStyle/>
           <a:p>
-            <a:pPr marL="0" lvl="0" indent="0" algn="l" rtl="0">
-              <a:spcBef>
-                <a:spcPts val="0"/>
-              </a:spcBef>
-              <a:spcAft>
-                <a:spcPts val="0"/>
-              </a:spcAft>
-              <a:buNone/>
-            </a:pPr>
-            <a:r>
-              <a:rPr lang="en-US" dirty="0"/>
-              <a:t>Four takeaways and a forward ref to 9.2. The first one is the one I most want them to keep - the lost-update race on shared state is the actual lesson, and the transaction is the tool that makes it safe. Everything else (threads, event loop, async, the GIL) is supporting structure around that. If someone remembers one thing from the hour, I want it to be 'read-modify-write on shared state is a bug, and the database transaction is the lock that fixes it.'</a:t>
-            </a:r>
-            <a:endParaRPr dirty="0"/>
+            <a:r>
+              <a:t>First bullet is the one to keep.</a:t>
+            </a:r>
           </a:p>
         </p:txBody>
       </p:sp>
@@ -9268,20 +8218,9 @@
           </a:bodyPr>
           <a:lstStyle/>
           <a:p>
-            <a:pPr marL="0" lvl="0" indent="0" algn="l" rtl="0">
-              <a:spcBef>
-                <a:spcPts val="0"/>
-              </a:spcBef>
-              <a:spcAft>
-                <a:spcPts val="0"/>
-              </a:spcAft>
-              <a:buNone/>
-            </a:pPr>
-            <a:r>
-              <a:rPr lang="en-US" dirty="0"/>
-              <a:t>Set it up carefully, put two faces on the two users if it helps. The thing to land is that nobody wrote a buggy line - each handler is individually correct, read the balance, subtract, write it back, exactly what you'd do. The bug is in the interaction between two of them running at once, which is why it's so easy to write and so hard to catch in review. Don't explain WHY yet, that's the next few slides. Just let them sit with 'the math is right and the money is wrong.'</a:t>
-            </a:r>
-            <a:endParaRPr dirty="0"/>
+            <a:r>
+              <a:t>Don't explain why yet, timeline comes next.</a:t>
+            </a:r>
           </a:p>
         </p:txBody>
       </p:sp>
@@ -9426,20 +8365,9 @@
           </a:bodyPr>
           <a:lstStyle/>
           <a:p>
-            <a:pPr marL="0" lvl="0" indent="0" algn="l" rtl="0">
-              <a:spcBef>
-                <a:spcPts val="0"/>
-              </a:spcBef>
-              <a:spcAft>
-                <a:spcPts val="0"/>
-              </a:spcAft>
-              <a:buNone/>
-            </a:pPr>
-            <a:r>
-              <a:rPr lang="en-US" dirty="0"/>
-              <a:t>Set it up carefully, put two faces on the two users if it helps. The thing to land is that nobody wrote a buggy line - each handler is individually correct, read the balance, subtract, write it back, exactly what you'd do. The bug is in the interaction between two of them running at once, which is why it's so easy to write and so hard to catch in review. Don't explain WHY yet, that's the next few slides. Just let them sit with 'the math is right and the money is wrong.'</a:t>
-            </a:r>
-            <a:endParaRPr dirty="0"/>
+            <a:r>
+              <a:t>Don't explain why yet, timeline comes next.</a:t>
+            </a:r>
           </a:p>
         </p:txBody>
       </p:sp>
@@ -9584,20 +8512,9 @@
           </a:bodyPr>
           <a:lstStyle/>
           <a:p>
-            <a:pPr marL="0" lvl="0" indent="0" algn="l" rtl="0">
-              <a:spcBef>
-                <a:spcPts val="0"/>
-              </a:spcBef>
-              <a:spcAft>
-                <a:spcPts val="0"/>
-              </a:spcAft>
-              <a:buNone/>
-            </a:pPr>
-            <a:r>
-              <a:rPr lang="en-US" dirty="0"/>
-              <a:t>Set it up carefully, put two faces on the two users if it helps. The thing to land is that nobody wrote a buggy line - each handler is individually correct, read the balance, subtract, write it back, exactly what you'd do. The bug is in the interaction between two of them running at once, which is why it's so easy to write and so hard to catch in review. Don't explain WHY yet, that's the next few slides. Just let them sit with 'the math is right and the money is wrong.'</a:t>
-            </a:r>
-            <a:endParaRPr dirty="0"/>
+            <a:r>
+              <a:t>Don't explain why yet, timeline comes next.</a:t>
+            </a:r>
           </a:p>
         </p:txBody>
       </p:sp>
@@ -9742,20 +8659,9 @@
           </a:bodyPr>
           <a:lstStyle/>
           <a:p>
-            <a:pPr marL="0" lvl="0" indent="0" algn="l" rtl="0">
-              <a:spcBef>
-                <a:spcPts val="0"/>
-              </a:spcBef>
-              <a:spcAft>
-                <a:spcPts val="0"/>
-              </a:spcAft>
-              <a:buNone/>
-            </a:pPr>
-            <a:r>
-              <a:rPr lang="en-US" dirty="0"/>
-              <a:t>Walk this one slowly, line by line. The key moment is the second row: T2 reads the balance and sees 100, not 90, because T1 hasn't written its update yet. Both then compute 90 independently and both write 90, and the second write quietly overwrites the first. One whole withdrawal leaves no trace. This is about as common as concurrency bugs get in web apps, so it's worth making sure everyone actually sees the interleaving before moving on.</a:t>
-            </a:r>
-            <a:endParaRPr dirty="0"/>
+            <a:r>
+              <a:t>Walk line by line. Key row: T2 sees 100, T1 hasn't written yet.</a:t>
+            </a:r>
           </a:p>
         </p:txBody>
       </p:sp>
@@ -19883,1200 +18789,6 @@
     </p:bg>
     <p:spTree>
       <p:nvGrpSpPr>
-        <p:cNvPr id="1" name="Shape 154"/>
-        <p:cNvGrpSpPr/>
-        <p:nvPr/>
-      </p:nvGrpSpPr>
-      <p:grpSpPr>
-        <a:xfrm>
-          <a:off x="0" y="0"/>
-          <a:ext cx="0" cy="0"/>
-          <a:chOff x="0" y="0"/>
-          <a:chExt cx="0" cy="0"/>
-        </a:xfrm>
-      </p:grpSpPr>
-      <p:sp>
-        <p:nvSpPr>
-          <p:cNvPr id="155" name="Google Shape;155;g3e498caeefa_0_24"/>
-          <p:cNvSpPr txBox="1"/>
-          <p:nvPr/>
-        </p:nvSpPr>
-        <p:spPr>
-          <a:xfrm>
-            <a:off x="731520" y="365760"/>
-            <a:ext cx="10728600" cy="585000"/>
-          </a:xfrm>
-          <a:prstGeom prst="rect">
-            <a:avLst/>
-          </a:prstGeom>
-          <a:noFill/>
-          <a:ln>
-            <a:noFill/>
-          </a:ln>
-        </p:spPr>
-        <p:txBody>
-          <a:bodyPr spcFirstLastPara="1" wrap="square" lIns="91425" tIns="45700" rIns="91425" bIns="45700" anchor="t" anchorCtr="0">
-            <a:spAutoFit/>
-          </a:bodyPr>
-          <a:lstStyle/>
-          <a:p>
-            <a:pPr marL="0" marR="0" lvl="0" indent="0" algn="l" rtl="0">
-              <a:spcBef>
-                <a:spcPts val="0"/>
-              </a:spcBef>
-              <a:spcAft>
-                <a:spcPts val="0"/>
-              </a:spcAft>
-              <a:buNone/>
-            </a:pPr>
-            <a:r>
-              <a:rPr lang="en-US" sz="3200" b="1" i="0" u="none" strike="noStrike" cap="none">
-                <a:solidFill>
-                  <a:srgbClr val="1A1A2E"/>
-                </a:solidFill>
-                <a:latin typeface="Calibri"/>
-                <a:ea typeface="Calibri"/>
-                <a:cs typeface="Calibri"/>
-                <a:sym typeface="Calibri"/>
-              </a:rPr>
-              <a:t>The timeline of the race</a:t>
-            </a:r>
-            <a:endParaRPr/>
-          </a:p>
-        </p:txBody>
-      </p:sp>
-      <p:sp>
-        <p:nvSpPr>
-          <p:cNvPr id="156" name="Google Shape;156;g3e498caeefa_0_24"/>
-          <p:cNvSpPr txBox="1"/>
-          <p:nvPr/>
-        </p:nvSpPr>
-        <p:spPr>
-          <a:xfrm>
-            <a:off x="9601200" y="1188720"/>
-            <a:ext cx="1828800" cy="307800"/>
-          </a:xfrm>
-          <a:prstGeom prst="rect">
-            <a:avLst/>
-          </a:prstGeom>
-          <a:noFill/>
-          <a:ln>
-            <a:noFill/>
-          </a:ln>
-        </p:spPr>
-        <p:txBody>
-          <a:bodyPr spcFirstLastPara="1" wrap="square" lIns="91425" tIns="45700" rIns="91425" bIns="45700" anchor="t" anchorCtr="0">
-            <a:spAutoFit/>
-          </a:bodyPr>
-          <a:lstStyle/>
-          <a:p>
-            <a:pPr marL="0" marR="0" lvl="0" indent="0" algn="r" rtl="0">
-              <a:spcBef>
-                <a:spcPts val="0"/>
-              </a:spcBef>
-              <a:spcAft>
-                <a:spcPts val="0"/>
-              </a:spcAft>
-              <a:buNone/>
-            </a:pPr>
-            <a:r>
-              <a:rPr lang="en-US" sz="1400" b="0" i="0" u="none" strike="noStrike" cap="none">
-                <a:solidFill>
-                  <a:srgbClr val="5B21B6"/>
-                </a:solidFill>
-                <a:latin typeface="Courier New"/>
-                <a:ea typeface="Courier New"/>
-                <a:cs typeface="Courier New"/>
-                <a:sym typeface="Courier New"/>
-              </a:rPr>
-              <a:t>race timeline</a:t>
-            </a:r>
-            <a:endParaRPr/>
-          </a:p>
-        </p:txBody>
-      </p:sp>
-      <p:sp>
-        <p:nvSpPr>
-          <p:cNvPr id="157" name="Google Shape;157;g3e498caeefa_0_24"/>
-          <p:cNvSpPr/>
-          <p:nvPr/>
-        </p:nvSpPr>
-        <p:spPr>
-          <a:xfrm>
-            <a:off x="731520" y="1463040"/>
-            <a:ext cx="10728600" cy="4937700"/>
-          </a:xfrm>
-          <a:prstGeom prst="roundRect">
-            <a:avLst>
-              <a:gd name="adj" fmla="val 16667"/>
-            </a:avLst>
-          </a:prstGeom>
-          <a:solidFill>
-            <a:srgbClr val="F0F0F4"/>
-          </a:solidFill>
-          <a:ln w="12700" cap="flat" cmpd="sng">
-            <a:solidFill>
-              <a:srgbClr val="EEEEF0"/>
-            </a:solidFill>
-            <a:prstDash val="solid"/>
-            <a:round/>
-            <a:headEnd type="none" w="sm" len="sm"/>
-            <a:tailEnd type="none" w="sm" len="sm"/>
-          </a:ln>
-          <a:effectLst>
-            <a:outerShdw blurRad="40000" dist="23000" dir="5400000" rotWithShape="0">
-              <a:srgbClr val="000000">
-                <a:alpha val="34900"/>
-              </a:srgbClr>
-            </a:outerShdw>
-          </a:effectLst>
-        </p:spPr>
-        <p:txBody>
-          <a:bodyPr spcFirstLastPara="1" wrap="square" lIns="91425" tIns="45700" rIns="91425" bIns="45700" anchor="ctr" anchorCtr="0">
-            <a:noAutofit/>
-          </a:bodyPr>
-          <a:lstStyle/>
-          <a:p>
-            <a:pPr marL="0" marR="0" lvl="0" indent="0" algn="ctr" rtl="0">
-              <a:spcBef>
-                <a:spcPts val="0"/>
-              </a:spcBef>
-              <a:spcAft>
-                <a:spcPts val="0"/>
-              </a:spcAft>
-              <a:buNone/>
-            </a:pPr>
-            <a:endParaRPr sz="1800" b="0" i="0" u="none" strike="noStrike" cap="none">
-              <a:solidFill>
-                <a:schemeClr val="dk1"/>
-              </a:solidFill>
-              <a:latin typeface="Calibri"/>
-              <a:ea typeface="Calibri"/>
-              <a:cs typeface="Calibri"/>
-              <a:sym typeface="Calibri"/>
-            </a:endParaRPr>
-          </a:p>
-        </p:txBody>
-      </p:sp>
-      <p:sp>
-        <p:nvSpPr>
-          <p:cNvPr id="158" name="Google Shape;158;g3e498caeefa_0_24"/>
-          <p:cNvSpPr txBox="1"/>
-          <p:nvPr/>
-        </p:nvSpPr>
-        <p:spPr>
-          <a:xfrm>
-            <a:off x="1005840" y="1645920"/>
-            <a:ext cx="10179900" cy="2124000"/>
-          </a:xfrm>
-          <a:prstGeom prst="rect">
-            <a:avLst/>
-          </a:prstGeom>
-          <a:noFill/>
-          <a:ln>
-            <a:noFill/>
-          </a:ln>
-        </p:spPr>
-        <p:txBody>
-          <a:bodyPr spcFirstLastPara="1" wrap="square" lIns="91425" tIns="45700" rIns="91425" bIns="45700" anchor="t" anchorCtr="0">
-            <a:spAutoFit/>
-          </a:bodyPr>
-          <a:lstStyle/>
-          <a:p>
-            <a:pPr marL="0" marR="0" lvl="0" indent="0" algn="l" rtl="0">
-              <a:spcBef>
-                <a:spcPts val="0"/>
-              </a:spcBef>
-              <a:spcAft>
-                <a:spcPts val="0"/>
-              </a:spcAft>
-              <a:buNone/>
-            </a:pPr>
-            <a:r>
-              <a:rPr lang="en-US" sz="1800" b="1" i="0" u="none" strike="noStrike" cap="none">
-                <a:solidFill>
-                  <a:srgbClr val="333344"/>
-                </a:solidFill>
-                <a:latin typeface="Courier New"/>
-                <a:ea typeface="Courier New"/>
-                <a:cs typeface="Courier New"/>
-                <a:sym typeface="Courier New"/>
-              </a:rPr>
-              <a:t>Starting balance: $100. Two withdraw-$10 requests, T1 and T2.</a:t>
-            </a:r>
-            <a:endParaRPr/>
-          </a:p>
-          <a:p>
-            <a:pPr marL="0" marR="0" lvl="0" indent="0" algn="l" rtl="0">
-              <a:spcBef>
-                <a:spcPts val="200"/>
-              </a:spcBef>
-              <a:spcAft>
-                <a:spcPts val="0"/>
-              </a:spcAft>
-              <a:buNone/>
-            </a:pPr>
-            <a:endParaRPr sz="1800" b="1" i="0" u="none" strike="noStrike" cap="none">
-              <a:solidFill>
-                <a:srgbClr val="333344"/>
-              </a:solidFill>
-              <a:latin typeface="Courier New"/>
-              <a:ea typeface="Courier New"/>
-              <a:cs typeface="Courier New"/>
-              <a:sym typeface="Courier New"/>
-            </a:endParaRPr>
-          </a:p>
-          <a:p>
-            <a:pPr marL="0" marR="0" lvl="0" indent="0" algn="l" rtl="0">
-              <a:spcBef>
-                <a:spcPts val="200"/>
-              </a:spcBef>
-              <a:spcAft>
-                <a:spcPts val="0"/>
-              </a:spcAft>
-              <a:buNone/>
-            </a:pPr>
-            <a:r>
-              <a:rPr lang="en-US" sz="1800" b="1" i="0" u="none" strike="noStrike" cap="none">
-                <a:solidFill>
-                  <a:srgbClr val="333344"/>
-                </a:solidFill>
-                <a:latin typeface="Courier New"/>
-                <a:ea typeface="Courier New"/>
-                <a:cs typeface="Courier New"/>
-                <a:sym typeface="Courier New"/>
-              </a:rPr>
-              <a:t>T1 T2 | DB state        | What happened</a:t>
-            </a:r>
-            <a:endParaRPr/>
-          </a:p>
-          <a:p>
-            <a:pPr marL="0" marR="0" lvl="0" indent="0" algn="l" rtl="0">
-              <a:spcBef>
-                <a:spcPts val="200"/>
-              </a:spcBef>
-              <a:spcAft>
-                <a:spcPts val="0"/>
-              </a:spcAft>
-              <a:buNone/>
-            </a:pPr>
-            <a:r>
-              <a:rPr lang="en-US" sz="1800" b="1" i="0" u="none" strike="noStrike" cap="none">
-                <a:solidFill>
-                  <a:srgbClr val="333344"/>
-                </a:solidFill>
-                <a:latin typeface="Courier New"/>
-                <a:ea typeface="Courier New"/>
-                <a:cs typeface="Courier New"/>
-                <a:sym typeface="Courier New"/>
-              </a:rPr>
-              <a:t>------+-----------------+-----------------------------------</a:t>
-            </a:r>
-            <a:endParaRPr/>
-          </a:p>
-          <a:p>
-            <a:pPr marL="0" marR="0" lvl="0" indent="0" algn="l" rtl="0">
-              <a:spcBef>
-                <a:spcPts val="200"/>
-              </a:spcBef>
-              <a:spcAft>
-                <a:spcPts val="0"/>
-              </a:spcAft>
-              <a:buNone/>
-            </a:pPr>
-            <a:r>
-              <a:rPr lang="en-US" sz="1800" b="1" i="0" u="none" strike="noStrike" cap="none">
-                <a:solidFill>
-                  <a:srgbClr val="333344"/>
-                </a:solidFill>
-                <a:latin typeface="Courier New"/>
-                <a:ea typeface="Courier New"/>
-                <a:cs typeface="Courier New"/>
-                <a:sym typeface="Courier New"/>
-              </a:rPr>
-              <a:t> &gt;    | balance = 100   | T1 reads balance -&gt; sees 100</a:t>
-            </a:r>
-            <a:endParaRPr/>
-          </a:p>
-          <a:p>
-            <a:pPr marL="0" marR="0" lvl="0" indent="0" algn="l" rtl="0">
-              <a:spcBef>
-                <a:spcPts val="200"/>
-              </a:spcBef>
-              <a:spcAft>
-                <a:spcPts val="0"/>
-              </a:spcAft>
-              <a:buNone/>
-            </a:pPr>
-            <a:r>
-              <a:rPr lang="en-US" sz="1800" b="1" i="0" u="none" strike="noStrike" cap="none">
-                <a:solidFill>
-                  <a:srgbClr val="333344"/>
-                </a:solidFill>
-                <a:latin typeface="Courier New"/>
-                <a:ea typeface="Courier New"/>
-                <a:cs typeface="Courier New"/>
-                <a:sym typeface="Courier New"/>
-              </a:rPr>
-              <a:t>    &gt; | balance = 100   | T2 reads balance -&gt; sees 100</a:t>
-            </a:r>
-            <a:endParaRPr/>
-          </a:p>
-          <a:p>
-            <a:pPr marL="0" marR="0" lvl="0" indent="0" algn="l" rtl="0">
-              <a:spcBef>
-                <a:spcPts val="200"/>
-              </a:spcBef>
-              <a:spcAft>
-                <a:spcPts val="0"/>
-              </a:spcAft>
-              <a:buNone/>
-            </a:pPr>
-            <a:endParaRPr/>
-          </a:p>
-        </p:txBody>
-      </p:sp>
-    </p:spTree>
-  </p:cSld>
-  <p:clrMapOvr>
-    <a:masterClrMapping/>
-  </p:clrMapOvr>
-</p:sld>
-</file>
-
-<file path=ppt/slides/slide11.xml><?xml version="1.0" encoding="utf-8"?>
-<p:sld xmlns:a="http://schemas.openxmlformats.org/drawingml/2006/main" xmlns:r="http://schemas.openxmlformats.org/officeDocument/2006/relationships" xmlns:p="http://schemas.openxmlformats.org/presentationml/2006/main">
-  <p:cSld>
-    <p:bg>
-      <p:bgPr>
-        <a:solidFill>
-          <a:srgbClr val="FFFFFF"/>
-        </a:solidFill>
-        <a:effectLst/>
-      </p:bgPr>
-    </p:bg>
-    <p:spTree>
-      <p:nvGrpSpPr>
-        <p:cNvPr id="1" name="Shape 163"/>
-        <p:cNvGrpSpPr/>
-        <p:nvPr/>
-      </p:nvGrpSpPr>
-      <p:grpSpPr>
-        <a:xfrm>
-          <a:off x="0" y="0"/>
-          <a:ext cx="0" cy="0"/>
-          <a:chOff x="0" y="0"/>
-          <a:chExt cx="0" cy="0"/>
-        </a:xfrm>
-      </p:grpSpPr>
-      <p:sp>
-        <p:nvSpPr>
-          <p:cNvPr id="164" name="Google Shape;164;g3e498caeefa_0_8"/>
-          <p:cNvSpPr txBox="1"/>
-          <p:nvPr/>
-        </p:nvSpPr>
-        <p:spPr>
-          <a:xfrm>
-            <a:off x="731520" y="365760"/>
-            <a:ext cx="10728600" cy="585000"/>
-          </a:xfrm>
-          <a:prstGeom prst="rect">
-            <a:avLst/>
-          </a:prstGeom>
-          <a:noFill/>
-          <a:ln>
-            <a:noFill/>
-          </a:ln>
-        </p:spPr>
-        <p:txBody>
-          <a:bodyPr spcFirstLastPara="1" wrap="square" lIns="91425" tIns="45700" rIns="91425" bIns="45700" anchor="t" anchorCtr="0">
-            <a:spAutoFit/>
-          </a:bodyPr>
-          <a:lstStyle/>
-          <a:p>
-            <a:pPr marL="0" marR="0" lvl="0" indent="0" algn="l" rtl="0">
-              <a:spcBef>
-                <a:spcPts val="0"/>
-              </a:spcBef>
-              <a:spcAft>
-                <a:spcPts val="0"/>
-              </a:spcAft>
-              <a:buNone/>
-            </a:pPr>
-            <a:r>
-              <a:rPr lang="en-US" sz="3200" b="1" i="0" u="none" strike="noStrike" cap="none">
-                <a:solidFill>
-                  <a:srgbClr val="1A1A2E"/>
-                </a:solidFill>
-                <a:latin typeface="Calibri"/>
-                <a:ea typeface="Calibri"/>
-                <a:cs typeface="Calibri"/>
-                <a:sym typeface="Calibri"/>
-              </a:rPr>
-              <a:t>The timeline of the race</a:t>
-            </a:r>
-            <a:endParaRPr/>
-          </a:p>
-        </p:txBody>
-      </p:sp>
-      <p:sp>
-        <p:nvSpPr>
-          <p:cNvPr id="165" name="Google Shape;165;g3e498caeefa_0_8"/>
-          <p:cNvSpPr txBox="1"/>
-          <p:nvPr/>
-        </p:nvSpPr>
-        <p:spPr>
-          <a:xfrm>
-            <a:off x="9601200" y="1188720"/>
-            <a:ext cx="1828800" cy="307800"/>
-          </a:xfrm>
-          <a:prstGeom prst="rect">
-            <a:avLst/>
-          </a:prstGeom>
-          <a:noFill/>
-          <a:ln>
-            <a:noFill/>
-          </a:ln>
-        </p:spPr>
-        <p:txBody>
-          <a:bodyPr spcFirstLastPara="1" wrap="square" lIns="91425" tIns="45700" rIns="91425" bIns="45700" anchor="t" anchorCtr="0">
-            <a:spAutoFit/>
-          </a:bodyPr>
-          <a:lstStyle/>
-          <a:p>
-            <a:pPr marL="0" marR="0" lvl="0" indent="0" algn="r" rtl="0">
-              <a:spcBef>
-                <a:spcPts val="0"/>
-              </a:spcBef>
-              <a:spcAft>
-                <a:spcPts val="0"/>
-              </a:spcAft>
-              <a:buNone/>
-            </a:pPr>
-            <a:r>
-              <a:rPr lang="en-US" sz="1400" b="0" i="0" u="none" strike="noStrike" cap="none">
-                <a:solidFill>
-                  <a:srgbClr val="5B21B6"/>
-                </a:solidFill>
-                <a:latin typeface="Courier New"/>
-                <a:ea typeface="Courier New"/>
-                <a:cs typeface="Courier New"/>
-                <a:sym typeface="Courier New"/>
-              </a:rPr>
-              <a:t>race timeline</a:t>
-            </a:r>
-            <a:endParaRPr/>
-          </a:p>
-        </p:txBody>
-      </p:sp>
-      <p:sp>
-        <p:nvSpPr>
-          <p:cNvPr id="166" name="Google Shape;166;g3e498caeefa_0_8"/>
-          <p:cNvSpPr/>
-          <p:nvPr/>
-        </p:nvSpPr>
-        <p:spPr>
-          <a:xfrm>
-            <a:off x="731520" y="1463040"/>
-            <a:ext cx="10728600" cy="4937700"/>
-          </a:xfrm>
-          <a:prstGeom prst="roundRect">
-            <a:avLst>
-              <a:gd name="adj" fmla="val 16667"/>
-            </a:avLst>
-          </a:prstGeom>
-          <a:solidFill>
-            <a:srgbClr val="F0F0F4"/>
-          </a:solidFill>
-          <a:ln w="12700" cap="flat" cmpd="sng">
-            <a:solidFill>
-              <a:srgbClr val="EEEEF0"/>
-            </a:solidFill>
-            <a:prstDash val="solid"/>
-            <a:round/>
-            <a:headEnd type="none" w="sm" len="sm"/>
-            <a:tailEnd type="none" w="sm" len="sm"/>
-          </a:ln>
-          <a:effectLst>
-            <a:outerShdw blurRad="40000" dist="23000" dir="5400000" rotWithShape="0">
-              <a:srgbClr val="000000">
-                <a:alpha val="34900"/>
-              </a:srgbClr>
-            </a:outerShdw>
-          </a:effectLst>
-        </p:spPr>
-        <p:txBody>
-          <a:bodyPr spcFirstLastPara="1" wrap="square" lIns="91425" tIns="45700" rIns="91425" bIns="45700" anchor="ctr" anchorCtr="0">
-            <a:noAutofit/>
-          </a:bodyPr>
-          <a:lstStyle/>
-          <a:p>
-            <a:pPr marL="0" marR="0" lvl="0" indent="0" algn="ctr" rtl="0">
-              <a:spcBef>
-                <a:spcPts val="0"/>
-              </a:spcBef>
-              <a:spcAft>
-                <a:spcPts val="0"/>
-              </a:spcAft>
-              <a:buNone/>
-            </a:pPr>
-            <a:endParaRPr sz="1800" b="0" i="0" u="none" strike="noStrike" cap="none">
-              <a:solidFill>
-                <a:schemeClr val="dk1"/>
-              </a:solidFill>
-              <a:latin typeface="Calibri"/>
-              <a:ea typeface="Calibri"/>
-              <a:cs typeface="Calibri"/>
-              <a:sym typeface="Calibri"/>
-            </a:endParaRPr>
-          </a:p>
-        </p:txBody>
-      </p:sp>
-      <p:sp>
-        <p:nvSpPr>
-          <p:cNvPr id="167" name="Google Shape;167;g3e498caeefa_0_8"/>
-          <p:cNvSpPr txBox="1"/>
-          <p:nvPr/>
-        </p:nvSpPr>
-        <p:spPr>
-          <a:xfrm>
-            <a:off x="1005840" y="1645920"/>
-            <a:ext cx="10179900" cy="2426700"/>
-          </a:xfrm>
-          <a:prstGeom prst="rect">
-            <a:avLst/>
-          </a:prstGeom>
-          <a:noFill/>
-          <a:ln>
-            <a:noFill/>
-          </a:ln>
-        </p:spPr>
-        <p:txBody>
-          <a:bodyPr spcFirstLastPara="1" wrap="square" lIns="91425" tIns="45700" rIns="91425" bIns="45700" anchor="t" anchorCtr="0">
-            <a:spAutoFit/>
-          </a:bodyPr>
-          <a:lstStyle/>
-          <a:p>
-            <a:pPr marL="0" marR="0" lvl="0" indent="0" algn="l" rtl="0">
-              <a:spcBef>
-                <a:spcPts val="0"/>
-              </a:spcBef>
-              <a:spcAft>
-                <a:spcPts val="0"/>
-              </a:spcAft>
-              <a:buNone/>
-            </a:pPr>
-            <a:r>
-              <a:rPr lang="en-US" sz="1800" b="1" i="0" u="none" strike="noStrike" cap="none">
-                <a:solidFill>
-                  <a:srgbClr val="333344"/>
-                </a:solidFill>
-                <a:latin typeface="Courier New"/>
-                <a:ea typeface="Courier New"/>
-                <a:cs typeface="Courier New"/>
-                <a:sym typeface="Courier New"/>
-              </a:rPr>
-              <a:t>Starting balance: $100. Two withdraw-$10 requests, T1 and T2.</a:t>
-            </a:r>
-            <a:endParaRPr/>
-          </a:p>
-          <a:p>
-            <a:pPr marL="0" marR="0" lvl="0" indent="0" algn="l" rtl="0">
-              <a:spcBef>
-                <a:spcPts val="200"/>
-              </a:spcBef>
-              <a:spcAft>
-                <a:spcPts val="0"/>
-              </a:spcAft>
-              <a:buNone/>
-            </a:pPr>
-            <a:endParaRPr sz="1800" b="1" i="0" u="none" strike="noStrike" cap="none">
-              <a:solidFill>
-                <a:srgbClr val="333344"/>
-              </a:solidFill>
-              <a:latin typeface="Courier New"/>
-              <a:ea typeface="Courier New"/>
-              <a:cs typeface="Courier New"/>
-              <a:sym typeface="Courier New"/>
-            </a:endParaRPr>
-          </a:p>
-          <a:p>
-            <a:pPr marL="0" marR="0" lvl="0" indent="0" algn="l" rtl="0">
-              <a:spcBef>
-                <a:spcPts val="200"/>
-              </a:spcBef>
-              <a:spcAft>
-                <a:spcPts val="0"/>
-              </a:spcAft>
-              <a:buNone/>
-            </a:pPr>
-            <a:r>
-              <a:rPr lang="en-US" sz="1800" b="1" i="0" u="none" strike="noStrike" cap="none">
-                <a:solidFill>
-                  <a:srgbClr val="333344"/>
-                </a:solidFill>
-                <a:latin typeface="Courier New"/>
-                <a:ea typeface="Courier New"/>
-                <a:cs typeface="Courier New"/>
-                <a:sym typeface="Courier New"/>
-              </a:rPr>
-              <a:t>T1 T2 | DB state        | What happened</a:t>
-            </a:r>
-            <a:endParaRPr/>
-          </a:p>
-          <a:p>
-            <a:pPr marL="0" marR="0" lvl="0" indent="0" algn="l" rtl="0">
-              <a:spcBef>
-                <a:spcPts val="200"/>
-              </a:spcBef>
-              <a:spcAft>
-                <a:spcPts val="0"/>
-              </a:spcAft>
-              <a:buNone/>
-            </a:pPr>
-            <a:r>
-              <a:rPr lang="en-US" sz="1800" b="1" i="0" u="none" strike="noStrike" cap="none">
-                <a:solidFill>
-                  <a:srgbClr val="333344"/>
-                </a:solidFill>
-                <a:latin typeface="Courier New"/>
-                <a:ea typeface="Courier New"/>
-                <a:cs typeface="Courier New"/>
-                <a:sym typeface="Courier New"/>
-              </a:rPr>
-              <a:t>------+-----------------+-----------------------------------</a:t>
-            </a:r>
-            <a:endParaRPr/>
-          </a:p>
-          <a:p>
-            <a:pPr marL="0" marR="0" lvl="0" indent="0" algn="l" rtl="0">
-              <a:spcBef>
-                <a:spcPts val="200"/>
-              </a:spcBef>
-              <a:spcAft>
-                <a:spcPts val="0"/>
-              </a:spcAft>
-              <a:buNone/>
-            </a:pPr>
-            <a:r>
-              <a:rPr lang="en-US" sz="1800" b="1" i="0" u="none" strike="noStrike" cap="none">
-                <a:solidFill>
-                  <a:srgbClr val="333344"/>
-                </a:solidFill>
-                <a:latin typeface="Courier New"/>
-                <a:ea typeface="Courier New"/>
-                <a:cs typeface="Courier New"/>
-                <a:sym typeface="Courier New"/>
-              </a:rPr>
-              <a:t> &gt;    | balance = 100   | T1 reads balance -&gt; sees 100</a:t>
-            </a:r>
-            <a:endParaRPr/>
-          </a:p>
-          <a:p>
-            <a:pPr marL="0" marR="0" lvl="0" indent="0" algn="l" rtl="0">
-              <a:spcBef>
-                <a:spcPts val="200"/>
-              </a:spcBef>
-              <a:spcAft>
-                <a:spcPts val="0"/>
-              </a:spcAft>
-              <a:buNone/>
-            </a:pPr>
-            <a:r>
-              <a:rPr lang="en-US" sz="1800" b="1" i="0" u="none" strike="noStrike" cap="none">
-                <a:solidFill>
-                  <a:srgbClr val="333344"/>
-                </a:solidFill>
-                <a:latin typeface="Courier New"/>
-                <a:ea typeface="Courier New"/>
-                <a:cs typeface="Courier New"/>
-                <a:sym typeface="Courier New"/>
-              </a:rPr>
-              <a:t>    &gt; | balance = 100   | T2 reads balance -&gt; sees 100</a:t>
-            </a:r>
-            <a:endParaRPr/>
-          </a:p>
-          <a:p>
-            <a:pPr marL="0" marR="0" lvl="0" indent="0" algn="l" rtl="0">
-              <a:spcBef>
-                <a:spcPts val="200"/>
-              </a:spcBef>
-              <a:spcAft>
-                <a:spcPts val="0"/>
-              </a:spcAft>
-              <a:buNone/>
-            </a:pPr>
-            <a:r>
-              <a:rPr lang="en-US" sz="1800" b="1" i="0" u="none" strike="noStrike" cap="none">
-                <a:solidFill>
-                  <a:srgbClr val="333344"/>
-                </a:solidFill>
-                <a:latin typeface="Courier New"/>
-                <a:ea typeface="Courier New"/>
-                <a:cs typeface="Courier New"/>
-                <a:sym typeface="Courier New"/>
-              </a:rPr>
-              <a:t> &gt;    | balance = 100   | T1 computes 100 - 10 = 90</a:t>
-            </a:r>
-            <a:endParaRPr/>
-          </a:p>
-          <a:p>
-            <a:pPr marL="0" marR="0" lvl="0" indent="0" algn="l" rtl="0">
-              <a:spcBef>
-                <a:spcPts val="200"/>
-              </a:spcBef>
-              <a:spcAft>
-                <a:spcPts val="0"/>
-              </a:spcAft>
-              <a:buNone/>
-            </a:pPr>
-            <a:endParaRPr/>
-          </a:p>
-        </p:txBody>
-      </p:sp>
-    </p:spTree>
-  </p:cSld>
-  <p:clrMapOvr>
-    <a:masterClrMapping/>
-  </p:clrMapOvr>
-</p:sld>
-</file>
-
-<file path=ppt/slides/slide12.xml><?xml version="1.0" encoding="utf-8"?>
-<p:sld xmlns:a="http://schemas.openxmlformats.org/drawingml/2006/main" xmlns:r="http://schemas.openxmlformats.org/officeDocument/2006/relationships" xmlns:p="http://schemas.openxmlformats.org/presentationml/2006/main">
-  <p:cSld>
-    <p:bg>
-      <p:bgPr>
-        <a:solidFill>
-          <a:srgbClr val="FFFFFF"/>
-        </a:solidFill>
-        <a:effectLst/>
-      </p:bgPr>
-    </p:bg>
-    <p:spTree>
-      <p:nvGrpSpPr>
-        <p:cNvPr id="1" name="Shape 172"/>
-        <p:cNvGrpSpPr/>
-        <p:nvPr/>
-      </p:nvGrpSpPr>
-      <p:grpSpPr>
-        <a:xfrm>
-          <a:off x="0" y="0"/>
-          <a:ext cx="0" cy="0"/>
-          <a:chOff x="0" y="0"/>
-          <a:chExt cx="0" cy="0"/>
-        </a:xfrm>
-      </p:grpSpPr>
-      <p:sp>
-        <p:nvSpPr>
-          <p:cNvPr id="173" name="Google Shape;173;g3e498caeefa_0_0"/>
-          <p:cNvSpPr txBox="1"/>
-          <p:nvPr/>
-        </p:nvSpPr>
-        <p:spPr>
-          <a:xfrm>
-            <a:off x="731520" y="365760"/>
-            <a:ext cx="10728600" cy="585000"/>
-          </a:xfrm>
-          <a:prstGeom prst="rect">
-            <a:avLst/>
-          </a:prstGeom>
-          <a:noFill/>
-          <a:ln>
-            <a:noFill/>
-          </a:ln>
-        </p:spPr>
-        <p:txBody>
-          <a:bodyPr spcFirstLastPara="1" wrap="square" lIns="91425" tIns="45700" rIns="91425" bIns="45700" anchor="t" anchorCtr="0">
-            <a:spAutoFit/>
-          </a:bodyPr>
-          <a:lstStyle/>
-          <a:p>
-            <a:pPr marL="0" marR="0" lvl="0" indent="0" algn="l" rtl="0">
-              <a:spcBef>
-                <a:spcPts val="0"/>
-              </a:spcBef>
-              <a:spcAft>
-                <a:spcPts val="0"/>
-              </a:spcAft>
-              <a:buNone/>
-            </a:pPr>
-            <a:r>
-              <a:rPr lang="en-US" sz="3200" b="1" i="0" u="none" strike="noStrike" cap="none">
-                <a:solidFill>
-                  <a:srgbClr val="1A1A2E"/>
-                </a:solidFill>
-                <a:latin typeface="Calibri"/>
-                <a:ea typeface="Calibri"/>
-                <a:cs typeface="Calibri"/>
-                <a:sym typeface="Calibri"/>
-              </a:rPr>
-              <a:t>The timeline of the race</a:t>
-            </a:r>
-            <a:endParaRPr/>
-          </a:p>
-        </p:txBody>
-      </p:sp>
-      <p:sp>
-        <p:nvSpPr>
-          <p:cNvPr id="174" name="Google Shape;174;g3e498caeefa_0_0"/>
-          <p:cNvSpPr txBox="1"/>
-          <p:nvPr/>
-        </p:nvSpPr>
-        <p:spPr>
-          <a:xfrm>
-            <a:off x="9601200" y="1188720"/>
-            <a:ext cx="1828800" cy="307800"/>
-          </a:xfrm>
-          <a:prstGeom prst="rect">
-            <a:avLst/>
-          </a:prstGeom>
-          <a:noFill/>
-          <a:ln>
-            <a:noFill/>
-          </a:ln>
-        </p:spPr>
-        <p:txBody>
-          <a:bodyPr spcFirstLastPara="1" wrap="square" lIns="91425" tIns="45700" rIns="91425" bIns="45700" anchor="t" anchorCtr="0">
-            <a:spAutoFit/>
-          </a:bodyPr>
-          <a:lstStyle/>
-          <a:p>
-            <a:pPr marL="0" marR="0" lvl="0" indent="0" algn="r" rtl="0">
-              <a:spcBef>
-                <a:spcPts val="0"/>
-              </a:spcBef>
-              <a:spcAft>
-                <a:spcPts val="0"/>
-              </a:spcAft>
-              <a:buNone/>
-            </a:pPr>
-            <a:r>
-              <a:rPr lang="en-US" sz="1400" b="0" i="0" u="none" strike="noStrike" cap="none">
-                <a:solidFill>
-                  <a:srgbClr val="5B21B6"/>
-                </a:solidFill>
-                <a:latin typeface="Courier New"/>
-                <a:ea typeface="Courier New"/>
-                <a:cs typeface="Courier New"/>
-                <a:sym typeface="Courier New"/>
-              </a:rPr>
-              <a:t>race timeline</a:t>
-            </a:r>
-            <a:endParaRPr/>
-          </a:p>
-        </p:txBody>
-      </p:sp>
-      <p:sp>
-        <p:nvSpPr>
-          <p:cNvPr id="175" name="Google Shape;175;g3e498caeefa_0_0"/>
-          <p:cNvSpPr/>
-          <p:nvPr/>
-        </p:nvSpPr>
-        <p:spPr>
-          <a:xfrm>
-            <a:off x="731520" y="1463040"/>
-            <a:ext cx="10728600" cy="4937700"/>
-          </a:xfrm>
-          <a:prstGeom prst="roundRect">
-            <a:avLst>
-              <a:gd name="adj" fmla="val 16667"/>
-            </a:avLst>
-          </a:prstGeom>
-          <a:solidFill>
-            <a:srgbClr val="F0F0F4"/>
-          </a:solidFill>
-          <a:ln w="12700" cap="flat" cmpd="sng">
-            <a:solidFill>
-              <a:srgbClr val="EEEEF0"/>
-            </a:solidFill>
-            <a:prstDash val="solid"/>
-            <a:round/>
-            <a:headEnd type="none" w="sm" len="sm"/>
-            <a:tailEnd type="none" w="sm" len="sm"/>
-          </a:ln>
-          <a:effectLst>
-            <a:outerShdw blurRad="40000" dist="23000" dir="5400000" rotWithShape="0">
-              <a:srgbClr val="000000">
-                <a:alpha val="34900"/>
-              </a:srgbClr>
-            </a:outerShdw>
-          </a:effectLst>
-        </p:spPr>
-        <p:txBody>
-          <a:bodyPr spcFirstLastPara="1" wrap="square" lIns="91425" tIns="45700" rIns="91425" bIns="45700" anchor="ctr" anchorCtr="0">
-            <a:noAutofit/>
-          </a:bodyPr>
-          <a:lstStyle/>
-          <a:p>
-            <a:pPr marL="0" marR="0" lvl="0" indent="0" algn="ctr" rtl="0">
-              <a:spcBef>
-                <a:spcPts val="0"/>
-              </a:spcBef>
-              <a:spcAft>
-                <a:spcPts val="0"/>
-              </a:spcAft>
-              <a:buNone/>
-            </a:pPr>
-            <a:endParaRPr sz="1800" b="0" i="0" u="none" strike="noStrike" cap="none">
-              <a:solidFill>
-                <a:schemeClr val="dk1"/>
-              </a:solidFill>
-              <a:latin typeface="Calibri"/>
-              <a:ea typeface="Calibri"/>
-              <a:cs typeface="Calibri"/>
-              <a:sym typeface="Calibri"/>
-            </a:endParaRPr>
-          </a:p>
-        </p:txBody>
-      </p:sp>
-      <p:sp>
-        <p:nvSpPr>
-          <p:cNvPr id="176" name="Google Shape;176;g3e498caeefa_0_0"/>
-          <p:cNvSpPr txBox="1"/>
-          <p:nvPr/>
-        </p:nvSpPr>
-        <p:spPr>
-          <a:xfrm>
-            <a:off x="1005840" y="1645920"/>
-            <a:ext cx="10179900" cy="2729400"/>
-          </a:xfrm>
-          <a:prstGeom prst="rect">
-            <a:avLst/>
-          </a:prstGeom>
-          <a:noFill/>
-          <a:ln>
-            <a:noFill/>
-          </a:ln>
-        </p:spPr>
-        <p:txBody>
-          <a:bodyPr spcFirstLastPara="1" wrap="square" lIns="91425" tIns="45700" rIns="91425" bIns="45700" anchor="t" anchorCtr="0">
-            <a:spAutoFit/>
-          </a:bodyPr>
-          <a:lstStyle/>
-          <a:p>
-            <a:pPr marL="0" marR="0" lvl="0" indent="0" algn="l" rtl="0">
-              <a:spcBef>
-                <a:spcPts val="0"/>
-              </a:spcBef>
-              <a:spcAft>
-                <a:spcPts val="0"/>
-              </a:spcAft>
-              <a:buNone/>
-            </a:pPr>
-            <a:r>
-              <a:rPr lang="en-US" sz="1800" b="1" i="0" u="none" strike="noStrike" cap="none">
-                <a:solidFill>
-                  <a:srgbClr val="333344"/>
-                </a:solidFill>
-                <a:latin typeface="Courier New"/>
-                <a:ea typeface="Courier New"/>
-                <a:cs typeface="Courier New"/>
-                <a:sym typeface="Courier New"/>
-              </a:rPr>
-              <a:t>Starting balance: $100. Two withdraw-$10 requests, T1 and T2.</a:t>
-            </a:r>
-            <a:endParaRPr/>
-          </a:p>
-          <a:p>
-            <a:pPr marL="0" marR="0" lvl="0" indent="0" algn="l" rtl="0">
-              <a:spcBef>
-                <a:spcPts val="200"/>
-              </a:spcBef>
-              <a:spcAft>
-                <a:spcPts val="0"/>
-              </a:spcAft>
-              <a:buNone/>
-            </a:pPr>
-            <a:endParaRPr sz="1800" b="1" i="0" u="none" strike="noStrike" cap="none">
-              <a:solidFill>
-                <a:srgbClr val="333344"/>
-              </a:solidFill>
-              <a:latin typeface="Courier New"/>
-              <a:ea typeface="Courier New"/>
-              <a:cs typeface="Courier New"/>
-              <a:sym typeface="Courier New"/>
-            </a:endParaRPr>
-          </a:p>
-          <a:p>
-            <a:pPr marL="0" marR="0" lvl="0" indent="0" algn="l" rtl="0">
-              <a:spcBef>
-                <a:spcPts val="200"/>
-              </a:spcBef>
-              <a:spcAft>
-                <a:spcPts val="0"/>
-              </a:spcAft>
-              <a:buNone/>
-            </a:pPr>
-            <a:r>
-              <a:rPr lang="en-US" sz="1800" b="1" i="0" u="none" strike="noStrike" cap="none">
-                <a:solidFill>
-                  <a:srgbClr val="333344"/>
-                </a:solidFill>
-                <a:latin typeface="Courier New"/>
-                <a:ea typeface="Courier New"/>
-                <a:cs typeface="Courier New"/>
-                <a:sym typeface="Courier New"/>
-              </a:rPr>
-              <a:t>T1 T2 | DB state        | What happened</a:t>
-            </a:r>
-            <a:endParaRPr/>
-          </a:p>
-          <a:p>
-            <a:pPr marL="0" marR="0" lvl="0" indent="0" algn="l" rtl="0">
-              <a:spcBef>
-                <a:spcPts val="200"/>
-              </a:spcBef>
-              <a:spcAft>
-                <a:spcPts val="0"/>
-              </a:spcAft>
-              <a:buNone/>
-            </a:pPr>
-            <a:r>
-              <a:rPr lang="en-US" sz="1800" b="1" i="0" u="none" strike="noStrike" cap="none">
-                <a:solidFill>
-                  <a:srgbClr val="333344"/>
-                </a:solidFill>
-                <a:latin typeface="Courier New"/>
-                <a:ea typeface="Courier New"/>
-                <a:cs typeface="Courier New"/>
-                <a:sym typeface="Courier New"/>
-              </a:rPr>
-              <a:t>------+-----------------+-----------------------------------</a:t>
-            </a:r>
-            <a:endParaRPr/>
-          </a:p>
-          <a:p>
-            <a:pPr marL="0" marR="0" lvl="0" indent="0" algn="l" rtl="0">
-              <a:spcBef>
-                <a:spcPts val="200"/>
-              </a:spcBef>
-              <a:spcAft>
-                <a:spcPts val="0"/>
-              </a:spcAft>
-              <a:buNone/>
-            </a:pPr>
-            <a:r>
-              <a:rPr lang="en-US" sz="1800" b="1" i="0" u="none" strike="noStrike" cap="none">
-                <a:solidFill>
-                  <a:srgbClr val="333344"/>
-                </a:solidFill>
-                <a:latin typeface="Courier New"/>
-                <a:ea typeface="Courier New"/>
-                <a:cs typeface="Courier New"/>
-                <a:sym typeface="Courier New"/>
-              </a:rPr>
-              <a:t> &gt;    | balance = 100   | T1 reads balance -&gt; sees 100</a:t>
-            </a:r>
-            <a:endParaRPr/>
-          </a:p>
-          <a:p>
-            <a:pPr marL="0" marR="0" lvl="0" indent="0" algn="l" rtl="0">
-              <a:spcBef>
-                <a:spcPts val="200"/>
-              </a:spcBef>
-              <a:spcAft>
-                <a:spcPts val="0"/>
-              </a:spcAft>
-              <a:buNone/>
-            </a:pPr>
-            <a:r>
-              <a:rPr lang="en-US" sz="1800" b="1" i="0" u="none" strike="noStrike" cap="none">
-                <a:solidFill>
-                  <a:srgbClr val="333344"/>
-                </a:solidFill>
-                <a:latin typeface="Courier New"/>
-                <a:ea typeface="Courier New"/>
-                <a:cs typeface="Courier New"/>
-                <a:sym typeface="Courier New"/>
-              </a:rPr>
-              <a:t>    &gt; | balance = 100   | T2 reads balance -&gt; sees 100</a:t>
-            </a:r>
-            <a:endParaRPr/>
-          </a:p>
-          <a:p>
-            <a:pPr marL="0" marR="0" lvl="0" indent="0" algn="l" rtl="0">
-              <a:spcBef>
-                <a:spcPts val="200"/>
-              </a:spcBef>
-              <a:spcAft>
-                <a:spcPts val="0"/>
-              </a:spcAft>
-              <a:buNone/>
-            </a:pPr>
-            <a:r>
-              <a:rPr lang="en-US" sz="1800" b="1" i="0" u="none" strike="noStrike" cap="none">
-                <a:solidFill>
-                  <a:srgbClr val="333344"/>
-                </a:solidFill>
-                <a:latin typeface="Courier New"/>
-                <a:ea typeface="Courier New"/>
-                <a:cs typeface="Courier New"/>
-                <a:sym typeface="Courier New"/>
-              </a:rPr>
-              <a:t> &gt;    | balance = 100   | T1 computes 100 - 10 = 90</a:t>
-            </a:r>
-            <a:endParaRPr/>
-          </a:p>
-          <a:p>
-            <a:pPr marL="0" marR="0" lvl="0" indent="0" algn="l" rtl="0">
-              <a:spcBef>
-                <a:spcPts val="200"/>
-              </a:spcBef>
-              <a:spcAft>
-                <a:spcPts val="0"/>
-              </a:spcAft>
-              <a:buNone/>
-            </a:pPr>
-            <a:r>
-              <a:rPr lang="en-US" sz="1800" b="1" i="0" u="none" strike="noStrike" cap="none">
-                <a:solidFill>
-                  <a:srgbClr val="333344"/>
-                </a:solidFill>
-                <a:latin typeface="Courier New"/>
-                <a:ea typeface="Courier New"/>
-                <a:cs typeface="Courier New"/>
-                <a:sym typeface="Courier New"/>
-              </a:rPr>
-              <a:t>    &gt; | balance = 100   | T2 computes 100 - 10 = 90</a:t>
-            </a:r>
-            <a:endParaRPr/>
-          </a:p>
-          <a:p>
-            <a:pPr marL="0" marR="0" lvl="0" indent="0" algn="l" rtl="0">
-              <a:spcBef>
-                <a:spcPts val="200"/>
-              </a:spcBef>
-              <a:spcAft>
-                <a:spcPts val="0"/>
-              </a:spcAft>
-              <a:buNone/>
-            </a:pPr>
-            <a:endParaRPr/>
-          </a:p>
-        </p:txBody>
-      </p:sp>
-    </p:spTree>
-  </p:cSld>
-  <p:clrMapOvr>
-    <a:masterClrMapping/>
-  </p:clrMapOvr>
-</p:sld>
-</file>
-
-<file path=ppt/slides/slide13.xml><?xml version="1.0" encoding="utf-8"?>
-<p:sld xmlns:a="http://schemas.openxmlformats.org/drawingml/2006/main" xmlns:r="http://schemas.openxmlformats.org/officeDocument/2006/relationships" xmlns:p="http://schemas.openxmlformats.org/presentationml/2006/main">
-  <p:cSld>
-    <p:bg>
-      <p:bgPr>
-        <a:solidFill>
-          <a:srgbClr val="FFFFFF"/>
-        </a:solidFill>
-        <a:effectLst/>
-      </p:bgPr>
-    </p:bg>
-    <p:spTree>
-      <p:nvGrpSpPr>
         <p:cNvPr id="1" name="Shape 181"/>
         <p:cNvGrpSpPr/>
         <p:nvPr/>
@@ -21590,7 +19302,7 @@
 </p:sld>
 </file>
 
-<file path=ppt/slides/slide14.xml><?xml version="1.0" encoding="utf-8"?>
+<file path=ppt/slides/slide11.xml><?xml version="1.0" encoding="utf-8"?>
 <p:sld xmlns:a="http://schemas.openxmlformats.org/drawingml/2006/main" xmlns:r="http://schemas.openxmlformats.org/officeDocument/2006/relationships" xmlns:p="http://schemas.openxmlformats.org/presentationml/2006/main">
   <p:cSld>
     <p:bg>
@@ -21971,7 +19683,7 @@
 </p:sld>
 </file>
 
-<file path=ppt/slides/slide15.xml><?xml version="1.0" encoding="utf-8"?>
+<file path=ppt/slides/slide12.xml><?xml version="1.0" encoding="utf-8"?>
 <p:sld xmlns:a="http://schemas.openxmlformats.org/drawingml/2006/main" xmlns:r="http://schemas.openxmlformats.org/officeDocument/2006/relationships" xmlns:p="http://schemas.openxmlformats.org/presentationml/2006/main">
   <p:cSld>
     <p:bg>
@@ -22492,7 +20204,7 @@
 </p:sld>
 </file>
 
-<file path=ppt/slides/slide16.xml><?xml version="1.0" encoding="utf-8"?>
+<file path=ppt/slides/slide13.xml><?xml version="1.0" encoding="utf-8"?>
 <p:sld xmlns:a="http://schemas.openxmlformats.org/drawingml/2006/main" xmlns:r="http://schemas.openxmlformats.org/officeDocument/2006/relationships" xmlns:p="http://schemas.openxmlformats.org/presentationml/2006/main">
   <p:cSld>
     <p:bg>
@@ -23017,7 +20729,7 @@
 </p:sld>
 </file>
 
-<file path=ppt/slides/slide17.xml><?xml version="1.0" encoding="utf-8"?>
+<file path=ppt/slides/slide14.xml><?xml version="1.0" encoding="utf-8"?>
 <p:sld xmlns:a="http://schemas.openxmlformats.org/drawingml/2006/main" xmlns:r="http://schemas.openxmlformats.org/officeDocument/2006/relationships" xmlns:p="http://schemas.openxmlformats.org/presentationml/2006/main">
   <p:cSld>
     <p:bg>
@@ -23511,7 +21223,7 @@
 </p:sld>
 </file>
 
-<file path=ppt/slides/slide18.xml><?xml version="1.0" encoding="utf-8"?>
+<file path=ppt/slides/slide15.xml><?xml version="1.0" encoding="utf-8"?>
 <p:sld xmlns:a="http://schemas.openxmlformats.org/drawingml/2006/main" xmlns:r="http://schemas.openxmlformats.org/officeDocument/2006/relationships" xmlns:p="http://schemas.openxmlformats.org/presentationml/2006/main">
   <p:cSld>
     <p:bg>
@@ -23594,7 +21306,7 @@
 </p:sld>
 </file>
 
-<file path=ppt/slides/slide19.xml><?xml version="1.0" encoding="utf-8"?>
+<file path=ppt/slides/slide16.xml><?xml version="1.0" encoding="utf-8"?>
 <p:sld xmlns:a="http://schemas.openxmlformats.org/drawingml/2006/main" xmlns:r="http://schemas.openxmlformats.org/officeDocument/2006/relationships" xmlns:p="http://schemas.openxmlformats.org/presentationml/2006/main">
   <p:cSld>
     <p:bg>
@@ -23839,7 +21551,7 @@
 </p:sld>
 </file>
 
-<file path=ppt/slides/slide20.xml><?xml version="1.0" encoding="utf-8"?>
+<file path=ppt/slides/slide17.xml><?xml version="1.0" encoding="utf-8"?>
 <p:sld xmlns:a="http://schemas.openxmlformats.org/drawingml/2006/main" xmlns:r="http://schemas.openxmlformats.org/officeDocument/2006/relationships" xmlns:p="http://schemas.openxmlformats.org/presentationml/2006/main">
   <p:cSld>
     <p:bg>
@@ -24312,7 +22024,7 @@
 </p:sld>
 </file>
 
-<file path=ppt/slides/slide21.xml><?xml version="1.0" encoding="utf-8"?>
+<file path=ppt/slides/slide18.xml><?xml version="1.0" encoding="utf-8"?>
 <p:sld xmlns:a="http://schemas.openxmlformats.org/drawingml/2006/main" xmlns:r="http://schemas.openxmlformats.org/officeDocument/2006/relationships" xmlns:p="http://schemas.openxmlformats.org/presentationml/2006/main">
   <p:cSld>
     <p:bg>
@@ -24769,7 +22481,7 @@
 </p:sld>
 </file>
 
-<file path=ppt/slides/slide22.xml><?xml version="1.0" encoding="utf-8"?>
+<file path=ppt/slides/slide19.xml><?xml version="1.0" encoding="utf-8"?>
 <p:sld xmlns:a="http://schemas.openxmlformats.org/drawingml/2006/main" xmlns:r="http://schemas.openxmlformats.org/officeDocument/2006/relationships" xmlns:p="http://schemas.openxmlformats.org/presentationml/2006/main">
   <p:cSld>
     <p:bg>
@@ -25218,7 +22930,90 @@
 </p:sld>
 </file>
 
-<file path=ppt/slides/slide23.xml><?xml version="1.0" encoding="utf-8"?>
+<file path=ppt/slides/slide2.xml><?xml version="1.0" encoding="utf-8"?>
+<p:sld xmlns:a="http://schemas.openxmlformats.org/drawingml/2006/main" xmlns:r="http://schemas.openxmlformats.org/officeDocument/2006/relationships" xmlns:p="http://schemas.openxmlformats.org/presentationml/2006/main">
+  <p:cSld>
+    <p:bg>
+      <p:bgPr>
+        <a:solidFill>
+          <a:srgbClr val="EDE9FE"/>
+        </a:solidFill>
+        <a:effectLst/>
+      </p:bgPr>
+    </p:bg>
+    <p:spTree>
+      <p:nvGrpSpPr>
+        <p:cNvPr id="1" name="Shape 118"/>
+        <p:cNvGrpSpPr/>
+        <p:nvPr/>
+      </p:nvGrpSpPr>
+      <p:grpSpPr>
+        <a:xfrm>
+          <a:off x="0" y="0"/>
+          <a:ext cx="0" cy="0"/>
+          <a:chOff x="0" y="0"/>
+          <a:chExt cx="0" cy="0"/>
+        </a:xfrm>
+      </p:grpSpPr>
+      <p:sp>
+        <p:nvSpPr>
+          <p:cNvPr id="119" name="Google Shape;119;p2"/>
+          <p:cNvSpPr txBox="1"/>
+          <p:nvPr/>
+        </p:nvSpPr>
+        <p:spPr>
+          <a:xfrm>
+            <a:off x="914400" y="2286000"/>
+            <a:ext cx="10362895" cy="2286000"/>
+          </a:xfrm>
+          <a:prstGeom prst="rect">
+            <a:avLst/>
+          </a:prstGeom>
+          <a:noFill/>
+          <a:ln>
+            <a:noFill/>
+          </a:ln>
+        </p:spPr>
+        <p:txBody>
+          <a:bodyPr spcFirstLastPara="1" wrap="square" lIns="91425" tIns="45700" rIns="91425" bIns="45700" anchor="t" anchorCtr="0">
+            <a:spAutoFit/>
+          </a:bodyPr>
+          <a:lstStyle/>
+          <a:p>
+            <a:pPr marL="0" marR="0" lvl="0" indent="0" algn="ctr" rtl="0">
+              <a:spcBef>
+                <a:spcPts val="0"/>
+              </a:spcBef>
+              <a:spcAft>
+                <a:spcPts val="0"/>
+              </a:spcAft>
+              <a:buNone/>
+            </a:pPr>
+            <a:r>
+              <a:rPr lang="en-US" sz="4400" b="1" i="0" u="none" strike="noStrike" cap="none">
+                <a:solidFill>
+                  <a:srgbClr val="5B21B6"/>
+                </a:solidFill>
+                <a:latin typeface="Calibri"/>
+                <a:ea typeface="Calibri"/>
+                <a:cs typeface="Calibri"/>
+                <a:sym typeface="Calibri"/>
+              </a:rPr>
+              <a:t>A Bug You Can't Reproduce on Your Laptop</a:t>
+            </a:r>
+            <a:endParaRPr/>
+          </a:p>
+        </p:txBody>
+      </p:sp>
+    </p:spTree>
+  </p:cSld>
+  <p:clrMapOvr>
+    <a:masterClrMapping/>
+  </p:clrMapOvr>
+</p:sld>
+</file>
+
+<file path=ppt/slides/slide20.xml><?xml version="1.0" encoding="utf-8"?>
 <p:sld xmlns:a="http://schemas.openxmlformats.org/drawingml/2006/main" xmlns:r="http://schemas.openxmlformats.org/officeDocument/2006/relationships" xmlns:p="http://schemas.openxmlformats.org/presentationml/2006/main">
   <p:cSld>
     <p:bg>
@@ -25301,7 +23096,7 @@
 </p:sld>
 </file>
 
-<file path=ppt/slides/slide24.xml><?xml version="1.0" encoding="utf-8"?>
+<file path=ppt/slides/slide21.xml><?xml version="1.0" encoding="utf-8"?>
 <p:sld xmlns:a="http://schemas.openxmlformats.org/drawingml/2006/main" xmlns:r="http://schemas.openxmlformats.org/officeDocument/2006/relationships" xmlns:p="http://schemas.openxmlformats.org/presentationml/2006/main">
   <p:cSld>
     <p:bg>
@@ -25770,7 +23565,7 @@
 </p:sld>
 </file>
 
-<file path=ppt/slides/slide25.xml><?xml version="1.0" encoding="utf-8"?>
+<file path=ppt/slides/slide22.xml><?xml version="1.0" encoding="utf-8"?>
 <p:sld xmlns:a="http://schemas.openxmlformats.org/drawingml/2006/main" xmlns:r="http://schemas.openxmlformats.org/officeDocument/2006/relationships" xmlns:p="http://schemas.openxmlformats.org/presentationml/2006/main">
   <p:cSld>
     <p:bg>
@@ -26423,7 +24218,7 @@
 </p:sld>
 </file>
 
-<file path=ppt/slides/slide26.xml><?xml version="1.0" encoding="utf-8"?>
+<file path=ppt/slides/slide23.xml><?xml version="1.0" encoding="utf-8"?>
 <p:sld xmlns:a="http://schemas.openxmlformats.org/drawingml/2006/main" xmlns:r="http://schemas.openxmlformats.org/officeDocument/2006/relationships" xmlns:p="http://schemas.openxmlformats.org/presentationml/2006/main">
   <p:cSld>
     <p:bg>
@@ -27034,7 +24829,7 @@
 </p:sld>
 </file>
 
-<file path=ppt/slides/slide27.xml><?xml version="1.0" encoding="utf-8"?>
+<file path=ppt/slides/slide24.xml><?xml version="1.0" encoding="utf-8"?>
 <p:sld xmlns:a="http://schemas.openxmlformats.org/drawingml/2006/main" xmlns:r="http://schemas.openxmlformats.org/officeDocument/2006/relationships" xmlns:p="http://schemas.openxmlformats.org/presentationml/2006/main">
   <p:cSld>
     <p:bg>
@@ -27480,7 +25275,7 @@
 </p:sld>
 </file>
 
-<file path=ppt/slides/slide28.xml><?xml version="1.0" encoding="utf-8"?>
+<file path=ppt/slides/slide25.xml><?xml version="1.0" encoding="utf-8"?>
 <p:sld xmlns:a="http://schemas.openxmlformats.org/drawingml/2006/main" xmlns:r="http://schemas.openxmlformats.org/officeDocument/2006/relationships" xmlns:p="http://schemas.openxmlformats.org/presentationml/2006/main">
   <p:cSld>
     <p:bg>
@@ -28126,7 +25921,7 @@
 </p:sld>
 </file>
 
-<file path=ppt/slides/slide29.xml><?xml version="1.0" encoding="utf-8"?>
+<file path=ppt/slides/slide26.xml><?xml version="1.0" encoding="utf-8"?>
 <p:sld xmlns:a="http://schemas.openxmlformats.org/drawingml/2006/main" xmlns:r="http://schemas.openxmlformats.org/officeDocument/2006/relationships" xmlns:p="http://schemas.openxmlformats.org/presentationml/2006/main">
   <p:cSld>
     <p:bg>
@@ -28607,7 +26402,7 @@
 </p:sld>
 </file>
 
-<file path=ppt/slides/slide30.xml><?xml version="1.0" encoding="utf-8"?>
+<file path=ppt/slides/slide27.xml><?xml version="1.0" encoding="utf-8"?>
 <p:sld xmlns:a="http://schemas.openxmlformats.org/drawingml/2006/main" xmlns:r="http://schemas.openxmlformats.org/officeDocument/2006/relationships" xmlns:p="http://schemas.openxmlformats.org/presentationml/2006/main">
   <p:cSld>
     <p:bg>
@@ -28776,7 +26571,7 @@
 </p:sld>
 </file>
 
-<file path=ppt/slides/slide31.xml><?xml version="1.0" encoding="utf-8"?>
+<file path=ppt/slides/slide28.xml><?xml version="1.0" encoding="utf-8"?>
 <p:sld xmlns:a="http://schemas.openxmlformats.org/drawingml/2006/main" xmlns:r="http://schemas.openxmlformats.org/officeDocument/2006/relationships" xmlns:p="http://schemas.openxmlformats.org/presentationml/2006/main">
   <p:cSld>
     <p:bg>
@@ -29197,7 +26992,7 @@
 </p:sld>
 </file>
 
-<file path=ppt/slides/slide32.xml><?xml version="1.0" encoding="utf-8"?>
+<file path=ppt/slides/slide29.xml><?xml version="1.0" encoding="utf-8"?>
 <p:sld xmlns:a="http://schemas.openxmlformats.org/drawingml/2006/main" xmlns:r="http://schemas.openxmlformats.org/officeDocument/2006/relationships" xmlns:p="http://schemas.openxmlformats.org/presentationml/2006/main">
   <p:cSld>
     <p:bg>
@@ -29280,7 +27075,389 @@
 </p:sld>
 </file>
 
-<file path=ppt/slides/slide33.xml><?xml version="1.0" encoding="utf-8"?>
+<file path=ppt/slides/slide3.xml><?xml version="1.0" encoding="utf-8"?>
+<p:sld xmlns:a="http://schemas.openxmlformats.org/drawingml/2006/main" xmlns:r="http://schemas.openxmlformats.org/officeDocument/2006/relationships" xmlns:p="http://schemas.openxmlformats.org/presentationml/2006/main">
+  <p:cSld>
+    <p:bg>
+      <p:bgPr>
+        <a:solidFill>
+          <a:srgbClr val="FFFFFF"/>
+        </a:solidFill>
+        <a:effectLst/>
+      </p:bgPr>
+    </p:bg>
+    <p:spTree>
+      <p:nvGrpSpPr>
+        <p:cNvPr id="1" name="Shape 124"/>
+        <p:cNvGrpSpPr/>
+        <p:nvPr/>
+      </p:nvGrpSpPr>
+      <p:grpSpPr>
+        <a:xfrm>
+          <a:off x="0" y="0"/>
+          <a:ext cx="0" cy="0"/>
+          <a:chOff x="0" y="0"/>
+          <a:chExt cx="0" cy="0"/>
+        </a:xfrm>
+      </p:grpSpPr>
+      <p:sp>
+        <p:nvSpPr>
+          <p:cNvPr id="125" name="Google Shape;125;g3e498caeefa_0_151"/>
+          <p:cNvSpPr txBox="1"/>
+          <p:nvPr/>
+        </p:nvSpPr>
+        <p:spPr>
+          <a:xfrm>
+            <a:off x="731520" y="365760"/>
+            <a:ext cx="10728600" cy="646500"/>
+          </a:xfrm>
+          <a:prstGeom prst="rect">
+            <a:avLst/>
+          </a:prstGeom>
+          <a:noFill/>
+          <a:ln>
+            <a:noFill/>
+          </a:ln>
+        </p:spPr>
+        <p:txBody>
+          <a:bodyPr spcFirstLastPara="1" wrap="square" lIns="91425" tIns="45700" rIns="91425" bIns="45700" anchor="t" anchorCtr="0">
+            <a:spAutoFit/>
+          </a:bodyPr>
+          <a:lstStyle/>
+          <a:p>
+            <a:pPr marL="0" marR="0" lvl="0" indent="0" algn="l" rtl="0">
+              <a:spcBef>
+                <a:spcPts val="0"/>
+              </a:spcBef>
+              <a:spcAft>
+                <a:spcPts val="0"/>
+              </a:spcAft>
+              <a:buNone/>
+            </a:pPr>
+            <a:r>
+              <a:rPr lang="en-US" sz="3600" b="1" i="0" u="none" strike="noStrike" cap="none">
+                <a:solidFill>
+                  <a:srgbClr val="1A1A2E"/>
+                </a:solidFill>
+                <a:latin typeface="Calibri"/>
+                <a:ea typeface="Calibri"/>
+                <a:cs typeface="Calibri"/>
+                <a:sym typeface="Calibri"/>
+              </a:rPr>
+              <a:t>Two people withdraw $10 at the same time</a:t>
+            </a:r>
+            <a:endParaRPr/>
+          </a:p>
+        </p:txBody>
+      </p:sp>
+      <p:sp>
+        <p:nvSpPr>
+          <p:cNvPr id="126" name="Google Shape;126;g3e498caeefa_0_151"/>
+          <p:cNvSpPr txBox="1"/>
+          <p:nvPr/>
+        </p:nvSpPr>
+        <p:spPr>
+          <a:xfrm>
+            <a:off x="914400" y="1463040"/>
+            <a:ext cx="10362900" cy="3124500"/>
+          </a:xfrm>
+          <a:prstGeom prst="rect">
+            <a:avLst/>
+          </a:prstGeom>
+          <a:noFill/>
+          <a:ln>
+            <a:noFill/>
+          </a:ln>
+        </p:spPr>
+        <p:txBody>
+          <a:bodyPr spcFirstLastPara="1" wrap="square" lIns="91425" tIns="45700" rIns="91425" bIns="45700" anchor="t" anchorCtr="0">
+            <a:spAutoFit/>
+          </a:bodyPr>
+          <a:lstStyle/>
+          <a:p>
+            <a:pPr marL="0" marR="0" lvl="1" indent="0" algn="l" rtl="0">
+              <a:spcBef>
+                <a:spcPts val="600"/>
+              </a:spcBef>
+              <a:spcAft>
+                <a:spcPts val="0"/>
+              </a:spcAft>
+              <a:buNone/>
+            </a:pPr>
+            <a:r>
+              <a:rPr lang="en-US" sz="2400">
+                <a:solidFill>
+                  <a:srgbClr val="333344"/>
+                </a:solidFill>
+                <a:latin typeface="Calibri"/>
+                <a:ea typeface="Calibri"/>
+                <a:cs typeface="Calibri"/>
+                <a:sym typeface="Calibri"/>
+              </a:rPr>
+              <a:t>A bank account, one row in your database:</a:t>
+            </a:r>
+            <a:endParaRPr sz="2000" b="0" i="0" u="none" strike="noStrike" cap="none">
+              <a:solidFill>
+                <a:srgbClr val="666677"/>
+              </a:solidFill>
+              <a:latin typeface="Calibri"/>
+              <a:ea typeface="Calibri"/>
+              <a:cs typeface="Calibri"/>
+              <a:sym typeface="Calibri"/>
+            </a:endParaRPr>
+          </a:p>
+          <a:p>
+            <a:pPr marL="457200" marR="0" lvl="1" indent="0" algn="l" rtl="0">
+              <a:spcBef>
+                <a:spcPts val="600"/>
+              </a:spcBef>
+              <a:spcAft>
+                <a:spcPts val="0"/>
+              </a:spcAft>
+              <a:buNone/>
+            </a:pPr>
+            <a:r>
+              <a:rPr lang="en-US" sz="2000" b="0" i="0" u="none" strike="noStrike" cap="none">
+                <a:solidFill>
+                  <a:srgbClr val="666677"/>
+                </a:solidFill>
+                <a:latin typeface="Calibri"/>
+                <a:ea typeface="Calibri"/>
+                <a:cs typeface="Calibri"/>
+                <a:sym typeface="Calibri"/>
+              </a:rPr>
+              <a:t>  </a:t>
+            </a:r>
+            <a:r>
+              <a:rPr lang="en-US" sz="2000" b="1" i="0" u="none" strike="noStrike" cap="none">
+                <a:solidFill>
+                  <a:srgbClr val="666677"/>
+                </a:solidFill>
+                <a:latin typeface="Courier Prime"/>
+                <a:ea typeface="Courier Prime"/>
+                <a:cs typeface="Courier Prime"/>
+                <a:sym typeface="Courier Prime"/>
+              </a:rPr>
+              <a:t>`accounts`: { id: 42, balance: 100 }</a:t>
+            </a:r>
+            <a:endParaRPr b="1">
+              <a:latin typeface="Courier Prime"/>
+              <a:ea typeface="Courier Prime"/>
+              <a:cs typeface="Courier Prime"/>
+              <a:sym typeface="Courier Prime"/>
+            </a:endParaRPr>
+          </a:p>
+          <a:p>
+            <a:pPr marL="0" marR="0" lvl="0" indent="0" algn="l" rtl="0">
+              <a:spcBef>
+                <a:spcPts val="600"/>
+              </a:spcBef>
+              <a:spcAft>
+                <a:spcPts val="0"/>
+              </a:spcAft>
+              <a:buNone/>
+            </a:pPr>
+            <a:endParaRPr sz="2000" b="0" i="0" u="none" strike="noStrike" cap="none">
+              <a:solidFill>
+                <a:srgbClr val="666677"/>
+              </a:solidFill>
+              <a:latin typeface="Calibri"/>
+              <a:ea typeface="Calibri"/>
+              <a:cs typeface="Calibri"/>
+              <a:sym typeface="Calibri"/>
+            </a:endParaRPr>
+          </a:p>
+          <a:p>
+            <a:pPr marL="0" marR="0" lvl="0" indent="0" algn="l" rtl="0">
+              <a:spcBef>
+                <a:spcPts val="600"/>
+              </a:spcBef>
+              <a:spcAft>
+                <a:spcPts val="0"/>
+              </a:spcAft>
+              <a:buNone/>
+            </a:pPr>
+            <a:r>
+              <a:rPr lang="en-US" sz="2400" b="0" i="0" u="none" strike="noStrike" cap="none">
+                <a:solidFill>
+                  <a:srgbClr val="333344"/>
+                </a:solidFill>
+                <a:latin typeface="Calibri"/>
+                <a:ea typeface="Calibri"/>
+                <a:cs typeface="Calibri"/>
+                <a:sym typeface="Calibri"/>
+              </a:rPr>
+              <a:t>Two withdraw - $10 requests land at the same millisecond. Each handler does:</a:t>
+            </a:r>
+            <a:endParaRPr/>
+          </a:p>
+          <a:p>
+            <a:pPr marL="457200" marR="0" lvl="1" indent="0" algn="l" rtl="0">
+              <a:spcBef>
+                <a:spcPts val="600"/>
+              </a:spcBef>
+              <a:spcAft>
+                <a:spcPts val="0"/>
+              </a:spcAft>
+              <a:buNone/>
+            </a:pPr>
+            <a:r>
+              <a:rPr lang="en-US" sz="2000" b="0" i="0" u="none" strike="noStrike" cap="none">
+                <a:solidFill>
+                  <a:srgbClr val="666677"/>
+                </a:solidFill>
+                <a:latin typeface="Calibri"/>
+                <a:ea typeface="Calibri"/>
+                <a:cs typeface="Calibri"/>
+                <a:sym typeface="Calibri"/>
+              </a:rPr>
+              <a:t>  </a:t>
+            </a:r>
+            <a:r>
+              <a:rPr lang="en-US" sz="2000" b="1" i="0" u="none" strike="noStrike" cap="none">
+                <a:solidFill>
+                  <a:srgbClr val="666677"/>
+                </a:solidFill>
+                <a:latin typeface="Calibri"/>
+                <a:ea typeface="Calibri"/>
+                <a:cs typeface="Calibri"/>
+                <a:sym typeface="Calibri"/>
+              </a:rPr>
+              <a:t>1.</a:t>
+            </a:r>
+            <a:r>
+              <a:rPr lang="en-US" sz="2000" b="0" i="0" u="none" strike="noStrike" cap="none">
+                <a:solidFill>
+                  <a:srgbClr val="666677"/>
+                </a:solidFill>
+                <a:latin typeface="Calibri"/>
+                <a:ea typeface="Calibri"/>
+                <a:cs typeface="Calibri"/>
+                <a:sym typeface="Calibri"/>
+              </a:rPr>
+              <a:t> Read the current balance</a:t>
+            </a:r>
+            <a:endParaRPr/>
+          </a:p>
+          <a:p>
+            <a:pPr marL="457200" marR="0" lvl="1" indent="0" algn="l" rtl="0">
+              <a:spcBef>
+                <a:spcPts val="600"/>
+              </a:spcBef>
+              <a:spcAft>
+                <a:spcPts val="0"/>
+              </a:spcAft>
+              <a:buNone/>
+            </a:pPr>
+            <a:r>
+              <a:rPr lang="en-US" sz="2000" b="0" i="0" u="none" strike="noStrike" cap="none">
+                <a:solidFill>
+                  <a:srgbClr val="666677"/>
+                </a:solidFill>
+                <a:latin typeface="Calibri"/>
+                <a:ea typeface="Calibri"/>
+                <a:cs typeface="Calibri"/>
+                <a:sym typeface="Calibri"/>
+              </a:rPr>
+              <a:t>  </a:t>
+            </a:r>
+            <a:r>
+              <a:rPr lang="en-US" sz="2000" b="1" i="0" u="none" strike="noStrike" cap="none">
+                <a:solidFill>
+                  <a:srgbClr val="666677"/>
+                </a:solidFill>
+                <a:latin typeface="Calibri"/>
+                <a:ea typeface="Calibri"/>
+                <a:cs typeface="Calibri"/>
+                <a:sym typeface="Calibri"/>
+              </a:rPr>
+              <a:t>2.</a:t>
+            </a:r>
+            <a:r>
+              <a:rPr lang="en-US" sz="2000" b="0" i="0" u="none" strike="noStrike" cap="none">
+                <a:solidFill>
+                  <a:srgbClr val="666677"/>
+                </a:solidFill>
+                <a:latin typeface="Calibri"/>
+                <a:ea typeface="Calibri"/>
+                <a:cs typeface="Calibri"/>
+                <a:sym typeface="Calibri"/>
+              </a:rPr>
+              <a:t> Subtract $10</a:t>
+            </a:r>
+            <a:endParaRPr/>
+          </a:p>
+          <a:p>
+            <a:pPr marL="457200" marR="0" lvl="1" indent="0" algn="l" rtl="0">
+              <a:spcBef>
+                <a:spcPts val="600"/>
+              </a:spcBef>
+              <a:spcAft>
+                <a:spcPts val="0"/>
+              </a:spcAft>
+              <a:buNone/>
+            </a:pPr>
+            <a:r>
+              <a:rPr lang="en-US" sz="2000" b="0" i="0" u="none" strike="noStrike" cap="none">
+                <a:solidFill>
+                  <a:srgbClr val="666677"/>
+                </a:solidFill>
+                <a:latin typeface="Calibri"/>
+                <a:ea typeface="Calibri"/>
+                <a:cs typeface="Calibri"/>
+                <a:sym typeface="Calibri"/>
+              </a:rPr>
+              <a:t>  </a:t>
+            </a:r>
+            <a:r>
+              <a:rPr lang="en-US" sz="2000" b="1" i="0" u="none" strike="noStrike" cap="none">
+                <a:solidFill>
+                  <a:srgbClr val="666677"/>
+                </a:solidFill>
+                <a:latin typeface="Calibri"/>
+                <a:ea typeface="Calibri"/>
+                <a:cs typeface="Calibri"/>
+                <a:sym typeface="Calibri"/>
+              </a:rPr>
+              <a:t>3.</a:t>
+            </a:r>
+            <a:r>
+              <a:rPr lang="en-US" sz="2000" b="0" i="0" u="none" strike="noStrike" cap="none">
+                <a:solidFill>
+                  <a:srgbClr val="666677"/>
+                </a:solidFill>
+                <a:latin typeface="Calibri"/>
+                <a:ea typeface="Calibri"/>
+                <a:cs typeface="Calibri"/>
+                <a:sym typeface="Calibri"/>
+              </a:rPr>
+              <a:t> Write the new balance back</a:t>
+            </a:r>
+            <a:endParaRPr/>
+          </a:p>
+          <a:p>
+            <a:pPr marL="457200" marR="0" lvl="1" indent="0" algn="l" rtl="0">
+              <a:spcBef>
+                <a:spcPts val="600"/>
+              </a:spcBef>
+              <a:spcAft>
+                <a:spcPts val="0"/>
+              </a:spcAft>
+              <a:buNone/>
+            </a:pPr>
+            <a:endParaRPr/>
+          </a:p>
+        </p:txBody>
+      </p:sp>
+    </p:spTree>
+  </p:cSld>
+  <p:clrMapOvr>
+    <a:masterClrMapping/>
+  </p:clrMapOvr>
+</p:sld>
+</file>
+
+<file path=ppt/slides/slide30.xml><?xml version="1.0" encoding="utf-8"?>
 <p:sld xmlns:a="http://schemas.openxmlformats.org/drawingml/2006/main" xmlns:r="http://schemas.openxmlformats.org/officeDocument/2006/relationships" xmlns:p="http://schemas.openxmlformats.org/presentationml/2006/main">
   <p:cSld>
     <p:bg>
@@ -29521,7 +27698,7 @@
 </p:sld>
 </file>
 
-<file path=ppt/slides/slide34.xml><?xml version="1.0" encoding="utf-8"?>
+<file path=ppt/slides/slide31.xml><?xml version="1.0" encoding="utf-8"?>
 <p:sld xmlns:a="http://schemas.openxmlformats.org/drawingml/2006/main" xmlns:r="http://schemas.openxmlformats.org/officeDocument/2006/relationships" xmlns:p="http://schemas.openxmlformats.org/presentationml/2006/main">
   <p:cSld>
     <p:bg>
@@ -29914,7 +28091,7 @@
 </p:sld>
 </file>
 
-<file path=ppt/slides/slide35.xml><?xml version="1.0" encoding="utf-8"?>
+<file path=ppt/slides/slide32.xml><?xml version="1.0" encoding="utf-8"?>
 <p:sld xmlns:a="http://schemas.openxmlformats.org/drawingml/2006/main" xmlns:r="http://schemas.openxmlformats.org/officeDocument/2006/relationships" xmlns:p="http://schemas.openxmlformats.org/presentationml/2006/main">
   <p:cSld>
     <p:bg>
@@ -30615,7 +28792,7 @@
 </p:sld>
 </file>
 
-<file path=ppt/slides/slide36.xml><?xml version="1.0" encoding="utf-8"?>
+<file path=ppt/slides/slide33.xml><?xml version="1.0" encoding="utf-8"?>
 <p:sld xmlns:a="http://schemas.openxmlformats.org/drawingml/2006/main" xmlns:r="http://schemas.openxmlformats.org/officeDocument/2006/relationships" xmlns:p="http://schemas.openxmlformats.org/presentationml/2006/main">
   <p:cSld>
     <p:bg>
@@ -31305,7 +29482,7 @@
 </p:sld>
 </file>
 
-<file path=ppt/slides/slide37.xml><?xml version="1.0" encoding="utf-8"?>
+<file path=ppt/slides/slide34.xml><?xml version="1.0" encoding="utf-8"?>
 <p:sld xmlns:a="http://schemas.openxmlformats.org/drawingml/2006/main" xmlns:r="http://schemas.openxmlformats.org/officeDocument/2006/relationships" xmlns:p="http://schemas.openxmlformats.org/presentationml/2006/main">
   <p:cSld>
     <p:bg>
@@ -32019,7 +30196,7 @@
 </p:sld>
 </file>
 
-<file path=ppt/slides/slide38.xml><?xml version="1.0" encoding="utf-8"?>
+<file path=ppt/slides/slide35.xml><?xml version="1.0" encoding="utf-8"?>
 <p:sld xmlns:a="http://schemas.openxmlformats.org/drawingml/2006/main" xmlns:r="http://schemas.openxmlformats.org/officeDocument/2006/relationships" xmlns:p="http://schemas.openxmlformats.org/presentationml/2006/main">
   <p:cSld>
     <p:bg>
@@ -32572,7 +30749,7 @@
 </p:sld>
 </file>
 
-<file path=ppt/slides/slide39.xml><?xml version="1.0" encoding="utf-8"?>
+<file path=ppt/slides/slide36.xml><?xml version="1.0" encoding="utf-8"?>
 <p:sld xmlns:a="http://schemas.openxmlformats.org/drawingml/2006/main" xmlns:r="http://schemas.openxmlformats.org/officeDocument/2006/relationships" xmlns:p="http://schemas.openxmlformats.org/presentationml/2006/main">
   <p:cSld>
     <p:spTree>
@@ -33085,7 +31262,7 @@
 </p:sld>
 </file>
 
-<file path=ppt/slides/slide40.xml><?xml version="1.0" encoding="utf-8"?>
+<file path=ppt/slides/slide37.xml><?xml version="1.0" encoding="utf-8"?>
 <p:sld xmlns:a="http://schemas.openxmlformats.org/drawingml/2006/main" xmlns:r="http://schemas.openxmlformats.org/officeDocument/2006/relationships" xmlns:p="http://schemas.openxmlformats.org/presentationml/2006/main">
   <p:cSld>
     <p:bg>
@@ -33747,7 +31924,7 @@
 </p:sld>
 </file>
 
-<file path=ppt/slides/slide41.xml><?xml version="1.0" encoding="utf-8"?>
+<file path=ppt/slides/slide38.xml><?xml version="1.0" encoding="utf-8"?>
 <p:sld xmlns:a="http://schemas.openxmlformats.org/drawingml/2006/main" xmlns:r="http://schemas.openxmlformats.org/officeDocument/2006/relationships" xmlns:p="http://schemas.openxmlformats.org/presentationml/2006/main">
   <p:cSld>
     <p:bg>
@@ -34200,7 +32377,7 @@
 </p:sld>
 </file>
 
-<file path=ppt/slides/slide42.xml><?xml version="1.0" encoding="utf-8"?>
+<file path=ppt/slides/slide39.xml><?xml version="1.0" encoding="utf-8"?>
 <p:sld xmlns:a="http://schemas.openxmlformats.org/drawingml/2006/main" xmlns:r="http://schemas.openxmlformats.org/officeDocument/2006/relationships" xmlns:p="http://schemas.openxmlformats.org/presentationml/2006/main">
   <p:cSld>
     <p:bg>
@@ -34805,7 +32982,469 @@
 </p:sld>
 </file>
 
-<file path=ppt/slides/slide43.xml><?xml version="1.0" encoding="utf-8"?>
+<file path=ppt/slides/slide4.xml><?xml version="1.0" encoding="utf-8"?>
+<p:sld xmlns:a="http://schemas.openxmlformats.org/drawingml/2006/main" xmlns:r="http://schemas.openxmlformats.org/officeDocument/2006/relationships" xmlns:p="http://schemas.openxmlformats.org/presentationml/2006/main">
+  <p:cSld>
+    <p:bg>
+      <p:bgPr>
+        <a:solidFill>
+          <a:srgbClr val="FFFFFF"/>
+        </a:solidFill>
+        <a:effectLst/>
+      </p:bgPr>
+    </p:bg>
+    <p:spTree>
+      <p:nvGrpSpPr>
+        <p:cNvPr id="1" name="Shape 131"/>
+        <p:cNvGrpSpPr/>
+        <p:nvPr/>
+      </p:nvGrpSpPr>
+      <p:grpSpPr>
+        <a:xfrm>
+          <a:off x="0" y="0"/>
+          <a:ext cx="0" cy="0"/>
+          <a:chOff x="0" y="0"/>
+          <a:chExt cx="0" cy="0"/>
+        </a:xfrm>
+      </p:grpSpPr>
+      <p:sp>
+        <p:nvSpPr>
+          <p:cNvPr id="132" name="Google Shape;132;p3"/>
+          <p:cNvSpPr txBox="1"/>
+          <p:nvPr/>
+        </p:nvSpPr>
+        <p:spPr>
+          <a:xfrm>
+            <a:off x="731520" y="365760"/>
+            <a:ext cx="10728655" cy="914400"/>
+          </a:xfrm>
+          <a:prstGeom prst="rect">
+            <a:avLst/>
+          </a:prstGeom>
+          <a:noFill/>
+          <a:ln>
+            <a:noFill/>
+          </a:ln>
+        </p:spPr>
+        <p:txBody>
+          <a:bodyPr spcFirstLastPara="1" wrap="square" lIns="91425" tIns="45700" rIns="91425" bIns="45700" anchor="t" anchorCtr="0">
+            <a:spAutoFit/>
+          </a:bodyPr>
+          <a:lstStyle/>
+          <a:p>
+            <a:pPr marL="0" marR="0" lvl="0" indent="0" algn="l" rtl="0">
+              <a:spcBef>
+                <a:spcPts val="0"/>
+              </a:spcBef>
+              <a:spcAft>
+                <a:spcPts val="0"/>
+              </a:spcAft>
+              <a:buNone/>
+            </a:pPr>
+            <a:r>
+              <a:rPr lang="en-US" sz="3600" b="1" i="0" u="none" strike="noStrike" cap="none">
+                <a:solidFill>
+                  <a:srgbClr val="1A1A2E"/>
+                </a:solidFill>
+                <a:latin typeface="Calibri"/>
+                <a:ea typeface="Calibri"/>
+                <a:cs typeface="Calibri"/>
+                <a:sym typeface="Calibri"/>
+              </a:rPr>
+              <a:t>Two people withdraw $10 at the same time</a:t>
+            </a:r>
+            <a:endParaRPr/>
+          </a:p>
+        </p:txBody>
+      </p:sp>
+      <p:sp>
+        <p:nvSpPr>
+          <p:cNvPr id="133" name="Google Shape;133;p3"/>
+          <p:cNvSpPr txBox="1"/>
+          <p:nvPr/>
+        </p:nvSpPr>
+        <p:spPr>
+          <a:xfrm>
+            <a:off x="914400" y="1463040"/>
+            <a:ext cx="10362900" cy="4048200"/>
+          </a:xfrm>
+          <a:prstGeom prst="rect">
+            <a:avLst/>
+          </a:prstGeom>
+          <a:noFill/>
+          <a:ln>
+            <a:noFill/>
+          </a:ln>
+        </p:spPr>
+        <p:txBody>
+          <a:bodyPr spcFirstLastPara="1" wrap="square" lIns="91425" tIns="45700" rIns="91425" bIns="45700" anchor="t" anchorCtr="0">
+            <a:spAutoFit/>
+          </a:bodyPr>
+          <a:lstStyle/>
+          <a:p>
+            <a:pPr marL="0" marR="0" lvl="1" indent="0" algn="l" rtl="0">
+              <a:spcBef>
+                <a:spcPts val="600"/>
+              </a:spcBef>
+              <a:spcAft>
+                <a:spcPts val="0"/>
+              </a:spcAft>
+              <a:buNone/>
+            </a:pPr>
+            <a:r>
+              <a:rPr lang="en-US" sz="2400">
+                <a:solidFill>
+                  <a:srgbClr val="333344"/>
+                </a:solidFill>
+                <a:latin typeface="Calibri"/>
+                <a:ea typeface="Calibri"/>
+                <a:cs typeface="Calibri"/>
+                <a:sym typeface="Calibri"/>
+              </a:rPr>
+              <a:t>A bank account, one row in your database:</a:t>
+            </a:r>
+            <a:endParaRPr sz="2000" b="0" i="0" u="none" strike="noStrike" cap="none">
+              <a:solidFill>
+                <a:srgbClr val="666677"/>
+              </a:solidFill>
+              <a:latin typeface="Calibri"/>
+              <a:ea typeface="Calibri"/>
+              <a:cs typeface="Calibri"/>
+              <a:sym typeface="Calibri"/>
+            </a:endParaRPr>
+          </a:p>
+          <a:p>
+            <a:pPr marL="457200" marR="0" lvl="1" indent="0" algn="l" rtl="0">
+              <a:spcBef>
+                <a:spcPts val="600"/>
+              </a:spcBef>
+              <a:spcAft>
+                <a:spcPts val="0"/>
+              </a:spcAft>
+              <a:buNone/>
+            </a:pPr>
+            <a:r>
+              <a:rPr lang="en-US" sz="2000" b="0" i="0" u="none" strike="noStrike" cap="none">
+                <a:solidFill>
+                  <a:srgbClr val="666677"/>
+                </a:solidFill>
+                <a:latin typeface="Calibri"/>
+                <a:ea typeface="Calibri"/>
+                <a:cs typeface="Calibri"/>
+                <a:sym typeface="Calibri"/>
+              </a:rPr>
+              <a:t>  </a:t>
+            </a:r>
+            <a:r>
+              <a:rPr lang="en-US" sz="2000" b="1" i="0" u="none" strike="noStrike" cap="none">
+                <a:solidFill>
+                  <a:srgbClr val="666677"/>
+                </a:solidFill>
+                <a:latin typeface="Courier Prime"/>
+                <a:ea typeface="Courier Prime"/>
+                <a:cs typeface="Courier Prime"/>
+                <a:sym typeface="Courier Prime"/>
+              </a:rPr>
+              <a:t>`accounts`: { id: 42, balance: 100 }</a:t>
+            </a:r>
+            <a:endParaRPr b="1">
+              <a:latin typeface="Courier Prime"/>
+              <a:ea typeface="Courier Prime"/>
+              <a:cs typeface="Courier Prime"/>
+              <a:sym typeface="Courier Prime"/>
+            </a:endParaRPr>
+          </a:p>
+          <a:p>
+            <a:pPr marL="0" marR="0" lvl="0" indent="0" algn="l" rtl="0">
+              <a:spcBef>
+                <a:spcPts val="600"/>
+              </a:spcBef>
+              <a:spcAft>
+                <a:spcPts val="0"/>
+              </a:spcAft>
+              <a:buNone/>
+            </a:pPr>
+            <a:endParaRPr sz="2000" b="0" i="0" u="none" strike="noStrike" cap="none">
+              <a:solidFill>
+                <a:srgbClr val="666677"/>
+              </a:solidFill>
+              <a:latin typeface="Calibri"/>
+              <a:ea typeface="Calibri"/>
+              <a:cs typeface="Calibri"/>
+              <a:sym typeface="Calibri"/>
+            </a:endParaRPr>
+          </a:p>
+          <a:p>
+            <a:pPr marL="0" marR="0" lvl="0" indent="0" algn="l" rtl="0">
+              <a:spcBef>
+                <a:spcPts val="600"/>
+              </a:spcBef>
+              <a:spcAft>
+                <a:spcPts val="0"/>
+              </a:spcAft>
+              <a:buNone/>
+            </a:pPr>
+            <a:r>
+              <a:rPr lang="en-US" sz="2400" b="0" i="0" u="none" strike="noStrike" cap="none">
+                <a:solidFill>
+                  <a:srgbClr val="333344"/>
+                </a:solidFill>
+                <a:latin typeface="Calibri"/>
+                <a:ea typeface="Calibri"/>
+                <a:cs typeface="Calibri"/>
+                <a:sym typeface="Calibri"/>
+              </a:rPr>
+              <a:t>Two withdraw - $10 requests land at the same millisecond. Each handler does:</a:t>
+            </a:r>
+            <a:endParaRPr/>
+          </a:p>
+          <a:p>
+            <a:pPr marL="457200" marR="0" lvl="1" indent="0" algn="l" rtl="0">
+              <a:spcBef>
+                <a:spcPts val="600"/>
+              </a:spcBef>
+              <a:spcAft>
+                <a:spcPts val="0"/>
+              </a:spcAft>
+              <a:buNone/>
+            </a:pPr>
+            <a:r>
+              <a:rPr lang="en-US" sz="2000" b="0" i="0" u="none" strike="noStrike" cap="none">
+                <a:solidFill>
+                  <a:srgbClr val="666677"/>
+                </a:solidFill>
+                <a:latin typeface="Calibri"/>
+                <a:ea typeface="Calibri"/>
+                <a:cs typeface="Calibri"/>
+                <a:sym typeface="Calibri"/>
+              </a:rPr>
+              <a:t>  </a:t>
+            </a:r>
+            <a:r>
+              <a:rPr lang="en-US" sz="2000" b="1" i="0" u="none" strike="noStrike" cap="none">
+                <a:solidFill>
+                  <a:srgbClr val="666677"/>
+                </a:solidFill>
+                <a:latin typeface="Calibri"/>
+                <a:ea typeface="Calibri"/>
+                <a:cs typeface="Calibri"/>
+                <a:sym typeface="Calibri"/>
+              </a:rPr>
+              <a:t>1.</a:t>
+            </a:r>
+            <a:r>
+              <a:rPr lang="en-US" sz="2000" b="0" i="0" u="none" strike="noStrike" cap="none">
+                <a:solidFill>
+                  <a:srgbClr val="666677"/>
+                </a:solidFill>
+                <a:latin typeface="Calibri"/>
+                <a:ea typeface="Calibri"/>
+                <a:cs typeface="Calibri"/>
+                <a:sym typeface="Calibri"/>
+              </a:rPr>
+              <a:t> Read the current balance</a:t>
+            </a:r>
+            <a:endParaRPr/>
+          </a:p>
+          <a:p>
+            <a:pPr marL="457200" marR="0" lvl="1" indent="0" algn="l" rtl="0">
+              <a:spcBef>
+                <a:spcPts val="600"/>
+              </a:spcBef>
+              <a:spcAft>
+                <a:spcPts val="0"/>
+              </a:spcAft>
+              <a:buNone/>
+            </a:pPr>
+            <a:r>
+              <a:rPr lang="en-US" sz="2000" b="0" i="0" u="none" strike="noStrike" cap="none">
+                <a:solidFill>
+                  <a:srgbClr val="666677"/>
+                </a:solidFill>
+                <a:latin typeface="Calibri"/>
+                <a:ea typeface="Calibri"/>
+                <a:cs typeface="Calibri"/>
+                <a:sym typeface="Calibri"/>
+              </a:rPr>
+              <a:t>  </a:t>
+            </a:r>
+            <a:r>
+              <a:rPr lang="en-US" sz="2000" b="1" i="0" u="none" strike="noStrike" cap="none">
+                <a:solidFill>
+                  <a:srgbClr val="666677"/>
+                </a:solidFill>
+                <a:latin typeface="Calibri"/>
+                <a:ea typeface="Calibri"/>
+                <a:cs typeface="Calibri"/>
+                <a:sym typeface="Calibri"/>
+              </a:rPr>
+              <a:t>2.</a:t>
+            </a:r>
+            <a:r>
+              <a:rPr lang="en-US" sz="2000" b="0" i="0" u="none" strike="noStrike" cap="none">
+                <a:solidFill>
+                  <a:srgbClr val="666677"/>
+                </a:solidFill>
+                <a:latin typeface="Calibri"/>
+                <a:ea typeface="Calibri"/>
+                <a:cs typeface="Calibri"/>
+                <a:sym typeface="Calibri"/>
+              </a:rPr>
+              <a:t> Subtract $10</a:t>
+            </a:r>
+            <a:endParaRPr/>
+          </a:p>
+          <a:p>
+            <a:pPr marL="457200" marR="0" lvl="1" indent="0" algn="l" rtl="0">
+              <a:spcBef>
+                <a:spcPts val="600"/>
+              </a:spcBef>
+              <a:spcAft>
+                <a:spcPts val="0"/>
+              </a:spcAft>
+              <a:buNone/>
+            </a:pPr>
+            <a:r>
+              <a:rPr lang="en-US" sz="2000" b="0" i="0" u="none" strike="noStrike" cap="none">
+                <a:solidFill>
+                  <a:srgbClr val="666677"/>
+                </a:solidFill>
+                <a:latin typeface="Calibri"/>
+                <a:ea typeface="Calibri"/>
+                <a:cs typeface="Calibri"/>
+                <a:sym typeface="Calibri"/>
+              </a:rPr>
+              <a:t>  </a:t>
+            </a:r>
+            <a:r>
+              <a:rPr lang="en-US" sz="2000" b="1" i="0" u="none" strike="noStrike" cap="none">
+                <a:solidFill>
+                  <a:srgbClr val="666677"/>
+                </a:solidFill>
+                <a:latin typeface="Calibri"/>
+                <a:ea typeface="Calibri"/>
+                <a:cs typeface="Calibri"/>
+                <a:sym typeface="Calibri"/>
+              </a:rPr>
+              <a:t>3.</a:t>
+            </a:r>
+            <a:r>
+              <a:rPr lang="en-US" sz="2000" b="0" i="0" u="none" strike="noStrike" cap="none">
+                <a:solidFill>
+                  <a:srgbClr val="666677"/>
+                </a:solidFill>
+                <a:latin typeface="Calibri"/>
+                <a:ea typeface="Calibri"/>
+                <a:cs typeface="Calibri"/>
+                <a:sym typeface="Calibri"/>
+              </a:rPr>
+              <a:t> Write the new balance back</a:t>
+            </a:r>
+            <a:endParaRPr/>
+          </a:p>
+          <a:p>
+            <a:pPr marL="0" marR="0" lvl="0" indent="0" algn="l" rtl="0">
+              <a:spcBef>
+                <a:spcPts val="600"/>
+              </a:spcBef>
+              <a:spcAft>
+                <a:spcPts val="0"/>
+              </a:spcAft>
+              <a:buNone/>
+            </a:pPr>
+            <a:endParaRPr sz="2000" b="0" i="0" u="none" strike="noStrike" cap="none">
+              <a:solidFill>
+                <a:srgbClr val="666677"/>
+              </a:solidFill>
+              <a:latin typeface="Calibri"/>
+              <a:ea typeface="Calibri"/>
+              <a:cs typeface="Calibri"/>
+              <a:sym typeface="Calibri"/>
+            </a:endParaRPr>
+          </a:p>
+          <a:p>
+            <a:pPr marL="0" marR="0" lvl="0" indent="0" algn="l" rtl="0">
+              <a:spcBef>
+                <a:spcPts val="600"/>
+              </a:spcBef>
+              <a:spcAft>
+                <a:spcPts val="0"/>
+              </a:spcAft>
+              <a:buNone/>
+            </a:pPr>
+            <a:r>
+              <a:rPr lang="en-US" sz="2400" b="0" i="0" u="none" strike="noStrike" cap="none">
+                <a:solidFill>
+                  <a:srgbClr val="333344"/>
+                </a:solidFill>
+                <a:latin typeface="Calibri"/>
+                <a:ea typeface="Calibri"/>
+                <a:cs typeface="Calibri"/>
+                <a:sym typeface="Calibri"/>
+              </a:rPr>
+              <a:t>Each one alone is correct: 100 - 10 = 90. Run the two at the same time.</a:t>
+            </a:r>
+            <a:endParaRPr/>
+          </a:p>
+          <a:p>
+            <a:pPr marL="457200" marR="0" lvl="1" indent="0" algn="l" rtl="0">
+              <a:spcBef>
+                <a:spcPts val="600"/>
+              </a:spcBef>
+              <a:spcAft>
+                <a:spcPts val="0"/>
+              </a:spcAft>
+              <a:buNone/>
+            </a:pPr>
+            <a:r>
+              <a:rPr lang="en-US" sz="2000" b="0" i="0" u="none" strike="noStrike" cap="none">
+                <a:solidFill>
+                  <a:srgbClr val="666677"/>
+                </a:solidFill>
+                <a:latin typeface="Calibri"/>
+                <a:ea typeface="Calibri"/>
+                <a:cs typeface="Calibri"/>
+                <a:sym typeface="Calibri"/>
+              </a:rPr>
+              <a:t>  </a:t>
+            </a:r>
+            <a:r>
+              <a:rPr lang="en-US" sz="2000">
+                <a:solidFill>
+                  <a:srgbClr val="666677"/>
+                </a:solidFill>
+                <a:latin typeface="Calibri"/>
+                <a:ea typeface="Calibri"/>
+                <a:cs typeface="Calibri"/>
+                <a:sym typeface="Calibri"/>
+              </a:rPr>
+              <a:t>T</a:t>
+            </a:r>
+            <a:r>
+              <a:rPr lang="en-US" sz="2000" b="0" i="0" u="none" strike="noStrike" cap="none">
+                <a:solidFill>
+                  <a:srgbClr val="666677"/>
+                </a:solidFill>
+                <a:latin typeface="Calibri"/>
+                <a:ea typeface="Calibri"/>
+                <a:cs typeface="Calibri"/>
+                <a:sym typeface="Calibri"/>
+              </a:rPr>
+              <a:t>he account lands at $90, not $80, and a whole withdrawal vanished.</a:t>
+            </a:r>
+            <a:endParaRPr/>
+          </a:p>
+        </p:txBody>
+      </p:sp>
+    </p:spTree>
+  </p:cSld>
+  <p:clrMapOvr>
+    <a:masterClrMapping/>
+  </p:clrMapOvr>
+</p:sld>
+</file>
+
+<file path=ppt/slides/slide40.xml><?xml version="1.0" encoding="utf-8"?>
 <p:sld xmlns:a="http://schemas.openxmlformats.org/drawingml/2006/main" xmlns:r="http://schemas.openxmlformats.org/officeDocument/2006/relationships" xmlns:p="http://schemas.openxmlformats.org/presentationml/2006/main">
   <p:cSld>
     <p:bg>
@@ -34888,7 +33527,7 @@
 </p:sld>
 </file>
 
-<file path=ppt/slides/slide44.xml><?xml version="1.0" encoding="utf-8"?>
+<file path=ppt/slides/slide41.xml><?xml version="1.0" encoding="utf-8"?>
 <p:sld xmlns:a="http://schemas.openxmlformats.org/drawingml/2006/main" xmlns:r="http://schemas.openxmlformats.org/officeDocument/2006/relationships" xmlns:p="http://schemas.openxmlformats.org/presentationml/2006/main">
   <p:cSld>
     <p:bg>
@@ -35294,7 +33933,7 @@
 </p:sld>
 </file>
 
-<file path=ppt/slides/slide45.xml><?xml version="1.0" encoding="utf-8"?>
+<file path=ppt/slides/slide42.xml><?xml version="1.0" encoding="utf-8"?>
 <p:sld xmlns:a="http://schemas.openxmlformats.org/drawingml/2006/main" xmlns:r="http://schemas.openxmlformats.org/officeDocument/2006/relationships" xmlns:p="http://schemas.openxmlformats.org/presentationml/2006/main">
   <p:cSld>
     <p:bg>
@@ -35612,7 +34251,7 @@
 </p:sld>
 </file>
 
-<file path=ppt/slides/slide46.xml><?xml version="1.0" encoding="utf-8"?>
+<file path=ppt/slides/slide43.xml><?xml version="1.0" encoding="utf-8"?>
 <p:sld xmlns:a="http://schemas.openxmlformats.org/drawingml/2006/main" xmlns:r="http://schemas.openxmlformats.org/officeDocument/2006/relationships" xmlns:p="http://schemas.openxmlformats.org/presentationml/2006/main">
   <p:cSld>
     <p:bg>
@@ -35954,7 +34593,7 @@
 </p:sld>
 </file>
 
-<file path=ppt/slides/slide47.xml><?xml version="1.0" encoding="utf-8"?>
+<file path=ppt/slides/slide44.xml><?xml version="1.0" encoding="utf-8"?>
 <p:sld xmlns:a="http://schemas.openxmlformats.org/drawingml/2006/main" xmlns:r="http://schemas.openxmlformats.org/officeDocument/2006/relationships" xmlns:p="http://schemas.openxmlformats.org/presentationml/2006/main">
   <p:cSld>
     <p:bg>
@@ -36332,7 +34971,7 @@
 </p:sld>
 </file>
 
-<file path=ppt/slides/slide48.xml><?xml version="1.0" encoding="utf-8"?>
+<file path=ppt/slides/slide45.xml><?xml version="1.0" encoding="utf-8"?>
 <p:sld xmlns:a="http://schemas.openxmlformats.org/drawingml/2006/main" xmlns:r="http://schemas.openxmlformats.org/officeDocument/2006/relationships" xmlns:p="http://schemas.openxmlformats.org/presentationml/2006/main">
   <p:cSld>
     <p:bg>
@@ -36734,7 +35373,7 @@
 </p:sld>
 </file>
 
-<file path=ppt/slides/slide49.xml><?xml version="1.0" encoding="utf-8"?>
+<file path=ppt/slides/slide46.xml><?xml version="1.0" encoding="utf-8"?>
 <p:sld xmlns:a="http://schemas.openxmlformats.org/drawingml/2006/main" xmlns:r="http://schemas.openxmlformats.org/officeDocument/2006/relationships" xmlns:p="http://schemas.openxmlformats.org/presentationml/2006/main">
   <p:cSld>
     <p:bg>
@@ -37168,90 +35807,7 @@
 </p:sld>
 </file>
 
-<file path=ppt/slides/slide5.xml><?xml version="1.0" encoding="utf-8"?>
-<p:sld xmlns:a="http://schemas.openxmlformats.org/drawingml/2006/main" xmlns:r="http://schemas.openxmlformats.org/officeDocument/2006/relationships" xmlns:p="http://schemas.openxmlformats.org/presentationml/2006/main">
-  <p:cSld>
-    <p:bg>
-      <p:bgPr>
-        <a:solidFill>
-          <a:srgbClr val="EDE9FE"/>
-        </a:solidFill>
-        <a:effectLst/>
-      </p:bgPr>
-    </p:bg>
-    <p:spTree>
-      <p:nvGrpSpPr>
-        <p:cNvPr id="1" name="Shape 118"/>
-        <p:cNvGrpSpPr/>
-        <p:nvPr/>
-      </p:nvGrpSpPr>
-      <p:grpSpPr>
-        <a:xfrm>
-          <a:off x="0" y="0"/>
-          <a:ext cx="0" cy="0"/>
-          <a:chOff x="0" y="0"/>
-          <a:chExt cx="0" cy="0"/>
-        </a:xfrm>
-      </p:grpSpPr>
-      <p:sp>
-        <p:nvSpPr>
-          <p:cNvPr id="119" name="Google Shape;119;p2"/>
-          <p:cNvSpPr txBox="1"/>
-          <p:nvPr/>
-        </p:nvSpPr>
-        <p:spPr>
-          <a:xfrm>
-            <a:off x="914400" y="2286000"/>
-            <a:ext cx="10362895" cy="2286000"/>
-          </a:xfrm>
-          <a:prstGeom prst="rect">
-            <a:avLst/>
-          </a:prstGeom>
-          <a:noFill/>
-          <a:ln>
-            <a:noFill/>
-          </a:ln>
-        </p:spPr>
-        <p:txBody>
-          <a:bodyPr spcFirstLastPara="1" wrap="square" lIns="91425" tIns="45700" rIns="91425" bIns="45700" anchor="t" anchorCtr="0">
-            <a:spAutoFit/>
-          </a:bodyPr>
-          <a:lstStyle/>
-          <a:p>
-            <a:pPr marL="0" marR="0" lvl="0" indent="0" algn="ctr" rtl="0">
-              <a:spcBef>
-                <a:spcPts val="0"/>
-              </a:spcBef>
-              <a:spcAft>
-                <a:spcPts val="0"/>
-              </a:spcAft>
-              <a:buNone/>
-            </a:pPr>
-            <a:r>
-              <a:rPr lang="en-US" sz="4400" b="1" i="0" u="none" strike="noStrike" cap="none">
-                <a:solidFill>
-                  <a:srgbClr val="5B21B6"/>
-                </a:solidFill>
-                <a:latin typeface="Calibri"/>
-                <a:ea typeface="Calibri"/>
-                <a:cs typeface="Calibri"/>
-                <a:sym typeface="Calibri"/>
-              </a:rPr>
-              <a:t>A Bug You Can't Reproduce on Your Laptop</a:t>
-            </a:r>
-            <a:endParaRPr/>
-          </a:p>
-        </p:txBody>
-      </p:sp>
-    </p:spTree>
-  </p:cSld>
-  <p:clrMapOvr>
-    <a:masterClrMapping/>
-  </p:clrMapOvr>
-</p:sld>
-</file>
-
-<file path=ppt/slides/slide50.xml><?xml version="1.0" encoding="utf-8"?>
+<file path=ppt/slides/slide47.xml><?xml version="1.0" encoding="utf-8"?>
 <p:sld xmlns:a="http://schemas.openxmlformats.org/drawingml/2006/main" xmlns:r="http://schemas.openxmlformats.org/officeDocument/2006/relationships" xmlns:p="http://schemas.openxmlformats.org/presentationml/2006/main">
   <p:cSld>
     <p:bg>
@@ -37829,7 +36385,7 @@
 </p:sld>
 </file>
 
-<file path=ppt/slides/slide51.xml><?xml version="1.0" encoding="utf-8"?>
+<file path=ppt/slides/slide48.xml><?xml version="1.0" encoding="utf-8"?>
 <p:sld xmlns:a="http://schemas.openxmlformats.org/drawingml/2006/main" xmlns:r="http://schemas.openxmlformats.org/officeDocument/2006/relationships" xmlns:p="http://schemas.openxmlformats.org/presentationml/2006/main">
   <p:cSld>
     <p:bg>
@@ -38223,7 +36779,7 @@
 </p:sld>
 </file>
 
-<file path=ppt/slides/slide52.xml><?xml version="1.0" encoding="utf-8"?>
+<file path=ppt/slides/slide49.xml><?xml version="1.0" encoding="utf-8"?>
 <p:sld xmlns:a="http://schemas.openxmlformats.org/drawingml/2006/main" xmlns:r="http://schemas.openxmlformats.org/officeDocument/2006/relationships" xmlns:p="http://schemas.openxmlformats.org/presentationml/2006/main">
   <p:cSld>
     <p:bg>
@@ -38717,7 +37273,509 @@
 </p:sld>
 </file>
 
-<file path=ppt/slides/slide53.xml><?xml version="1.0" encoding="utf-8"?>
+<file path=ppt/slides/slide5.xml><?xml version="1.0" encoding="utf-8"?>
+<p:sld xmlns:a="http://schemas.openxmlformats.org/drawingml/2006/main" xmlns:r="http://schemas.openxmlformats.org/officeDocument/2006/relationships" xmlns:p="http://schemas.openxmlformats.org/presentationml/2006/main">
+  <p:cSld>
+    <p:bg>
+      <p:bgPr>
+        <a:solidFill>
+          <a:srgbClr val="FFFFFF"/>
+        </a:solidFill>
+        <a:effectLst/>
+      </p:bgPr>
+    </p:bg>
+    <p:spTree>
+      <p:nvGrpSpPr>
+        <p:cNvPr id="1" name="Shape 138"/>
+        <p:cNvGrpSpPr/>
+        <p:nvPr/>
+      </p:nvGrpSpPr>
+      <p:grpSpPr>
+        <a:xfrm>
+          <a:off x="0" y="0"/>
+          <a:ext cx="0" cy="0"/>
+          <a:chOff x="0" y="0"/>
+          <a:chExt cx="0" cy="0"/>
+        </a:xfrm>
+      </p:grpSpPr>
+      <p:sp>
+        <p:nvSpPr>
+          <p:cNvPr id="139" name="Google Shape;139;g3e498caeefa_0_157"/>
+          <p:cNvSpPr txBox="1"/>
+          <p:nvPr/>
+        </p:nvSpPr>
+        <p:spPr>
+          <a:xfrm>
+            <a:off x="731520" y="365760"/>
+            <a:ext cx="10728600" cy="646500"/>
+          </a:xfrm>
+          <a:prstGeom prst="rect">
+            <a:avLst/>
+          </a:prstGeom>
+          <a:noFill/>
+          <a:ln>
+            <a:noFill/>
+          </a:ln>
+        </p:spPr>
+        <p:txBody>
+          <a:bodyPr spcFirstLastPara="1" wrap="square" lIns="91425" tIns="45700" rIns="91425" bIns="45700" anchor="t" anchorCtr="0">
+            <a:spAutoFit/>
+          </a:bodyPr>
+          <a:lstStyle/>
+          <a:p>
+            <a:pPr marL="0" marR="0" lvl="0" indent="0" algn="l" rtl="0">
+              <a:spcBef>
+                <a:spcPts val="0"/>
+              </a:spcBef>
+              <a:spcAft>
+                <a:spcPts val="0"/>
+              </a:spcAft>
+              <a:buNone/>
+            </a:pPr>
+            <a:r>
+              <a:rPr lang="en-US" sz="3600" b="1" i="0" u="none" strike="noStrike" cap="none">
+                <a:solidFill>
+                  <a:srgbClr val="1A1A2E"/>
+                </a:solidFill>
+                <a:latin typeface="Calibri"/>
+                <a:ea typeface="Calibri"/>
+                <a:cs typeface="Calibri"/>
+                <a:sym typeface="Calibri"/>
+              </a:rPr>
+              <a:t>Two people withdraw $10 at the same time</a:t>
+            </a:r>
+            <a:endParaRPr/>
+          </a:p>
+        </p:txBody>
+      </p:sp>
+      <p:sp>
+        <p:nvSpPr>
+          <p:cNvPr id="140" name="Google Shape;140;g3e498caeefa_0_157"/>
+          <p:cNvSpPr txBox="1"/>
+          <p:nvPr/>
+        </p:nvSpPr>
+        <p:spPr>
+          <a:xfrm>
+            <a:off x="914400" y="1463040"/>
+            <a:ext cx="10362900" cy="4894800"/>
+          </a:xfrm>
+          <a:prstGeom prst="rect">
+            <a:avLst/>
+          </a:prstGeom>
+          <a:noFill/>
+          <a:ln>
+            <a:noFill/>
+          </a:ln>
+        </p:spPr>
+        <p:txBody>
+          <a:bodyPr spcFirstLastPara="1" wrap="square" lIns="91425" tIns="45700" rIns="91425" bIns="45700" anchor="t" anchorCtr="0">
+            <a:spAutoFit/>
+          </a:bodyPr>
+          <a:lstStyle/>
+          <a:p>
+            <a:pPr marL="0" marR="0" lvl="1" indent="0" algn="l" rtl="0">
+              <a:spcBef>
+                <a:spcPts val="600"/>
+              </a:spcBef>
+              <a:spcAft>
+                <a:spcPts val="0"/>
+              </a:spcAft>
+              <a:buNone/>
+            </a:pPr>
+            <a:r>
+              <a:rPr lang="en-US" sz="2400">
+                <a:solidFill>
+                  <a:srgbClr val="333344"/>
+                </a:solidFill>
+                <a:latin typeface="Calibri"/>
+                <a:ea typeface="Calibri"/>
+                <a:cs typeface="Calibri"/>
+                <a:sym typeface="Calibri"/>
+              </a:rPr>
+              <a:t>A bank account, one row in your database:</a:t>
+            </a:r>
+            <a:endParaRPr sz="2000" b="0" i="0" u="none" strike="noStrike" cap="none">
+              <a:solidFill>
+                <a:srgbClr val="666677"/>
+              </a:solidFill>
+              <a:latin typeface="Calibri"/>
+              <a:ea typeface="Calibri"/>
+              <a:cs typeface="Calibri"/>
+              <a:sym typeface="Calibri"/>
+            </a:endParaRPr>
+          </a:p>
+          <a:p>
+            <a:pPr marL="457200" marR="0" lvl="1" indent="0" algn="l" rtl="0">
+              <a:spcBef>
+                <a:spcPts val="600"/>
+              </a:spcBef>
+              <a:spcAft>
+                <a:spcPts val="0"/>
+              </a:spcAft>
+              <a:buNone/>
+            </a:pPr>
+            <a:r>
+              <a:rPr lang="en-US" sz="2000" b="0" i="0" u="none" strike="noStrike" cap="none">
+                <a:solidFill>
+                  <a:srgbClr val="666677"/>
+                </a:solidFill>
+                <a:latin typeface="Calibri"/>
+                <a:ea typeface="Calibri"/>
+                <a:cs typeface="Calibri"/>
+                <a:sym typeface="Calibri"/>
+              </a:rPr>
+              <a:t>  </a:t>
+            </a:r>
+            <a:r>
+              <a:rPr lang="en-US" sz="2000" b="1" i="0" u="none" strike="noStrike" cap="none">
+                <a:solidFill>
+                  <a:srgbClr val="666677"/>
+                </a:solidFill>
+                <a:latin typeface="Courier Prime"/>
+                <a:ea typeface="Courier Prime"/>
+                <a:cs typeface="Courier Prime"/>
+                <a:sym typeface="Courier Prime"/>
+              </a:rPr>
+              <a:t>`accounts`: { id: 42, balance: 100 }</a:t>
+            </a:r>
+            <a:endParaRPr b="1">
+              <a:latin typeface="Courier Prime"/>
+              <a:ea typeface="Courier Prime"/>
+              <a:cs typeface="Courier Prime"/>
+              <a:sym typeface="Courier Prime"/>
+            </a:endParaRPr>
+          </a:p>
+          <a:p>
+            <a:pPr marL="0" marR="0" lvl="0" indent="0" algn="l" rtl="0">
+              <a:spcBef>
+                <a:spcPts val="600"/>
+              </a:spcBef>
+              <a:spcAft>
+                <a:spcPts val="0"/>
+              </a:spcAft>
+              <a:buNone/>
+            </a:pPr>
+            <a:endParaRPr sz="2000" b="0" i="0" u="none" strike="noStrike" cap="none">
+              <a:solidFill>
+                <a:srgbClr val="666677"/>
+              </a:solidFill>
+              <a:latin typeface="Calibri"/>
+              <a:ea typeface="Calibri"/>
+              <a:cs typeface="Calibri"/>
+              <a:sym typeface="Calibri"/>
+            </a:endParaRPr>
+          </a:p>
+          <a:p>
+            <a:pPr marL="0" marR="0" lvl="0" indent="0" algn="l" rtl="0">
+              <a:spcBef>
+                <a:spcPts val="600"/>
+              </a:spcBef>
+              <a:spcAft>
+                <a:spcPts val="0"/>
+              </a:spcAft>
+              <a:buNone/>
+            </a:pPr>
+            <a:r>
+              <a:rPr lang="en-US" sz="2400" b="0" i="0" u="none" strike="noStrike" cap="none">
+                <a:solidFill>
+                  <a:srgbClr val="333344"/>
+                </a:solidFill>
+                <a:latin typeface="Calibri"/>
+                <a:ea typeface="Calibri"/>
+                <a:cs typeface="Calibri"/>
+                <a:sym typeface="Calibri"/>
+              </a:rPr>
+              <a:t>Two withdraw - $10 requests land at the same millisecond. Each handler does:</a:t>
+            </a:r>
+            <a:endParaRPr/>
+          </a:p>
+          <a:p>
+            <a:pPr marL="457200" marR="0" lvl="1" indent="0" algn="l" rtl="0">
+              <a:spcBef>
+                <a:spcPts val="600"/>
+              </a:spcBef>
+              <a:spcAft>
+                <a:spcPts val="0"/>
+              </a:spcAft>
+              <a:buNone/>
+            </a:pPr>
+            <a:r>
+              <a:rPr lang="en-US" sz="2000" b="0" i="0" u="none" strike="noStrike" cap="none">
+                <a:solidFill>
+                  <a:srgbClr val="666677"/>
+                </a:solidFill>
+                <a:latin typeface="Calibri"/>
+                <a:ea typeface="Calibri"/>
+                <a:cs typeface="Calibri"/>
+                <a:sym typeface="Calibri"/>
+              </a:rPr>
+              <a:t>  </a:t>
+            </a:r>
+            <a:r>
+              <a:rPr lang="en-US" sz="2000" b="1" i="0" u="none" strike="noStrike" cap="none">
+                <a:solidFill>
+                  <a:srgbClr val="666677"/>
+                </a:solidFill>
+                <a:latin typeface="Calibri"/>
+                <a:ea typeface="Calibri"/>
+                <a:cs typeface="Calibri"/>
+                <a:sym typeface="Calibri"/>
+              </a:rPr>
+              <a:t>1.</a:t>
+            </a:r>
+            <a:r>
+              <a:rPr lang="en-US" sz="2000" b="0" i="0" u="none" strike="noStrike" cap="none">
+                <a:solidFill>
+                  <a:srgbClr val="666677"/>
+                </a:solidFill>
+                <a:latin typeface="Calibri"/>
+                <a:ea typeface="Calibri"/>
+                <a:cs typeface="Calibri"/>
+                <a:sym typeface="Calibri"/>
+              </a:rPr>
+              <a:t> Read the current balance</a:t>
+            </a:r>
+            <a:endParaRPr/>
+          </a:p>
+          <a:p>
+            <a:pPr marL="457200" marR="0" lvl="1" indent="0" algn="l" rtl="0">
+              <a:spcBef>
+                <a:spcPts val="600"/>
+              </a:spcBef>
+              <a:spcAft>
+                <a:spcPts val="0"/>
+              </a:spcAft>
+              <a:buNone/>
+            </a:pPr>
+            <a:r>
+              <a:rPr lang="en-US" sz="2000" b="0" i="0" u="none" strike="noStrike" cap="none">
+                <a:solidFill>
+                  <a:srgbClr val="666677"/>
+                </a:solidFill>
+                <a:latin typeface="Calibri"/>
+                <a:ea typeface="Calibri"/>
+                <a:cs typeface="Calibri"/>
+                <a:sym typeface="Calibri"/>
+              </a:rPr>
+              <a:t>  </a:t>
+            </a:r>
+            <a:r>
+              <a:rPr lang="en-US" sz="2000" b="1" i="0" u="none" strike="noStrike" cap="none">
+                <a:solidFill>
+                  <a:srgbClr val="666677"/>
+                </a:solidFill>
+                <a:latin typeface="Calibri"/>
+                <a:ea typeface="Calibri"/>
+                <a:cs typeface="Calibri"/>
+                <a:sym typeface="Calibri"/>
+              </a:rPr>
+              <a:t>2.</a:t>
+            </a:r>
+            <a:r>
+              <a:rPr lang="en-US" sz="2000" b="0" i="0" u="none" strike="noStrike" cap="none">
+                <a:solidFill>
+                  <a:srgbClr val="666677"/>
+                </a:solidFill>
+                <a:latin typeface="Calibri"/>
+                <a:ea typeface="Calibri"/>
+                <a:cs typeface="Calibri"/>
+                <a:sym typeface="Calibri"/>
+              </a:rPr>
+              <a:t> Subtract $10</a:t>
+            </a:r>
+            <a:endParaRPr/>
+          </a:p>
+          <a:p>
+            <a:pPr marL="457200" marR="0" lvl="1" indent="0" algn="l" rtl="0">
+              <a:spcBef>
+                <a:spcPts val="600"/>
+              </a:spcBef>
+              <a:spcAft>
+                <a:spcPts val="0"/>
+              </a:spcAft>
+              <a:buNone/>
+            </a:pPr>
+            <a:r>
+              <a:rPr lang="en-US" sz="2000" b="0" i="0" u="none" strike="noStrike" cap="none">
+                <a:solidFill>
+                  <a:srgbClr val="666677"/>
+                </a:solidFill>
+                <a:latin typeface="Calibri"/>
+                <a:ea typeface="Calibri"/>
+                <a:cs typeface="Calibri"/>
+                <a:sym typeface="Calibri"/>
+              </a:rPr>
+              <a:t>  </a:t>
+            </a:r>
+            <a:r>
+              <a:rPr lang="en-US" sz="2000" b="1" i="0" u="none" strike="noStrike" cap="none">
+                <a:solidFill>
+                  <a:srgbClr val="666677"/>
+                </a:solidFill>
+                <a:latin typeface="Calibri"/>
+                <a:ea typeface="Calibri"/>
+                <a:cs typeface="Calibri"/>
+                <a:sym typeface="Calibri"/>
+              </a:rPr>
+              <a:t>3.</a:t>
+            </a:r>
+            <a:r>
+              <a:rPr lang="en-US" sz="2000" b="0" i="0" u="none" strike="noStrike" cap="none">
+                <a:solidFill>
+                  <a:srgbClr val="666677"/>
+                </a:solidFill>
+                <a:latin typeface="Calibri"/>
+                <a:ea typeface="Calibri"/>
+                <a:cs typeface="Calibri"/>
+                <a:sym typeface="Calibri"/>
+              </a:rPr>
+              <a:t> Write the new balance back</a:t>
+            </a:r>
+            <a:endParaRPr/>
+          </a:p>
+          <a:p>
+            <a:pPr marL="0" marR="0" lvl="0" indent="0" algn="l" rtl="0">
+              <a:spcBef>
+                <a:spcPts val="600"/>
+              </a:spcBef>
+              <a:spcAft>
+                <a:spcPts val="0"/>
+              </a:spcAft>
+              <a:buNone/>
+            </a:pPr>
+            <a:endParaRPr sz="2000" b="0" i="0" u="none" strike="noStrike" cap="none">
+              <a:solidFill>
+                <a:srgbClr val="666677"/>
+              </a:solidFill>
+              <a:latin typeface="Calibri"/>
+              <a:ea typeface="Calibri"/>
+              <a:cs typeface="Calibri"/>
+              <a:sym typeface="Calibri"/>
+            </a:endParaRPr>
+          </a:p>
+          <a:p>
+            <a:pPr marL="0" marR="0" lvl="0" indent="0" algn="l" rtl="0">
+              <a:spcBef>
+                <a:spcPts val="600"/>
+              </a:spcBef>
+              <a:spcAft>
+                <a:spcPts val="0"/>
+              </a:spcAft>
+              <a:buNone/>
+            </a:pPr>
+            <a:r>
+              <a:rPr lang="en-US" sz="2400" b="0" i="0" u="none" strike="noStrike" cap="none">
+                <a:solidFill>
+                  <a:srgbClr val="333344"/>
+                </a:solidFill>
+                <a:latin typeface="Calibri"/>
+                <a:ea typeface="Calibri"/>
+                <a:cs typeface="Calibri"/>
+                <a:sym typeface="Calibri"/>
+              </a:rPr>
+              <a:t>Each one alone is correct: 100 - 10 = 90. Run the two at the same time.</a:t>
+            </a:r>
+            <a:endParaRPr/>
+          </a:p>
+          <a:p>
+            <a:pPr marL="457200" marR="0" lvl="1" indent="0" algn="l" rtl="0">
+              <a:spcBef>
+                <a:spcPts val="600"/>
+              </a:spcBef>
+              <a:spcAft>
+                <a:spcPts val="0"/>
+              </a:spcAft>
+              <a:buNone/>
+            </a:pPr>
+            <a:r>
+              <a:rPr lang="en-US" sz="2000" b="0" i="0" u="none" strike="noStrike" cap="none">
+                <a:solidFill>
+                  <a:srgbClr val="666677"/>
+                </a:solidFill>
+                <a:latin typeface="Calibri"/>
+                <a:ea typeface="Calibri"/>
+                <a:cs typeface="Calibri"/>
+                <a:sym typeface="Calibri"/>
+              </a:rPr>
+              <a:t>  </a:t>
+            </a:r>
+            <a:r>
+              <a:rPr lang="en-US" sz="2000">
+                <a:solidFill>
+                  <a:srgbClr val="666677"/>
+                </a:solidFill>
+                <a:latin typeface="Calibri"/>
+                <a:ea typeface="Calibri"/>
+                <a:cs typeface="Calibri"/>
+                <a:sym typeface="Calibri"/>
+              </a:rPr>
+              <a:t>T</a:t>
+            </a:r>
+            <a:r>
+              <a:rPr lang="en-US" sz="2000" b="0" i="0" u="none" strike="noStrike" cap="none">
+                <a:solidFill>
+                  <a:srgbClr val="666677"/>
+                </a:solidFill>
+                <a:latin typeface="Calibri"/>
+                <a:ea typeface="Calibri"/>
+                <a:cs typeface="Calibri"/>
+                <a:sym typeface="Calibri"/>
+              </a:rPr>
+              <a:t>he account lands at $90, not $80, and a whole withdrawal vanished.</a:t>
+            </a:r>
+            <a:endParaRPr sz="2000" b="0" i="0" u="none" strike="noStrike" cap="none">
+              <a:solidFill>
+                <a:srgbClr val="666677"/>
+              </a:solidFill>
+              <a:latin typeface="Calibri"/>
+              <a:ea typeface="Calibri"/>
+              <a:cs typeface="Calibri"/>
+              <a:sym typeface="Calibri"/>
+            </a:endParaRPr>
+          </a:p>
+          <a:p>
+            <a:pPr marL="0" marR="0" lvl="1" indent="0" algn="ctr" rtl="0">
+              <a:spcBef>
+                <a:spcPts val="600"/>
+              </a:spcBef>
+              <a:spcAft>
+                <a:spcPts val="0"/>
+              </a:spcAft>
+              <a:buNone/>
+            </a:pPr>
+            <a:r>
+              <a:rPr lang="en-US" sz="5000" b="1">
+                <a:solidFill>
+                  <a:srgbClr val="FF0000"/>
+                </a:solidFill>
+                <a:latin typeface="Calibri"/>
+                <a:ea typeface="Calibri"/>
+                <a:cs typeface="Calibri"/>
+                <a:sym typeface="Calibri"/>
+              </a:rPr>
+              <a:t>MAYBE</a:t>
+            </a:r>
+            <a:endParaRPr sz="5000" b="1">
+              <a:solidFill>
+                <a:srgbClr val="FF0000"/>
+              </a:solidFill>
+              <a:latin typeface="Calibri"/>
+              <a:ea typeface="Calibri"/>
+              <a:cs typeface="Calibri"/>
+              <a:sym typeface="Calibri"/>
+            </a:endParaRPr>
+          </a:p>
+        </p:txBody>
+      </p:sp>
+    </p:spTree>
+  </p:cSld>
+  <p:clrMapOvr>
+    <a:masterClrMapping/>
+  </p:clrMapOvr>
+</p:sld>
+</file>
+
+<file path=ppt/slides/slide50.xml><?xml version="1.0" encoding="utf-8"?>
 <p:sld xmlns:a="http://schemas.openxmlformats.org/drawingml/2006/main" xmlns:r="http://schemas.openxmlformats.org/officeDocument/2006/relationships" xmlns:p="http://schemas.openxmlformats.org/presentationml/2006/main">
   <p:cSld>
     <p:bg>
@@ -39311,7 +38369,7 @@
 </p:sld>
 </file>
 
-<file path=ppt/slides/slide54.xml><?xml version="1.0" encoding="utf-8"?>
+<file path=ppt/slides/slide51.xml><?xml version="1.0" encoding="utf-8"?>
 <p:sld xmlns:a="http://schemas.openxmlformats.org/drawingml/2006/main" xmlns:r="http://schemas.openxmlformats.org/officeDocument/2006/relationships" xmlns:p="http://schemas.openxmlformats.org/presentationml/2006/main">
   <p:cSld>
     <p:bg>
@@ -39841,7 +38899,7 @@
 </p:sld>
 </file>
 
-<file path=ppt/slides/slide55.xml><?xml version="1.0" encoding="utf-8"?>
+<file path=ppt/slides/slide52.xml><?xml version="1.0" encoding="utf-8"?>
 <p:sld xmlns:a="http://schemas.openxmlformats.org/drawingml/2006/main" xmlns:r="http://schemas.openxmlformats.org/officeDocument/2006/relationships" xmlns:p="http://schemas.openxmlformats.org/presentationml/2006/main">
   <p:cSld>
     <p:bg>
@@ -40487,7 +39545,7 @@
 </p:sld>
 </file>
 
-<file path=ppt/slides/slide56.xml><?xml version="1.0" encoding="utf-8"?>
+<file path=ppt/slides/slide53.xml><?xml version="1.0" encoding="utf-8"?>
 <p:sld xmlns:a="http://schemas.openxmlformats.org/drawingml/2006/main" xmlns:r="http://schemas.openxmlformats.org/officeDocument/2006/relationships" xmlns:p="http://schemas.openxmlformats.org/presentationml/2006/main">
   <p:cSld>
     <p:bg>
@@ -40978,7 +40036,7 @@
 </p:sld>
 </file>
 
-<file path=ppt/slides/slide57.xml><?xml version="1.0" encoding="utf-8"?>
+<file path=ppt/slides/slide54.xml><?xml version="1.0" encoding="utf-8"?>
 <p:sld xmlns:a="http://schemas.openxmlformats.org/drawingml/2006/main" xmlns:r="http://schemas.openxmlformats.org/officeDocument/2006/relationships" xmlns:p="http://schemas.openxmlformats.org/presentationml/2006/main">
   <p:cSld>
     <p:bg>
@@ -41600,1352 +40658,6 @@
     </p:bg>
     <p:spTree>
       <p:nvGrpSpPr>
-        <p:cNvPr id="1" name="Shape 124"/>
-        <p:cNvGrpSpPr/>
-        <p:nvPr/>
-      </p:nvGrpSpPr>
-      <p:grpSpPr>
-        <a:xfrm>
-          <a:off x="0" y="0"/>
-          <a:ext cx="0" cy="0"/>
-          <a:chOff x="0" y="0"/>
-          <a:chExt cx="0" cy="0"/>
-        </a:xfrm>
-      </p:grpSpPr>
-      <p:sp>
-        <p:nvSpPr>
-          <p:cNvPr id="125" name="Google Shape;125;g3e498caeefa_0_151"/>
-          <p:cNvSpPr txBox="1"/>
-          <p:nvPr/>
-        </p:nvSpPr>
-        <p:spPr>
-          <a:xfrm>
-            <a:off x="731520" y="365760"/>
-            <a:ext cx="10728600" cy="646500"/>
-          </a:xfrm>
-          <a:prstGeom prst="rect">
-            <a:avLst/>
-          </a:prstGeom>
-          <a:noFill/>
-          <a:ln>
-            <a:noFill/>
-          </a:ln>
-        </p:spPr>
-        <p:txBody>
-          <a:bodyPr spcFirstLastPara="1" wrap="square" lIns="91425" tIns="45700" rIns="91425" bIns="45700" anchor="t" anchorCtr="0">
-            <a:spAutoFit/>
-          </a:bodyPr>
-          <a:lstStyle/>
-          <a:p>
-            <a:pPr marL="0" marR="0" lvl="0" indent="0" algn="l" rtl="0">
-              <a:spcBef>
-                <a:spcPts val="0"/>
-              </a:spcBef>
-              <a:spcAft>
-                <a:spcPts val="0"/>
-              </a:spcAft>
-              <a:buNone/>
-            </a:pPr>
-            <a:r>
-              <a:rPr lang="en-US" sz="3600" b="1" i="0" u="none" strike="noStrike" cap="none">
-                <a:solidFill>
-                  <a:srgbClr val="1A1A2E"/>
-                </a:solidFill>
-                <a:latin typeface="Calibri"/>
-                <a:ea typeface="Calibri"/>
-                <a:cs typeface="Calibri"/>
-                <a:sym typeface="Calibri"/>
-              </a:rPr>
-              <a:t>Two people withdraw $10 at the same time</a:t>
-            </a:r>
-            <a:endParaRPr/>
-          </a:p>
-        </p:txBody>
-      </p:sp>
-      <p:sp>
-        <p:nvSpPr>
-          <p:cNvPr id="126" name="Google Shape;126;g3e498caeefa_0_151"/>
-          <p:cNvSpPr txBox="1"/>
-          <p:nvPr/>
-        </p:nvSpPr>
-        <p:spPr>
-          <a:xfrm>
-            <a:off x="914400" y="1463040"/>
-            <a:ext cx="10362900" cy="3124500"/>
-          </a:xfrm>
-          <a:prstGeom prst="rect">
-            <a:avLst/>
-          </a:prstGeom>
-          <a:noFill/>
-          <a:ln>
-            <a:noFill/>
-          </a:ln>
-        </p:spPr>
-        <p:txBody>
-          <a:bodyPr spcFirstLastPara="1" wrap="square" lIns="91425" tIns="45700" rIns="91425" bIns="45700" anchor="t" anchorCtr="0">
-            <a:spAutoFit/>
-          </a:bodyPr>
-          <a:lstStyle/>
-          <a:p>
-            <a:pPr marL="0" marR="0" lvl="1" indent="0" algn="l" rtl="0">
-              <a:spcBef>
-                <a:spcPts val="600"/>
-              </a:spcBef>
-              <a:spcAft>
-                <a:spcPts val="0"/>
-              </a:spcAft>
-              <a:buNone/>
-            </a:pPr>
-            <a:r>
-              <a:rPr lang="en-US" sz="2400">
-                <a:solidFill>
-                  <a:srgbClr val="333344"/>
-                </a:solidFill>
-                <a:latin typeface="Calibri"/>
-                <a:ea typeface="Calibri"/>
-                <a:cs typeface="Calibri"/>
-                <a:sym typeface="Calibri"/>
-              </a:rPr>
-              <a:t>A bank account, one row in your database:</a:t>
-            </a:r>
-            <a:endParaRPr sz="2000" b="0" i="0" u="none" strike="noStrike" cap="none">
-              <a:solidFill>
-                <a:srgbClr val="666677"/>
-              </a:solidFill>
-              <a:latin typeface="Calibri"/>
-              <a:ea typeface="Calibri"/>
-              <a:cs typeface="Calibri"/>
-              <a:sym typeface="Calibri"/>
-            </a:endParaRPr>
-          </a:p>
-          <a:p>
-            <a:pPr marL="457200" marR="0" lvl="1" indent="0" algn="l" rtl="0">
-              <a:spcBef>
-                <a:spcPts val="600"/>
-              </a:spcBef>
-              <a:spcAft>
-                <a:spcPts val="0"/>
-              </a:spcAft>
-              <a:buNone/>
-            </a:pPr>
-            <a:r>
-              <a:rPr lang="en-US" sz="2000" b="0" i="0" u="none" strike="noStrike" cap="none">
-                <a:solidFill>
-                  <a:srgbClr val="666677"/>
-                </a:solidFill>
-                <a:latin typeface="Calibri"/>
-                <a:ea typeface="Calibri"/>
-                <a:cs typeface="Calibri"/>
-                <a:sym typeface="Calibri"/>
-              </a:rPr>
-              <a:t>  </a:t>
-            </a:r>
-            <a:r>
-              <a:rPr lang="en-US" sz="2000" b="1" i="0" u="none" strike="noStrike" cap="none">
-                <a:solidFill>
-                  <a:srgbClr val="666677"/>
-                </a:solidFill>
-                <a:latin typeface="Courier Prime"/>
-                <a:ea typeface="Courier Prime"/>
-                <a:cs typeface="Courier Prime"/>
-                <a:sym typeface="Courier Prime"/>
-              </a:rPr>
-              <a:t>`accounts`: { id: 42, balance: 100 }</a:t>
-            </a:r>
-            <a:endParaRPr b="1">
-              <a:latin typeface="Courier Prime"/>
-              <a:ea typeface="Courier Prime"/>
-              <a:cs typeface="Courier Prime"/>
-              <a:sym typeface="Courier Prime"/>
-            </a:endParaRPr>
-          </a:p>
-          <a:p>
-            <a:pPr marL="0" marR="0" lvl="0" indent="0" algn="l" rtl="0">
-              <a:spcBef>
-                <a:spcPts val="600"/>
-              </a:spcBef>
-              <a:spcAft>
-                <a:spcPts val="0"/>
-              </a:spcAft>
-              <a:buNone/>
-            </a:pPr>
-            <a:endParaRPr sz="2000" b="0" i="0" u="none" strike="noStrike" cap="none">
-              <a:solidFill>
-                <a:srgbClr val="666677"/>
-              </a:solidFill>
-              <a:latin typeface="Calibri"/>
-              <a:ea typeface="Calibri"/>
-              <a:cs typeface="Calibri"/>
-              <a:sym typeface="Calibri"/>
-            </a:endParaRPr>
-          </a:p>
-          <a:p>
-            <a:pPr marL="0" marR="0" lvl="0" indent="0" algn="l" rtl="0">
-              <a:spcBef>
-                <a:spcPts val="600"/>
-              </a:spcBef>
-              <a:spcAft>
-                <a:spcPts val="0"/>
-              </a:spcAft>
-              <a:buNone/>
-            </a:pPr>
-            <a:r>
-              <a:rPr lang="en-US" sz="2400" b="0" i="0" u="none" strike="noStrike" cap="none">
-                <a:solidFill>
-                  <a:srgbClr val="333344"/>
-                </a:solidFill>
-                <a:latin typeface="Calibri"/>
-                <a:ea typeface="Calibri"/>
-                <a:cs typeface="Calibri"/>
-                <a:sym typeface="Calibri"/>
-              </a:rPr>
-              <a:t>Two withdraw - $10 requests land at the same millisecond. Each handler does:</a:t>
-            </a:r>
-            <a:endParaRPr/>
-          </a:p>
-          <a:p>
-            <a:pPr marL="457200" marR="0" lvl="1" indent="0" algn="l" rtl="0">
-              <a:spcBef>
-                <a:spcPts val="600"/>
-              </a:spcBef>
-              <a:spcAft>
-                <a:spcPts val="0"/>
-              </a:spcAft>
-              <a:buNone/>
-            </a:pPr>
-            <a:r>
-              <a:rPr lang="en-US" sz="2000" b="0" i="0" u="none" strike="noStrike" cap="none">
-                <a:solidFill>
-                  <a:srgbClr val="666677"/>
-                </a:solidFill>
-                <a:latin typeface="Calibri"/>
-                <a:ea typeface="Calibri"/>
-                <a:cs typeface="Calibri"/>
-                <a:sym typeface="Calibri"/>
-              </a:rPr>
-              <a:t>  </a:t>
-            </a:r>
-            <a:r>
-              <a:rPr lang="en-US" sz="2000" b="1" i="0" u="none" strike="noStrike" cap="none">
-                <a:solidFill>
-                  <a:srgbClr val="666677"/>
-                </a:solidFill>
-                <a:latin typeface="Calibri"/>
-                <a:ea typeface="Calibri"/>
-                <a:cs typeface="Calibri"/>
-                <a:sym typeface="Calibri"/>
-              </a:rPr>
-              <a:t>1.</a:t>
-            </a:r>
-            <a:r>
-              <a:rPr lang="en-US" sz="2000" b="0" i="0" u="none" strike="noStrike" cap="none">
-                <a:solidFill>
-                  <a:srgbClr val="666677"/>
-                </a:solidFill>
-                <a:latin typeface="Calibri"/>
-                <a:ea typeface="Calibri"/>
-                <a:cs typeface="Calibri"/>
-                <a:sym typeface="Calibri"/>
-              </a:rPr>
-              <a:t> Read the current balance</a:t>
-            </a:r>
-            <a:endParaRPr/>
-          </a:p>
-          <a:p>
-            <a:pPr marL="457200" marR="0" lvl="1" indent="0" algn="l" rtl="0">
-              <a:spcBef>
-                <a:spcPts val="600"/>
-              </a:spcBef>
-              <a:spcAft>
-                <a:spcPts val="0"/>
-              </a:spcAft>
-              <a:buNone/>
-            </a:pPr>
-            <a:r>
-              <a:rPr lang="en-US" sz="2000" b="0" i="0" u="none" strike="noStrike" cap="none">
-                <a:solidFill>
-                  <a:srgbClr val="666677"/>
-                </a:solidFill>
-                <a:latin typeface="Calibri"/>
-                <a:ea typeface="Calibri"/>
-                <a:cs typeface="Calibri"/>
-                <a:sym typeface="Calibri"/>
-              </a:rPr>
-              <a:t>  </a:t>
-            </a:r>
-            <a:r>
-              <a:rPr lang="en-US" sz="2000" b="1" i="0" u="none" strike="noStrike" cap="none">
-                <a:solidFill>
-                  <a:srgbClr val="666677"/>
-                </a:solidFill>
-                <a:latin typeface="Calibri"/>
-                <a:ea typeface="Calibri"/>
-                <a:cs typeface="Calibri"/>
-                <a:sym typeface="Calibri"/>
-              </a:rPr>
-              <a:t>2.</a:t>
-            </a:r>
-            <a:r>
-              <a:rPr lang="en-US" sz="2000" b="0" i="0" u="none" strike="noStrike" cap="none">
-                <a:solidFill>
-                  <a:srgbClr val="666677"/>
-                </a:solidFill>
-                <a:latin typeface="Calibri"/>
-                <a:ea typeface="Calibri"/>
-                <a:cs typeface="Calibri"/>
-                <a:sym typeface="Calibri"/>
-              </a:rPr>
-              <a:t> Subtract $10</a:t>
-            </a:r>
-            <a:endParaRPr/>
-          </a:p>
-          <a:p>
-            <a:pPr marL="457200" marR="0" lvl="1" indent="0" algn="l" rtl="0">
-              <a:spcBef>
-                <a:spcPts val="600"/>
-              </a:spcBef>
-              <a:spcAft>
-                <a:spcPts val="0"/>
-              </a:spcAft>
-              <a:buNone/>
-            </a:pPr>
-            <a:r>
-              <a:rPr lang="en-US" sz="2000" b="0" i="0" u="none" strike="noStrike" cap="none">
-                <a:solidFill>
-                  <a:srgbClr val="666677"/>
-                </a:solidFill>
-                <a:latin typeface="Calibri"/>
-                <a:ea typeface="Calibri"/>
-                <a:cs typeface="Calibri"/>
-                <a:sym typeface="Calibri"/>
-              </a:rPr>
-              <a:t>  </a:t>
-            </a:r>
-            <a:r>
-              <a:rPr lang="en-US" sz="2000" b="1" i="0" u="none" strike="noStrike" cap="none">
-                <a:solidFill>
-                  <a:srgbClr val="666677"/>
-                </a:solidFill>
-                <a:latin typeface="Calibri"/>
-                <a:ea typeface="Calibri"/>
-                <a:cs typeface="Calibri"/>
-                <a:sym typeface="Calibri"/>
-              </a:rPr>
-              <a:t>3.</a:t>
-            </a:r>
-            <a:r>
-              <a:rPr lang="en-US" sz="2000" b="0" i="0" u="none" strike="noStrike" cap="none">
-                <a:solidFill>
-                  <a:srgbClr val="666677"/>
-                </a:solidFill>
-                <a:latin typeface="Calibri"/>
-                <a:ea typeface="Calibri"/>
-                <a:cs typeface="Calibri"/>
-                <a:sym typeface="Calibri"/>
-              </a:rPr>
-              <a:t> Write the new balance back</a:t>
-            </a:r>
-            <a:endParaRPr/>
-          </a:p>
-          <a:p>
-            <a:pPr marL="457200" marR="0" lvl="1" indent="0" algn="l" rtl="0">
-              <a:spcBef>
-                <a:spcPts val="600"/>
-              </a:spcBef>
-              <a:spcAft>
-                <a:spcPts val="0"/>
-              </a:spcAft>
-              <a:buNone/>
-            </a:pPr>
-            <a:endParaRPr/>
-          </a:p>
-        </p:txBody>
-      </p:sp>
-    </p:spTree>
-  </p:cSld>
-  <p:clrMapOvr>
-    <a:masterClrMapping/>
-  </p:clrMapOvr>
-</p:sld>
-</file>
-
-<file path=ppt/slides/slide7.xml><?xml version="1.0" encoding="utf-8"?>
-<p:sld xmlns:a="http://schemas.openxmlformats.org/drawingml/2006/main" xmlns:r="http://schemas.openxmlformats.org/officeDocument/2006/relationships" xmlns:p="http://schemas.openxmlformats.org/presentationml/2006/main">
-  <p:cSld>
-    <p:bg>
-      <p:bgPr>
-        <a:solidFill>
-          <a:srgbClr val="FFFFFF"/>
-        </a:solidFill>
-        <a:effectLst/>
-      </p:bgPr>
-    </p:bg>
-    <p:spTree>
-      <p:nvGrpSpPr>
-        <p:cNvPr id="1" name="Shape 131"/>
-        <p:cNvGrpSpPr/>
-        <p:nvPr/>
-      </p:nvGrpSpPr>
-      <p:grpSpPr>
-        <a:xfrm>
-          <a:off x="0" y="0"/>
-          <a:ext cx="0" cy="0"/>
-          <a:chOff x="0" y="0"/>
-          <a:chExt cx="0" cy="0"/>
-        </a:xfrm>
-      </p:grpSpPr>
-      <p:sp>
-        <p:nvSpPr>
-          <p:cNvPr id="132" name="Google Shape;132;p3"/>
-          <p:cNvSpPr txBox="1"/>
-          <p:nvPr/>
-        </p:nvSpPr>
-        <p:spPr>
-          <a:xfrm>
-            <a:off x="731520" y="365760"/>
-            <a:ext cx="10728655" cy="914400"/>
-          </a:xfrm>
-          <a:prstGeom prst="rect">
-            <a:avLst/>
-          </a:prstGeom>
-          <a:noFill/>
-          <a:ln>
-            <a:noFill/>
-          </a:ln>
-        </p:spPr>
-        <p:txBody>
-          <a:bodyPr spcFirstLastPara="1" wrap="square" lIns="91425" tIns="45700" rIns="91425" bIns="45700" anchor="t" anchorCtr="0">
-            <a:spAutoFit/>
-          </a:bodyPr>
-          <a:lstStyle/>
-          <a:p>
-            <a:pPr marL="0" marR="0" lvl="0" indent="0" algn="l" rtl="0">
-              <a:spcBef>
-                <a:spcPts val="0"/>
-              </a:spcBef>
-              <a:spcAft>
-                <a:spcPts val="0"/>
-              </a:spcAft>
-              <a:buNone/>
-            </a:pPr>
-            <a:r>
-              <a:rPr lang="en-US" sz="3600" b="1" i="0" u="none" strike="noStrike" cap="none">
-                <a:solidFill>
-                  <a:srgbClr val="1A1A2E"/>
-                </a:solidFill>
-                <a:latin typeface="Calibri"/>
-                <a:ea typeface="Calibri"/>
-                <a:cs typeface="Calibri"/>
-                <a:sym typeface="Calibri"/>
-              </a:rPr>
-              <a:t>Two people withdraw $10 at the same time</a:t>
-            </a:r>
-            <a:endParaRPr/>
-          </a:p>
-        </p:txBody>
-      </p:sp>
-      <p:sp>
-        <p:nvSpPr>
-          <p:cNvPr id="133" name="Google Shape;133;p3"/>
-          <p:cNvSpPr txBox="1"/>
-          <p:nvPr/>
-        </p:nvSpPr>
-        <p:spPr>
-          <a:xfrm>
-            <a:off x="914400" y="1463040"/>
-            <a:ext cx="10362900" cy="4048200"/>
-          </a:xfrm>
-          <a:prstGeom prst="rect">
-            <a:avLst/>
-          </a:prstGeom>
-          <a:noFill/>
-          <a:ln>
-            <a:noFill/>
-          </a:ln>
-        </p:spPr>
-        <p:txBody>
-          <a:bodyPr spcFirstLastPara="1" wrap="square" lIns="91425" tIns="45700" rIns="91425" bIns="45700" anchor="t" anchorCtr="0">
-            <a:spAutoFit/>
-          </a:bodyPr>
-          <a:lstStyle/>
-          <a:p>
-            <a:pPr marL="0" marR="0" lvl="1" indent="0" algn="l" rtl="0">
-              <a:spcBef>
-                <a:spcPts val="600"/>
-              </a:spcBef>
-              <a:spcAft>
-                <a:spcPts val="0"/>
-              </a:spcAft>
-              <a:buNone/>
-            </a:pPr>
-            <a:r>
-              <a:rPr lang="en-US" sz="2400">
-                <a:solidFill>
-                  <a:srgbClr val="333344"/>
-                </a:solidFill>
-                <a:latin typeface="Calibri"/>
-                <a:ea typeface="Calibri"/>
-                <a:cs typeface="Calibri"/>
-                <a:sym typeface="Calibri"/>
-              </a:rPr>
-              <a:t>A bank account, one row in your database:</a:t>
-            </a:r>
-            <a:endParaRPr sz="2000" b="0" i="0" u="none" strike="noStrike" cap="none">
-              <a:solidFill>
-                <a:srgbClr val="666677"/>
-              </a:solidFill>
-              <a:latin typeface="Calibri"/>
-              <a:ea typeface="Calibri"/>
-              <a:cs typeface="Calibri"/>
-              <a:sym typeface="Calibri"/>
-            </a:endParaRPr>
-          </a:p>
-          <a:p>
-            <a:pPr marL="457200" marR="0" lvl="1" indent="0" algn="l" rtl="0">
-              <a:spcBef>
-                <a:spcPts val="600"/>
-              </a:spcBef>
-              <a:spcAft>
-                <a:spcPts val="0"/>
-              </a:spcAft>
-              <a:buNone/>
-            </a:pPr>
-            <a:r>
-              <a:rPr lang="en-US" sz="2000" b="0" i="0" u="none" strike="noStrike" cap="none">
-                <a:solidFill>
-                  <a:srgbClr val="666677"/>
-                </a:solidFill>
-                <a:latin typeface="Calibri"/>
-                <a:ea typeface="Calibri"/>
-                <a:cs typeface="Calibri"/>
-                <a:sym typeface="Calibri"/>
-              </a:rPr>
-              <a:t>  </a:t>
-            </a:r>
-            <a:r>
-              <a:rPr lang="en-US" sz="2000" b="1" i="0" u="none" strike="noStrike" cap="none">
-                <a:solidFill>
-                  <a:srgbClr val="666677"/>
-                </a:solidFill>
-                <a:latin typeface="Courier Prime"/>
-                <a:ea typeface="Courier Prime"/>
-                <a:cs typeface="Courier Prime"/>
-                <a:sym typeface="Courier Prime"/>
-              </a:rPr>
-              <a:t>`accounts`: { id: 42, balance: 100 }</a:t>
-            </a:r>
-            <a:endParaRPr b="1">
-              <a:latin typeface="Courier Prime"/>
-              <a:ea typeface="Courier Prime"/>
-              <a:cs typeface="Courier Prime"/>
-              <a:sym typeface="Courier Prime"/>
-            </a:endParaRPr>
-          </a:p>
-          <a:p>
-            <a:pPr marL="0" marR="0" lvl="0" indent="0" algn="l" rtl="0">
-              <a:spcBef>
-                <a:spcPts val="600"/>
-              </a:spcBef>
-              <a:spcAft>
-                <a:spcPts val="0"/>
-              </a:spcAft>
-              <a:buNone/>
-            </a:pPr>
-            <a:endParaRPr sz="2000" b="0" i="0" u="none" strike="noStrike" cap="none">
-              <a:solidFill>
-                <a:srgbClr val="666677"/>
-              </a:solidFill>
-              <a:latin typeface="Calibri"/>
-              <a:ea typeface="Calibri"/>
-              <a:cs typeface="Calibri"/>
-              <a:sym typeface="Calibri"/>
-            </a:endParaRPr>
-          </a:p>
-          <a:p>
-            <a:pPr marL="0" marR="0" lvl="0" indent="0" algn="l" rtl="0">
-              <a:spcBef>
-                <a:spcPts val="600"/>
-              </a:spcBef>
-              <a:spcAft>
-                <a:spcPts val="0"/>
-              </a:spcAft>
-              <a:buNone/>
-            </a:pPr>
-            <a:r>
-              <a:rPr lang="en-US" sz="2400" b="0" i="0" u="none" strike="noStrike" cap="none">
-                <a:solidFill>
-                  <a:srgbClr val="333344"/>
-                </a:solidFill>
-                <a:latin typeface="Calibri"/>
-                <a:ea typeface="Calibri"/>
-                <a:cs typeface="Calibri"/>
-                <a:sym typeface="Calibri"/>
-              </a:rPr>
-              <a:t>Two withdraw - $10 requests land at the same millisecond. Each handler does:</a:t>
-            </a:r>
-            <a:endParaRPr/>
-          </a:p>
-          <a:p>
-            <a:pPr marL="457200" marR="0" lvl="1" indent="0" algn="l" rtl="0">
-              <a:spcBef>
-                <a:spcPts val="600"/>
-              </a:spcBef>
-              <a:spcAft>
-                <a:spcPts val="0"/>
-              </a:spcAft>
-              <a:buNone/>
-            </a:pPr>
-            <a:r>
-              <a:rPr lang="en-US" sz="2000" b="0" i="0" u="none" strike="noStrike" cap="none">
-                <a:solidFill>
-                  <a:srgbClr val="666677"/>
-                </a:solidFill>
-                <a:latin typeface="Calibri"/>
-                <a:ea typeface="Calibri"/>
-                <a:cs typeface="Calibri"/>
-                <a:sym typeface="Calibri"/>
-              </a:rPr>
-              <a:t>  </a:t>
-            </a:r>
-            <a:r>
-              <a:rPr lang="en-US" sz="2000" b="1" i="0" u="none" strike="noStrike" cap="none">
-                <a:solidFill>
-                  <a:srgbClr val="666677"/>
-                </a:solidFill>
-                <a:latin typeface="Calibri"/>
-                <a:ea typeface="Calibri"/>
-                <a:cs typeface="Calibri"/>
-                <a:sym typeface="Calibri"/>
-              </a:rPr>
-              <a:t>1.</a:t>
-            </a:r>
-            <a:r>
-              <a:rPr lang="en-US" sz="2000" b="0" i="0" u="none" strike="noStrike" cap="none">
-                <a:solidFill>
-                  <a:srgbClr val="666677"/>
-                </a:solidFill>
-                <a:latin typeface="Calibri"/>
-                <a:ea typeface="Calibri"/>
-                <a:cs typeface="Calibri"/>
-                <a:sym typeface="Calibri"/>
-              </a:rPr>
-              <a:t> Read the current balance</a:t>
-            </a:r>
-            <a:endParaRPr/>
-          </a:p>
-          <a:p>
-            <a:pPr marL="457200" marR="0" lvl="1" indent="0" algn="l" rtl="0">
-              <a:spcBef>
-                <a:spcPts val="600"/>
-              </a:spcBef>
-              <a:spcAft>
-                <a:spcPts val="0"/>
-              </a:spcAft>
-              <a:buNone/>
-            </a:pPr>
-            <a:r>
-              <a:rPr lang="en-US" sz="2000" b="0" i="0" u="none" strike="noStrike" cap="none">
-                <a:solidFill>
-                  <a:srgbClr val="666677"/>
-                </a:solidFill>
-                <a:latin typeface="Calibri"/>
-                <a:ea typeface="Calibri"/>
-                <a:cs typeface="Calibri"/>
-                <a:sym typeface="Calibri"/>
-              </a:rPr>
-              <a:t>  </a:t>
-            </a:r>
-            <a:r>
-              <a:rPr lang="en-US" sz="2000" b="1" i="0" u="none" strike="noStrike" cap="none">
-                <a:solidFill>
-                  <a:srgbClr val="666677"/>
-                </a:solidFill>
-                <a:latin typeface="Calibri"/>
-                <a:ea typeface="Calibri"/>
-                <a:cs typeface="Calibri"/>
-                <a:sym typeface="Calibri"/>
-              </a:rPr>
-              <a:t>2.</a:t>
-            </a:r>
-            <a:r>
-              <a:rPr lang="en-US" sz="2000" b="0" i="0" u="none" strike="noStrike" cap="none">
-                <a:solidFill>
-                  <a:srgbClr val="666677"/>
-                </a:solidFill>
-                <a:latin typeface="Calibri"/>
-                <a:ea typeface="Calibri"/>
-                <a:cs typeface="Calibri"/>
-                <a:sym typeface="Calibri"/>
-              </a:rPr>
-              <a:t> Subtract $10</a:t>
-            </a:r>
-            <a:endParaRPr/>
-          </a:p>
-          <a:p>
-            <a:pPr marL="457200" marR="0" lvl="1" indent="0" algn="l" rtl="0">
-              <a:spcBef>
-                <a:spcPts val="600"/>
-              </a:spcBef>
-              <a:spcAft>
-                <a:spcPts val="0"/>
-              </a:spcAft>
-              <a:buNone/>
-            </a:pPr>
-            <a:r>
-              <a:rPr lang="en-US" sz="2000" b="0" i="0" u="none" strike="noStrike" cap="none">
-                <a:solidFill>
-                  <a:srgbClr val="666677"/>
-                </a:solidFill>
-                <a:latin typeface="Calibri"/>
-                <a:ea typeface="Calibri"/>
-                <a:cs typeface="Calibri"/>
-                <a:sym typeface="Calibri"/>
-              </a:rPr>
-              <a:t>  </a:t>
-            </a:r>
-            <a:r>
-              <a:rPr lang="en-US" sz="2000" b="1" i="0" u="none" strike="noStrike" cap="none">
-                <a:solidFill>
-                  <a:srgbClr val="666677"/>
-                </a:solidFill>
-                <a:latin typeface="Calibri"/>
-                <a:ea typeface="Calibri"/>
-                <a:cs typeface="Calibri"/>
-                <a:sym typeface="Calibri"/>
-              </a:rPr>
-              <a:t>3.</a:t>
-            </a:r>
-            <a:r>
-              <a:rPr lang="en-US" sz="2000" b="0" i="0" u="none" strike="noStrike" cap="none">
-                <a:solidFill>
-                  <a:srgbClr val="666677"/>
-                </a:solidFill>
-                <a:latin typeface="Calibri"/>
-                <a:ea typeface="Calibri"/>
-                <a:cs typeface="Calibri"/>
-                <a:sym typeface="Calibri"/>
-              </a:rPr>
-              <a:t> Write the new balance back</a:t>
-            </a:r>
-            <a:endParaRPr/>
-          </a:p>
-          <a:p>
-            <a:pPr marL="0" marR="0" lvl="0" indent="0" algn="l" rtl="0">
-              <a:spcBef>
-                <a:spcPts val="600"/>
-              </a:spcBef>
-              <a:spcAft>
-                <a:spcPts val="0"/>
-              </a:spcAft>
-              <a:buNone/>
-            </a:pPr>
-            <a:endParaRPr sz="2000" b="0" i="0" u="none" strike="noStrike" cap="none">
-              <a:solidFill>
-                <a:srgbClr val="666677"/>
-              </a:solidFill>
-              <a:latin typeface="Calibri"/>
-              <a:ea typeface="Calibri"/>
-              <a:cs typeface="Calibri"/>
-              <a:sym typeface="Calibri"/>
-            </a:endParaRPr>
-          </a:p>
-          <a:p>
-            <a:pPr marL="0" marR="0" lvl="0" indent="0" algn="l" rtl="0">
-              <a:spcBef>
-                <a:spcPts val="600"/>
-              </a:spcBef>
-              <a:spcAft>
-                <a:spcPts val="0"/>
-              </a:spcAft>
-              <a:buNone/>
-            </a:pPr>
-            <a:r>
-              <a:rPr lang="en-US" sz="2400" b="0" i="0" u="none" strike="noStrike" cap="none">
-                <a:solidFill>
-                  <a:srgbClr val="333344"/>
-                </a:solidFill>
-                <a:latin typeface="Calibri"/>
-                <a:ea typeface="Calibri"/>
-                <a:cs typeface="Calibri"/>
-                <a:sym typeface="Calibri"/>
-              </a:rPr>
-              <a:t>Each one alone is correct: 100 - 10 = 90. Run the two at the same time.</a:t>
-            </a:r>
-            <a:endParaRPr/>
-          </a:p>
-          <a:p>
-            <a:pPr marL="457200" marR="0" lvl="1" indent="0" algn="l" rtl="0">
-              <a:spcBef>
-                <a:spcPts val="600"/>
-              </a:spcBef>
-              <a:spcAft>
-                <a:spcPts val="0"/>
-              </a:spcAft>
-              <a:buNone/>
-            </a:pPr>
-            <a:r>
-              <a:rPr lang="en-US" sz="2000" b="0" i="0" u="none" strike="noStrike" cap="none">
-                <a:solidFill>
-                  <a:srgbClr val="666677"/>
-                </a:solidFill>
-                <a:latin typeface="Calibri"/>
-                <a:ea typeface="Calibri"/>
-                <a:cs typeface="Calibri"/>
-                <a:sym typeface="Calibri"/>
-              </a:rPr>
-              <a:t>  </a:t>
-            </a:r>
-            <a:r>
-              <a:rPr lang="en-US" sz="2000">
-                <a:solidFill>
-                  <a:srgbClr val="666677"/>
-                </a:solidFill>
-                <a:latin typeface="Calibri"/>
-                <a:ea typeface="Calibri"/>
-                <a:cs typeface="Calibri"/>
-                <a:sym typeface="Calibri"/>
-              </a:rPr>
-              <a:t>T</a:t>
-            </a:r>
-            <a:r>
-              <a:rPr lang="en-US" sz="2000" b="0" i="0" u="none" strike="noStrike" cap="none">
-                <a:solidFill>
-                  <a:srgbClr val="666677"/>
-                </a:solidFill>
-                <a:latin typeface="Calibri"/>
-                <a:ea typeface="Calibri"/>
-                <a:cs typeface="Calibri"/>
-                <a:sym typeface="Calibri"/>
-              </a:rPr>
-              <a:t>he account lands at $90, not $80, and a whole withdrawal vanished.</a:t>
-            </a:r>
-            <a:endParaRPr/>
-          </a:p>
-        </p:txBody>
-      </p:sp>
-    </p:spTree>
-  </p:cSld>
-  <p:clrMapOvr>
-    <a:masterClrMapping/>
-  </p:clrMapOvr>
-</p:sld>
-</file>
-
-<file path=ppt/slides/slide8.xml><?xml version="1.0" encoding="utf-8"?>
-<p:sld xmlns:a="http://schemas.openxmlformats.org/drawingml/2006/main" xmlns:r="http://schemas.openxmlformats.org/officeDocument/2006/relationships" xmlns:p="http://schemas.openxmlformats.org/presentationml/2006/main">
-  <p:cSld>
-    <p:bg>
-      <p:bgPr>
-        <a:solidFill>
-          <a:srgbClr val="FFFFFF"/>
-        </a:solidFill>
-        <a:effectLst/>
-      </p:bgPr>
-    </p:bg>
-    <p:spTree>
-      <p:nvGrpSpPr>
-        <p:cNvPr id="1" name="Shape 138"/>
-        <p:cNvGrpSpPr/>
-        <p:nvPr/>
-      </p:nvGrpSpPr>
-      <p:grpSpPr>
-        <a:xfrm>
-          <a:off x="0" y="0"/>
-          <a:ext cx="0" cy="0"/>
-          <a:chOff x="0" y="0"/>
-          <a:chExt cx="0" cy="0"/>
-        </a:xfrm>
-      </p:grpSpPr>
-      <p:sp>
-        <p:nvSpPr>
-          <p:cNvPr id="139" name="Google Shape;139;g3e498caeefa_0_157"/>
-          <p:cNvSpPr txBox="1"/>
-          <p:nvPr/>
-        </p:nvSpPr>
-        <p:spPr>
-          <a:xfrm>
-            <a:off x="731520" y="365760"/>
-            <a:ext cx="10728600" cy="646500"/>
-          </a:xfrm>
-          <a:prstGeom prst="rect">
-            <a:avLst/>
-          </a:prstGeom>
-          <a:noFill/>
-          <a:ln>
-            <a:noFill/>
-          </a:ln>
-        </p:spPr>
-        <p:txBody>
-          <a:bodyPr spcFirstLastPara="1" wrap="square" lIns="91425" tIns="45700" rIns="91425" bIns="45700" anchor="t" anchorCtr="0">
-            <a:spAutoFit/>
-          </a:bodyPr>
-          <a:lstStyle/>
-          <a:p>
-            <a:pPr marL="0" marR="0" lvl="0" indent="0" algn="l" rtl="0">
-              <a:spcBef>
-                <a:spcPts val="0"/>
-              </a:spcBef>
-              <a:spcAft>
-                <a:spcPts val="0"/>
-              </a:spcAft>
-              <a:buNone/>
-            </a:pPr>
-            <a:r>
-              <a:rPr lang="en-US" sz="3600" b="1" i="0" u="none" strike="noStrike" cap="none">
-                <a:solidFill>
-                  <a:srgbClr val="1A1A2E"/>
-                </a:solidFill>
-                <a:latin typeface="Calibri"/>
-                <a:ea typeface="Calibri"/>
-                <a:cs typeface="Calibri"/>
-                <a:sym typeface="Calibri"/>
-              </a:rPr>
-              <a:t>Two people withdraw $10 at the same time</a:t>
-            </a:r>
-            <a:endParaRPr/>
-          </a:p>
-        </p:txBody>
-      </p:sp>
-      <p:sp>
-        <p:nvSpPr>
-          <p:cNvPr id="140" name="Google Shape;140;g3e498caeefa_0_157"/>
-          <p:cNvSpPr txBox="1"/>
-          <p:nvPr/>
-        </p:nvSpPr>
-        <p:spPr>
-          <a:xfrm>
-            <a:off x="914400" y="1463040"/>
-            <a:ext cx="10362900" cy="4894800"/>
-          </a:xfrm>
-          <a:prstGeom prst="rect">
-            <a:avLst/>
-          </a:prstGeom>
-          <a:noFill/>
-          <a:ln>
-            <a:noFill/>
-          </a:ln>
-        </p:spPr>
-        <p:txBody>
-          <a:bodyPr spcFirstLastPara="1" wrap="square" lIns="91425" tIns="45700" rIns="91425" bIns="45700" anchor="t" anchorCtr="0">
-            <a:spAutoFit/>
-          </a:bodyPr>
-          <a:lstStyle/>
-          <a:p>
-            <a:pPr marL="0" marR="0" lvl="1" indent="0" algn="l" rtl="0">
-              <a:spcBef>
-                <a:spcPts val="600"/>
-              </a:spcBef>
-              <a:spcAft>
-                <a:spcPts val="0"/>
-              </a:spcAft>
-              <a:buNone/>
-            </a:pPr>
-            <a:r>
-              <a:rPr lang="en-US" sz="2400">
-                <a:solidFill>
-                  <a:srgbClr val="333344"/>
-                </a:solidFill>
-                <a:latin typeface="Calibri"/>
-                <a:ea typeface="Calibri"/>
-                <a:cs typeface="Calibri"/>
-                <a:sym typeface="Calibri"/>
-              </a:rPr>
-              <a:t>A bank account, one row in your database:</a:t>
-            </a:r>
-            <a:endParaRPr sz="2000" b="0" i="0" u="none" strike="noStrike" cap="none">
-              <a:solidFill>
-                <a:srgbClr val="666677"/>
-              </a:solidFill>
-              <a:latin typeface="Calibri"/>
-              <a:ea typeface="Calibri"/>
-              <a:cs typeface="Calibri"/>
-              <a:sym typeface="Calibri"/>
-            </a:endParaRPr>
-          </a:p>
-          <a:p>
-            <a:pPr marL="457200" marR="0" lvl="1" indent="0" algn="l" rtl="0">
-              <a:spcBef>
-                <a:spcPts val="600"/>
-              </a:spcBef>
-              <a:spcAft>
-                <a:spcPts val="0"/>
-              </a:spcAft>
-              <a:buNone/>
-            </a:pPr>
-            <a:r>
-              <a:rPr lang="en-US" sz="2000" b="0" i="0" u="none" strike="noStrike" cap="none">
-                <a:solidFill>
-                  <a:srgbClr val="666677"/>
-                </a:solidFill>
-                <a:latin typeface="Calibri"/>
-                <a:ea typeface="Calibri"/>
-                <a:cs typeface="Calibri"/>
-                <a:sym typeface="Calibri"/>
-              </a:rPr>
-              <a:t>  </a:t>
-            </a:r>
-            <a:r>
-              <a:rPr lang="en-US" sz="2000" b="1" i="0" u="none" strike="noStrike" cap="none">
-                <a:solidFill>
-                  <a:srgbClr val="666677"/>
-                </a:solidFill>
-                <a:latin typeface="Courier Prime"/>
-                <a:ea typeface="Courier Prime"/>
-                <a:cs typeface="Courier Prime"/>
-                <a:sym typeface="Courier Prime"/>
-              </a:rPr>
-              <a:t>`accounts`: { id: 42, balance: 100 }</a:t>
-            </a:r>
-            <a:endParaRPr b="1">
-              <a:latin typeface="Courier Prime"/>
-              <a:ea typeface="Courier Prime"/>
-              <a:cs typeface="Courier Prime"/>
-              <a:sym typeface="Courier Prime"/>
-            </a:endParaRPr>
-          </a:p>
-          <a:p>
-            <a:pPr marL="0" marR="0" lvl="0" indent="0" algn="l" rtl="0">
-              <a:spcBef>
-                <a:spcPts val="600"/>
-              </a:spcBef>
-              <a:spcAft>
-                <a:spcPts val="0"/>
-              </a:spcAft>
-              <a:buNone/>
-            </a:pPr>
-            <a:endParaRPr sz="2000" b="0" i="0" u="none" strike="noStrike" cap="none">
-              <a:solidFill>
-                <a:srgbClr val="666677"/>
-              </a:solidFill>
-              <a:latin typeface="Calibri"/>
-              <a:ea typeface="Calibri"/>
-              <a:cs typeface="Calibri"/>
-              <a:sym typeface="Calibri"/>
-            </a:endParaRPr>
-          </a:p>
-          <a:p>
-            <a:pPr marL="0" marR="0" lvl="0" indent="0" algn="l" rtl="0">
-              <a:spcBef>
-                <a:spcPts val="600"/>
-              </a:spcBef>
-              <a:spcAft>
-                <a:spcPts val="0"/>
-              </a:spcAft>
-              <a:buNone/>
-            </a:pPr>
-            <a:r>
-              <a:rPr lang="en-US" sz="2400" b="0" i="0" u="none" strike="noStrike" cap="none">
-                <a:solidFill>
-                  <a:srgbClr val="333344"/>
-                </a:solidFill>
-                <a:latin typeface="Calibri"/>
-                <a:ea typeface="Calibri"/>
-                <a:cs typeface="Calibri"/>
-                <a:sym typeface="Calibri"/>
-              </a:rPr>
-              <a:t>Two withdraw - $10 requests land at the same millisecond. Each handler does:</a:t>
-            </a:r>
-            <a:endParaRPr/>
-          </a:p>
-          <a:p>
-            <a:pPr marL="457200" marR="0" lvl="1" indent="0" algn="l" rtl="0">
-              <a:spcBef>
-                <a:spcPts val="600"/>
-              </a:spcBef>
-              <a:spcAft>
-                <a:spcPts val="0"/>
-              </a:spcAft>
-              <a:buNone/>
-            </a:pPr>
-            <a:r>
-              <a:rPr lang="en-US" sz="2000" b="0" i="0" u="none" strike="noStrike" cap="none">
-                <a:solidFill>
-                  <a:srgbClr val="666677"/>
-                </a:solidFill>
-                <a:latin typeface="Calibri"/>
-                <a:ea typeface="Calibri"/>
-                <a:cs typeface="Calibri"/>
-                <a:sym typeface="Calibri"/>
-              </a:rPr>
-              <a:t>  </a:t>
-            </a:r>
-            <a:r>
-              <a:rPr lang="en-US" sz="2000" b="1" i="0" u="none" strike="noStrike" cap="none">
-                <a:solidFill>
-                  <a:srgbClr val="666677"/>
-                </a:solidFill>
-                <a:latin typeface="Calibri"/>
-                <a:ea typeface="Calibri"/>
-                <a:cs typeface="Calibri"/>
-                <a:sym typeface="Calibri"/>
-              </a:rPr>
-              <a:t>1.</a:t>
-            </a:r>
-            <a:r>
-              <a:rPr lang="en-US" sz="2000" b="0" i="0" u="none" strike="noStrike" cap="none">
-                <a:solidFill>
-                  <a:srgbClr val="666677"/>
-                </a:solidFill>
-                <a:latin typeface="Calibri"/>
-                <a:ea typeface="Calibri"/>
-                <a:cs typeface="Calibri"/>
-                <a:sym typeface="Calibri"/>
-              </a:rPr>
-              <a:t> Read the current balance</a:t>
-            </a:r>
-            <a:endParaRPr/>
-          </a:p>
-          <a:p>
-            <a:pPr marL="457200" marR="0" lvl="1" indent="0" algn="l" rtl="0">
-              <a:spcBef>
-                <a:spcPts val="600"/>
-              </a:spcBef>
-              <a:spcAft>
-                <a:spcPts val="0"/>
-              </a:spcAft>
-              <a:buNone/>
-            </a:pPr>
-            <a:r>
-              <a:rPr lang="en-US" sz="2000" b="0" i="0" u="none" strike="noStrike" cap="none">
-                <a:solidFill>
-                  <a:srgbClr val="666677"/>
-                </a:solidFill>
-                <a:latin typeface="Calibri"/>
-                <a:ea typeface="Calibri"/>
-                <a:cs typeface="Calibri"/>
-                <a:sym typeface="Calibri"/>
-              </a:rPr>
-              <a:t>  </a:t>
-            </a:r>
-            <a:r>
-              <a:rPr lang="en-US" sz="2000" b="1" i="0" u="none" strike="noStrike" cap="none">
-                <a:solidFill>
-                  <a:srgbClr val="666677"/>
-                </a:solidFill>
-                <a:latin typeface="Calibri"/>
-                <a:ea typeface="Calibri"/>
-                <a:cs typeface="Calibri"/>
-                <a:sym typeface="Calibri"/>
-              </a:rPr>
-              <a:t>2.</a:t>
-            </a:r>
-            <a:r>
-              <a:rPr lang="en-US" sz="2000" b="0" i="0" u="none" strike="noStrike" cap="none">
-                <a:solidFill>
-                  <a:srgbClr val="666677"/>
-                </a:solidFill>
-                <a:latin typeface="Calibri"/>
-                <a:ea typeface="Calibri"/>
-                <a:cs typeface="Calibri"/>
-                <a:sym typeface="Calibri"/>
-              </a:rPr>
-              <a:t> Subtract $10</a:t>
-            </a:r>
-            <a:endParaRPr/>
-          </a:p>
-          <a:p>
-            <a:pPr marL="457200" marR="0" lvl="1" indent="0" algn="l" rtl="0">
-              <a:spcBef>
-                <a:spcPts val="600"/>
-              </a:spcBef>
-              <a:spcAft>
-                <a:spcPts val="0"/>
-              </a:spcAft>
-              <a:buNone/>
-            </a:pPr>
-            <a:r>
-              <a:rPr lang="en-US" sz="2000" b="0" i="0" u="none" strike="noStrike" cap="none">
-                <a:solidFill>
-                  <a:srgbClr val="666677"/>
-                </a:solidFill>
-                <a:latin typeface="Calibri"/>
-                <a:ea typeface="Calibri"/>
-                <a:cs typeface="Calibri"/>
-                <a:sym typeface="Calibri"/>
-              </a:rPr>
-              <a:t>  </a:t>
-            </a:r>
-            <a:r>
-              <a:rPr lang="en-US" sz="2000" b="1" i="0" u="none" strike="noStrike" cap="none">
-                <a:solidFill>
-                  <a:srgbClr val="666677"/>
-                </a:solidFill>
-                <a:latin typeface="Calibri"/>
-                <a:ea typeface="Calibri"/>
-                <a:cs typeface="Calibri"/>
-                <a:sym typeface="Calibri"/>
-              </a:rPr>
-              <a:t>3.</a:t>
-            </a:r>
-            <a:r>
-              <a:rPr lang="en-US" sz="2000" b="0" i="0" u="none" strike="noStrike" cap="none">
-                <a:solidFill>
-                  <a:srgbClr val="666677"/>
-                </a:solidFill>
-                <a:latin typeface="Calibri"/>
-                <a:ea typeface="Calibri"/>
-                <a:cs typeface="Calibri"/>
-                <a:sym typeface="Calibri"/>
-              </a:rPr>
-              <a:t> Write the new balance back</a:t>
-            </a:r>
-            <a:endParaRPr/>
-          </a:p>
-          <a:p>
-            <a:pPr marL="0" marR="0" lvl="0" indent="0" algn="l" rtl="0">
-              <a:spcBef>
-                <a:spcPts val="600"/>
-              </a:spcBef>
-              <a:spcAft>
-                <a:spcPts val="0"/>
-              </a:spcAft>
-              <a:buNone/>
-            </a:pPr>
-            <a:endParaRPr sz="2000" b="0" i="0" u="none" strike="noStrike" cap="none">
-              <a:solidFill>
-                <a:srgbClr val="666677"/>
-              </a:solidFill>
-              <a:latin typeface="Calibri"/>
-              <a:ea typeface="Calibri"/>
-              <a:cs typeface="Calibri"/>
-              <a:sym typeface="Calibri"/>
-            </a:endParaRPr>
-          </a:p>
-          <a:p>
-            <a:pPr marL="0" marR="0" lvl="0" indent="0" algn="l" rtl="0">
-              <a:spcBef>
-                <a:spcPts val="600"/>
-              </a:spcBef>
-              <a:spcAft>
-                <a:spcPts val="0"/>
-              </a:spcAft>
-              <a:buNone/>
-            </a:pPr>
-            <a:r>
-              <a:rPr lang="en-US" sz="2400" b="0" i="0" u="none" strike="noStrike" cap="none">
-                <a:solidFill>
-                  <a:srgbClr val="333344"/>
-                </a:solidFill>
-                <a:latin typeface="Calibri"/>
-                <a:ea typeface="Calibri"/>
-                <a:cs typeface="Calibri"/>
-                <a:sym typeface="Calibri"/>
-              </a:rPr>
-              <a:t>Each one alone is correct: 100 - 10 = 90. Run the two at the same time.</a:t>
-            </a:r>
-            <a:endParaRPr/>
-          </a:p>
-          <a:p>
-            <a:pPr marL="457200" marR="0" lvl="1" indent="0" algn="l" rtl="0">
-              <a:spcBef>
-                <a:spcPts val="600"/>
-              </a:spcBef>
-              <a:spcAft>
-                <a:spcPts val="0"/>
-              </a:spcAft>
-              <a:buNone/>
-            </a:pPr>
-            <a:r>
-              <a:rPr lang="en-US" sz="2000" b="0" i="0" u="none" strike="noStrike" cap="none">
-                <a:solidFill>
-                  <a:srgbClr val="666677"/>
-                </a:solidFill>
-                <a:latin typeface="Calibri"/>
-                <a:ea typeface="Calibri"/>
-                <a:cs typeface="Calibri"/>
-                <a:sym typeface="Calibri"/>
-              </a:rPr>
-              <a:t>  </a:t>
-            </a:r>
-            <a:r>
-              <a:rPr lang="en-US" sz="2000">
-                <a:solidFill>
-                  <a:srgbClr val="666677"/>
-                </a:solidFill>
-                <a:latin typeface="Calibri"/>
-                <a:ea typeface="Calibri"/>
-                <a:cs typeface="Calibri"/>
-                <a:sym typeface="Calibri"/>
-              </a:rPr>
-              <a:t>T</a:t>
-            </a:r>
-            <a:r>
-              <a:rPr lang="en-US" sz="2000" b="0" i="0" u="none" strike="noStrike" cap="none">
-                <a:solidFill>
-                  <a:srgbClr val="666677"/>
-                </a:solidFill>
-                <a:latin typeface="Calibri"/>
-                <a:ea typeface="Calibri"/>
-                <a:cs typeface="Calibri"/>
-                <a:sym typeface="Calibri"/>
-              </a:rPr>
-              <a:t>he account lands at $90, not $80, and a whole withdrawal vanished.</a:t>
-            </a:r>
-            <a:endParaRPr sz="2000" b="0" i="0" u="none" strike="noStrike" cap="none">
-              <a:solidFill>
-                <a:srgbClr val="666677"/>
-              </a:solidFill>
-              <a:latin typeface="Calibri"/>
-              <a:ea typeface="Calibri"/>
-              <a:cs typeface="Calibri"/>
-              <a:sym typeface="Calibri"/>
-            </a:endParaRPr>
-          </a:p>
-          <a:p>
-            <a:pPr marL="0" marR="0" lvl="1" indent="0" algn="ctr" rtl="0">
-              <a:spcBef>
-                <a:spcPts val="600"/>
-              </a:spcBef>
-              <a:spcAft>
-                <a:spcPts val="0"/>
-              </a:spcAft>
-              <a:buNone/>
-            </a:pPr>
-            <a:r>
-              <a:rPr lang="en-US" sz="5000" b="1">
-                <a:solidFill>
-                  <a:srgbClr val="FF0000"/>
-                </a:solidFill>
-                <a:latin typeface="Calibri"/>
-                <a:ea typeface="Calibri"/>
-                <a:cs typeface="Calibri"/>
-                <a:sym typeface="Calibri"/>
-              </a:rPr>
-              <a:t>MAYBE</a:t>
-            </a:r>
-            <a:endParaRPr sz="5000" b="1">
-              <a:solidFill>
-                <a:srgbClr val="FF0000"/>
-              </a:solidFill>
-              <a:latin typeface="Calibri"/>
-              <a:ea typeface="Calibri"/>
-              <a:cs typeface="Calibri"/>
-              <a:sym typeface="Calibri"/>
-            </a:endParaRPr>
-          </a:p>
-        </p:txBody>
-      </p:sp>
-    </p:spTree>
-  </p:cSld>
-  <p:clrMapOvr>
-    <a:masterClrMapping/>
-  </p:clrMapOvr>
-</p:sld>
-</file>
-
-<file path=ppt/slides/slide9.xml><?xml version="1.0" encoding="utf-8"?>
-<p:sld xmlns:a="http://schemas.openxmlformats.org/drawingml/2006/main" xmlns:r="http://schemas.openxmlformats.org/officeDocument/2006/relationships" xmlns:p="http://schemas.openxmlformats.org/presentationml/2006/main">
-  <p:cSld>
-    <p:bg>
-      <p:bgPr>
-        <a:solidFill>
-          <a:srgbClr val="FFFFFF"/>
-        </a:solidFill>
-        <a:effectLst/>
-      </p:bgPr>
-    </p:bg>
-    <p:spTree>
-      <p:nvGrpSpPr>
         <p:cNvPr id="1" name="Shape 145"/>
         <p:cNvGrpSpPr/>
         <p:nvPr/>
@@ -43271,6 +40983,1200 @@
               </a:spcAft>
               <a:buNone/>
             </a:pPr>
+            <a:endParaRPr/>
+          </a:p>
+          <a:p>
+            <a:pPr marL="0" marR="0" lvl="0" indent="0" algn="l" rtl="0">
+              <a:spcBef>
+                <a:spcPts val="200"/>
+              </a:spcBef>
+              <a:spcAft>
+                <a:spcPts val="0"/>
+              </a:spcAft>
+              <a:buNone/>
+            </a:pPr>
+            <a:endParaRPr/>
+          </a:p>
+        </p:txBody>
+      </p:sp>
+    </p:spTree>
+  </p:cSld>
+  <p:clrMapOvr>
+    <a:masterClrMapping/>
+  </p:clrMapOvr>
+</p:sld>
+</file>
+
+<file path=ppt/slides/slide7.xml><?xml version="1.0" encoding="utf-8"?>
+<p:sld xmlns:a="http://schemas.openxmlformats.org/drawingml/2006/main" xmlns:r="http://schemas.openxmlformats.org/officeDocument/2006/relationships" xmlns:p="http://schemas.openxmlformats.org/presentationml/2006/main">
+  <p:cSld>
+    <p:bg>
+      <p:bgPr>
+        <a:solidFill>
+          <a:srgbClr val="FFFFFF"/>
+        </a:solidFill>
+        <a:effectLst/>
+      </p:bgPr>
+    </p:bg>
+    <p:spTree>
+      <p:nvGrpSpPr>
+        <p:cNvPr id="1" name="Shape 154"/>
+        <p:cNvGrpSpPr/>
+        <p:nvPr/>
+      </p:nvGrpSpPr>
+      <p:grpSpPr>
+        <a:xfrm>
+          <a:off x="0" y="0"/>
+          <a:ext cx="0" cy="0"/>
+          <a:chOff x="0" y="0"/>
+          <a:chExt cx="0" cy="0"/>
+        </a:xfrm>
+      </p:grpSpPr>
+      <p:sp>
+        <p:nvSpPr>
+          <p:cNvPr id="155" name="Google Shape;155;g3e498caeefa_0_24"/>
+          <p:cNvSpPr txBox="1"/>
+          <p:nvPr/>
+        </p:nvSpPr>
+        <p:spPr>
+          <a:xfrm>
+            <a:off x="731520" y="365760"/>
+            <a:ext cx="10728600" cy="585000"/>
+          </a:xfrm>
+          <a:prstGeom prst="rect">
+            <a:avLst/>
+          </a:prstGeom>
+          <a:noFill/>
+          <a:ln>
+            <a:noFill/>
+          </a:ln>
+        </p:spPr>
+        <p:txBody>
+          <a:bodyPr spcFirstLastPara="1" wrap="square" lIns="91425" tIns="45700" rIns="91425" bIns="45700" anchor="t" anchorCtr="0">
+            <a:spAutoFit/>
+          </a:bodyPr>
+          <a:lstStyle/>
+          <a:p>
+            <a:pPr marL="0" marR="0" lvl="0" indent="0" algn="l" rtl="0">
+              <a:spcBef>
+                <a:spcPts val="0"/>
+              </a:spcBef>
+              <a:spcAft>
+                <a:spcPts val="0"/>
+              </a:spcAft>
+              <a:buNone/>
+            </a:pPr>
+            <a:r>
+              <a:rPr lang="en-US" sz="3200" b="1" i="0" u="none" strike="noStrike" cap="none">
+                <a:solidFill>
+                  <a:srgbClr val="1A1A2E"/>
+                </a:solidFill>
+                <a:latin typeface="Calibri"/>
+                <a:ea typeface="Calibri"/>
+                <a:cs typeface="Calibri"/>
+                <a:sym typeface="Calibri"/>
+              </a:rPr>
+              <a:t>The timeline of the race</a:t>
+            </a:r>
+            <a:endParaRPr/>
+          </a:p>
+        </p:txBody>
+      </p:sp>
+      <p:sp>
+        <p:nvSpPr>
+          <p:cNvPr id="156" name="Google Shape;156;g3e498caeefa_0_24"/>
+          <p:cNvSpPr txBox="1"/>
+          <p:nvPr/>
+        </p:nvSpPr>
+        <p:spPr>
+          <a:xfrm>
+            <a:off x="9601200" y="1188720"/>
+            <a:ext cx="1828800" cy="307800"/>
+          </a:xfrm>
+          <a:prstGeom prst="rect">
+            <a:avLst/>
+          </a:prstGeom>
+          <a:noFill/>
+          <a:ln>
+            <a:noFill/>
+          </a:ln>
+        </p:spPr>
+        <p:txBody>
+          <a:bodyPr spcFirstLastPara="1" wrap="square" lIns="91425" tIns="45700" rIns="91425" bIns="45700" anchor="t" anchorCtr="0">
+            <a:spAutoFit/>
+          </a:bodyPr>
+          <a:lstStyle/>
+          <a:p>
+            <a:pPr marL="0" marR="0" lvl="0" indent="0" algn="r" rtl="0">
+              <a:spcBef>
+                <a:spcPts val="0"/>
+              </a:spcBef>
+              <a:spcAft>
+                <a:spcPts val="0"/>
+              </a:spcAft>
+              <a:buNone/>
+            </a:pPr>
+            <a:r>
+              <a:rPr lang="en-US" sz="1400" b="0" i="0" u="none" strike="noStrike" cap="none">
+                <a:solidFill>
+                  <a:srgbClr val="5B21B6"/>
+                </a:solidFill>
+                <a:latin typeface="Courier New"/>
+                <a:ea typeface="Courier New"/>
+                <a:cs typeface="Courier New"/>
+                <a:sym typeface="Courier New"/>
+              </a:rPr>
+              <a:t>race timeline</a:t>
+            </a:r>
+            <a:endParaRPr/>
+          </a:p>
+        </p:txBody>
+      </p:sp>
+      <p:sp>
+        <p:nvSpPr>
+          <p:cNvPr id="157" name="Google Shape;157;g3e498caeefa_0_24"/>
+          <p:cNvSpPr/>
+          <p:nvPr/>
+        </p:nvSpPr>
+        <p:spPr>
+          <a:xfrm>
+            <a:off x="731520" y="1463040"/>
+            <a:ext cx="10728600" cy="4937700"/>
+          </a:xfrm>
+          <a:prstGeom prst="roundRect">
+            <a:avLst>
+              <a:gd name="adj" fmla="val 16667"/>
+            </a:avLst>
+          </a:prstGeom>
+          <a:solidFill>
+            <a:srgbClr val="F0F0F4"/>
+          </a:solidFill>
+          <a:ln w="12700" cap="flat" cmpd="sng">
+            <a:solidFill>
+              <a:srgbClr val="EEEEF0"/>
+            </a:solidFill>
+            <a:prstDash val="solid"/>
+            <a:round/>
+            <a:headEnd type="none" w="sm" len="sm"/>
+            <a:tailEnd type="none" w="sm" len="sm"/>
+          </a:ln>
+          <a:effectLst>
+            <a:outerShdw blurRad="40000" dist="23000" dir="5400000" rotWithShape="0">
+              <a:srgbClr val="000000">
+                <a:alpha val="34900"/>
+              </a:srgbClr>
+            </a:outerShdw>
+          </a:effectLst>
+        </p:spPr>
+        <p:txBody>
+          <a:bodyPr spcFirstLastPara="1" wrap="square" lIns="91425" tIns="45700" rIns="91425" bIns="45700" anchor="ctr" anchorCtr="0">
+            <a:noAutofit/>
+          </a:bodyPr>
+          <a:lstStyle/>
+          <a:p>
+            <a:pPr marL="0" marR="0" lvl="0" indent="0" algn="ctr" rtl="0">
+              <a:spcBef>
+                <a:spcPts val="0"/>
+              </a:spcBef>
+              <a:spcAft>
+                <a:spcPts val="0"/>
+              </a:spcAft>
+              <a:buNone/>
+            </a:pPr>
+            <a:endParaRPr sz="1800" b="0" i="0" u="none" strike="noStrike" cap="none">
+              <a:solidFill>
+                <a:schemeClr val="dk1"/>
+              </a:solidFill>
+              <a:latin typeface="Calibri"/>
+              <a:ea typeface="Calibri"/>
+              <a:cs typeface="Calibri"/>
+              <a:sym typeface="Calibri"/>
+            </a:endParaRPr>
+          </a:p>
+        </p:txBody>
+      </p:sp>
+      <p:sp>
+        <p:nvSpPr>
+          <p:cNvPr id="158" name="Google Shape;158;g3e498caeefa_0_24"/>
+          <p:cNvSpPr txBox="1"/>
+          <p:nvPr/>
+        </p:nvSpPr>
+        <p:spPr>
+          <a:xfrm>
+            <a:off x="1005840" y="1645920"/>
+            <a:ext cx="10179900" cy="2124000"/>
+          </a:xfrm>
+          <a:prstGeom prst="rect">
+            <a:avLst/>
+          </a:prstGeom>
+          <a:noFill/>
+          <a:ln>
+            <a:noFill/>
+          </a:ln>
+        </p:spPr>
+        <p:txBody>
+          <a:bodyPr spcFirstLastPara="1" wrap="square" lIns="91425" tIns="45700" rIns="91425" bIns="45700" anchor="t" anchorCtr="0">
+            <a:spAutoFit/>
+          </a:bodyPr>
+          <a:lstStyle/>
+          <a:p>
+            <a:pPr marL="0" marR="0" lvl="0" indent="0" algn="l" rtl="0">
+              <a:spcBef>
+                <a:spcPts val="0"/>
+              </a:spcBef>
+              <a:spcAft>
+                <a:spcPts val="0"/>
+              </a:spcAft>
+              <a:buNone/>
+            </a:pPr>
+            <a:r>
+              <a:rPr lang="en-US" sz="1800" b="1" i="0" u="none" strike="noStrike" cap="none">
+                <a:solidFill>
+                  <a:srgbClr val="333344"/>
+                </a:solidFill>
+                <a:latin typeface="Courier New"/>
+                <a:ea typeface="Courier New"/>
+                <a:cs typeface="Courier New"/>
+                <a:sym typeface="Courier New"/>
+              </a:rPr>
+              <a:t>Starting balance: $100. Two withdraw-$10 requests, T1 and T2.</a:t>
+            </a:r>
+            <a:endParaRPr/>
+          </a:p>
+          <a:p>
+            <a:pPr marL="0" marR="0" lvl="0" indent="0" algn="l" rtl="0">
+              <a:spcBef>
+                <a:spcPts val="200"/>
+              </a:spcBef>
+              <a:spcAft>
+                <a:spcPts val="0"/>
+              </a:spcAft>
+              <a:buNone/>
+            </a:pPr>
+            <a:endParaRPr sz="1800" b="1" i="0" u="none" strike="noStrike" cap="none">
+              <a:solidFill>
+                <a:srgbClr val="333344"/>
+              </a:solidFill>
+              <a:latin typeface="Courier New"/>
+              <a:ea typeface="Courier New"/>
+              <a:cs typeface="Courier New"/>
+              <a:sym typeface="Courier New"/>
+            </a:endParaRPr>
+          </a:p>
+          <a:p>
+            <a:pPr marL="0" marR="0" lvl="0" indent="0" algn="l" rtl="0">
+              <a:spcBef>
+                <a:spcPts val="200"/>
+              </a:spcBef>
+              <a:spcAft>
+                <a:spcPts val="0"/>
+              </a:spcAft>
+              <a:buNone/>
+            </a:pPr>
+            <a:r>
+              <a:rPr lang="en-US" sz="1800" b="1" i="0" u="none" strike="noStrike" cap="none">
+                <a:solidFill>
+                  <a:srgbClr val="333344"/>
+                </a:solidFill>
+                <a:latin typeface="Courier New"/>
+                <a:ea typeface="Courier New"/>
+                <a:cs typeface="Courier New"/>
+                <a:sym typeface="Courier New"/>
+              </a:rPr>
+              <a:t>T1 T2 | DB state        | What happened</a:t>
+            </a:r>
+            <a:endParaRPr/>
+          </a:p>
+          <a:p>
+            <a:pPr marL="0" marR="0" lvl="0" indent="0" algn="l" rtl="0">
+              <a:spcBef>
+                <a:spcPts val="200"/>
+              </a:spcBef>
+              <a:spcAft>
+                <a:spcPts val="0"/>
+              </a:spcAft>
+              <a:buNone/>
+            </a:pPr>
+            <a:r>
+              <a:rPr lang="en-US" sz="1800" b="1" i="0" u="none" strike="noStrike" cap="none">
+                <a:solidFill>
+                  <a:srgbClr val="333344"/>
+                </a:solidFill>
+                <a:latin typeface="Courier New"/>
+                <a:ea typeface="Courier New"/>
+                <a:cs typeface="Courier New"/>
+                <a:sym typeface="Courier New"/>
+              </a:rPr>
+              <a:t>------+-----------------+-----------------------------------</a:t>
+            </a:r>
+            <a:endParaRPr/>
+          </a:p>
+          <a:p>
+            <a:pPr marL="0" marR="0" lvl="0" indent="0" algn="l" rtl="0">
+              <a:spcBef>
+                <a:spcPts val="200"/>
+              </a:spcBef>
+              <a:spcAft>
+                <a:spcPts val="0"/>
+              </a:spcAft>
+              <a:buNone/>
+            </a:pPr>
+            <a:r>
+              <a:rPr lang="en-US" sz="1800" b="1" i="0" u="none" strike="noStrike" cap="none">
+                <a:solidFill>
+                  <a:srgbClr val="333344"/>
+                </a:solidFill>
+                <a:latin typeface="Courier New"/>
+                <a:ea typeface="Courier New"/>
+                <a:cs typeface="Courier New"/>
+                <a:sym typeface="Courier New"/>
+              </a:rPr>
+              <a:t> &gt;    | balance = 100   | T1 reads balance -&gt; sees 100</a:t>
+            </a:r>
+            <a:endParaRPr/>
+          </a:p>
+          <a:p>
+            <a:pPr marL="0" marR="0" lvl="0" indent="0" algn="l" rtl="0">
+              <a:spcBef>
+                <a:spcPts val="200"/>
+              </a:spcBef>
+              <a:spcAft>
+                <a:spcPts val="0"/>
+              </a:spcAft>
+              <a:buNone/>
+            </a:pPr>
+            <a:r>
+              <a:rPr lang="en-US" sz="1800" b="1" i="0" u="none" strike="noStrike" cap="none">
+                <a:solidFill>
+                  <a:srgbClr val="333344"/>
+                </a:solidFill>
+                <a:latin typeface="Courier New"/>
+                <a:ea typeface="Courier New"/>
+                <a:cs typeface="Courier New"/>
+                <a:sym typeface="Courier New"/>
+              </a:rPr>
+              <a:t>    &gt; | balance = 100   | T2 reads balance -&gt; sees 100</a:t>
+            </a:r>
+            <a:endParaRPr/>
+          </a:p>
+          <a:p>
+            <a:pPr marL="0" marR="0" lvl="0" indent="0" algn="l" rtl="0">
+              <a:spcBef>
+                <a:spcPts val="200"/>
+              </a:spcBef>
+              <a:spcAft>
+                <a:spcPts val="0"/>
+              </a:spcAft>
+              <a:buNone/>
+            </a:pPr>
+            <a:endParaRPr/>
+          </a:p>
+        </p:txBody>
+      </p:sp>
+    </p:spTree>
+  </p:cSld>
+  <p:clrMapOvr>
+    <a:masterClrMapping/>
+  </p:clrMapOvr>
+</p:sld>
+</file>
+
+<file path=ppt/slides/slide8.xml><?xml version="1.0" encoding="utf-8"?>
+<p:sld xmlns:a="http://schemas.openxmlformats.org/drawingml/2006/main" xmlns:r="http://schemas.openxmlformats.org/officeDocument/2006/relationships" xmlns:p="http://schemas.openxmlformats.org/presentationml/2006/main">
+  <p:cSld>
+    <p:bg>
+      <p:bgPr>
+        <a:solidFill>
+          <a:srgbClr val="FFFFFF"/>
+        </a:solidFill>
+        <a:effectLst/>
+      </p:bgPr>
+    </p:bg>
+    <p:spTree>
+      <p:nvGrpSpPr>
+        <p:cNvPr id="1" name="Shape 163"/>
+        <p:cNvGrpSpPr/>
+        <p:nvPr/>
+      </p:nvGrpSpPr>
+      <p:grpSpPr>
+        <a:xfrm>
+          <a:off x="0" y="0"/>
+          <a:ext cx="0" cy="0"/>
+          <a:chOff x="0" y="0"/>
+          <a:chExt cx="0" cy="0"/>
+        </a:xfrm>
+      </p:grpSpPr>
+      <p:sp>
+        <p:nvSpPr>
+          <p:cNvPr id="164" name="Google Shape;164;g3e498caeefa_0_8"/>
+          <p:cNvSpPr txBox="1"/>
+          <p:nvPr/>
+        </p:nvSpPr>
+        <p:spPr>
+          <a:xfrm>
+            <a:off x="731520" y="365760"/>
+            <a:ext cx="10728600" cy="585000"/>
+          </a:xfrm>
+          <a:prstGeom prst="rect">
+            <a:avLst/>
+          </a:prstGeom>
+          <a:noFill/>
+          <a:ln>
+            <a:noFill/>
+          </a:ln>
+        </p:spPr>
+        <p:txBody>
+          <a:bodyPr spcFirstLastPara="1" wrap="square" lIns="91425" tIns="45700" rIns="91425" bIns="45700" anchor="t" anchorCtr="0">
+            <a:spAutoFit/>
+          </a:bodyPr>
+          <a:lstStyle/>
+          <a:p>
+            <a:pPr marL="0" marR="0" lvl="0" indent="0" algn="l" rtl="0">
+              <a:spcBef>
+                <a:spcPts val="0"/>
+              </a:spcBef>
+              <a:spcAft>
+                <a:spcPts val="0"/>
+              </a:spcAft>
+              <a:buNone/>
+            </a:pPr>
+            <a:r>
+              <a:rPr lang="en-US" sz="3200" b="1" i="0" u="none" strike="noStrike" cap="none">
+                <a:solidFill>
+                  <a:srgbClr val="1A1A2E"/>
+                </a:solidFill>
+                <a:latin typeface="Calibri"/>
+                <a:ea typeface="Calibri"/>
+                <a:cs typeface="Calibri"/>
+                <a:sym typeface="Calibri"/>
+              </a:rPr>
+              <a:t>The timeline of the race</a:t>
+            </a:r>
+            <a:endParaRPr/>
+          </a:p>
+        </p:txBody>
+      </p:sp>
+      <p:sp>
+        <p:nvSpPr>
+          <p:cNvPr id="165" name="Google Shape;165;g3e498caeefa_0_8"/>
+          <p:cNvSpPr txBox="1"/>
+          <p:nvPr/>
+        </p:nvSpPr>
+        <p:spPr>
+          <a:xfrm>
+            <a:off x="9601200" y="1188720"/>
+            <a:ext cx="1828800" cy="307800"/>
+          </a:xfrm>
+          <a:prstGeom prst="rect">
+            <a:avLst/>
+          </a:prstGeom>
+          <a:noFill/>
+          <a:ln>
+            <a:noFill/>
+          </a:ln>
+        </p:spPr>
+        <p:txBody>
+          <a:bodyPr spcFirstLastPara="1" wrap="square" lIns="91425" tIns="45700" rIns="91425" bIns="45700" anchor="t" anchorCtr="0">
+            <a:spAutoFit/>
+          </a:bodyPr>
+          <a:lstStyle/>
+          <a:p>
+            <a:pPr marL="0" marR="0" lvl="0" indent="0" algn="r" rtl="0">
+              <a:spcBef>
+                <a:spcPts val="0"/>
+              </a:spcBef>
+              <a:spcAft>
+                <a:spcPts val="0"/>
+              </a:spcAft>
+              <a:buNone/>
+            </a:pPr>
+            <a:r>
+              <a:rPr lang="en-US" sz="1400" b="0" i="0" u="none" strike="noStrike" cap="none">
+                <a:solidFill>
+                  <a:srgbClr val="5B21B6"/>
+                </a:solidFill>
+                <a:latin typeface="Courier New"/>
+                <a:ea typeface="Courier New"/>
+                <a:cs typeface="Courier New"/>
+                <a:sym typeface="Courier New"/>
+              </a:rPr>
+              <a:t>race timeline</a:t>
+            </a:r>
+            <a:endParaRPr/>
+          </a:p>
+        </p:txBody>
+      </p:sp>
+      <p:sp>
+        <p:nvSpPr>
+          <p:cNvPr id="166" name="Google Shape;166;g3e498caeefa_0_8"/>
+          <p:cNvSpPr/>
+          <p:nvPr/>
+        </p:nvSpPr>
+        <p:spPr>
+          <a:xfrm>
+            <a:off x="731520" y="1463040"/>
+            <a:ext cx="10728600" cy="4937700"/>
+          </a:xfrm>
+          <a:prstGeom prst="roundRect">
+            <a:avLst>
+              <a:gd name="adj" fmla="val 16667"/>
+            </a:avLst>
+          </a:prstGeom>
+          <a:solidFill>
+            <a:srgbClr val="F0F0F4"/>
+          </a:solidFill>
+          <a:ln w="12700" cap="flat" cmpd="sng">
+            <a:solidFill>
+              <a:srgbClr val="EEEEF0"/>
+            </a:solidFill>
+            <a:prstDash val="solid"/>
+            <a:round/>
+            <a:headEnd type="none" w="sm" len="sm"/>
+            <a:tailEnd type="none" w="sm" len="sm"/>
+          </a:ln>
+          <a:effectLst>
+            <a:outerShdw blurRad="40000" dist="23000" dir="5400000" rotWithShape="0">
+              <a:srgbClr val="000000">
+                <a:alpha val="34900"/>
+              </a:srgbClr>
+            </a:outerShdw>
+          </a:effectLst>
+        </p:spPr>
+        <p:txBody>
+          <a:bodyPr spcFirstLastPara="1" wrap="square" lIns="91425" tIns="45700" rIns="91425" bIns="45700" anchor="ctr" anchorCtr="0">
+            <a:noAutofit/>
+          </a:bodyPr>
+          <a:lstStyle/>
+          <a:p>
+            <a:pPr marL="0" marR="0" lvl="0" indent="0" algn="ctr" rtl="0">
+              <a:spcBef>
+                <a:spcPts val="0"/>
+              </a:spcBef>
+              <a:spcAft>
+                <a:spcPts val="0"/>
+              </a:spcAft>
+              <a:buNone/>
+            </a:pPr>
+            <a:endParaRPr sz="1800" b="0" i="0" u="none" strike="noStrike" cap="none">
+              <a:solidFill>
+                <a:schemeClr val="dk1"/>
+              </a:solidFill>
+              <a:latin typeface="Calibri"/>
+              <a:ea typeface="Calibri"/>
+              <a:cs typeface="Calibri"/>
+              <a:sym typeface="Calibri"/>
+            </a:endParaRPr>
+          </a:p>
+        </p:txBody>
+      </p:sp>
+      <p:sp>
+        <p:nvSpPr>
+          <p:cNvPr id="167" name="Google Shape;167;g3e498caeefa_0_8"/>
+          <p:cNvSpPr txBox="1"/>
+          <p:nvPr/>
+        </p:nvSpPr>
+        <p:spPr>
+          <a:xfrm>
+            <a:off x="1005840" y="1645920"/>
+            <a:ext cx="10179900" cy="2426700"/>
+          </a:xfrm>
+          <a:prstGeom prst="rect">
+            <a:avLst/>
+          </a:prstGeom>
+          <a:noFill/>
+          <a:ln>
+            <a:noFill/>
+          </a:ln>
+        </p:spPr>
+        <p:txBody>
+          <a:bodyPr spcFirstLastPara="1" wrap="square" lIns="91425" tIns="45700" rIns="91425" bIns="45700" anchor="t" anchorCtr="0">
+            <a:spAutoFit/>
+          </a:bodyPr>
+          <a:lstStyle/>
+          <a:p>
+            <a:pPr marL="0" marR="0" lvl="0" indent="0" algn="l" rtl="0">
+              <a:spcBef>
+                <a:spcPts val="0"/>
+              </a:spcBef>
+              <a:spcAft>
+                <a:spcPts val="0"/>
+              </a:spcAft>
+              <a:buNone/>
+            </a:pPr>
+            <a:r>
+              <a:rPr lang="en-US" sz="1800" b="1" i="0" u="none" strike="noStrike" cap="none">
+                <a:solidFill>
+                  <a:srgbClr val="333344"/>
+                </a:solidFill>
+                <a:latin typeface="Courier New"/>
+                <a:ea typeface="Courier New"/>
+                <a:cs typeface="Courier New"/>
+                <a:sym typeface="Courier New"/>
+              </a:rPr>
+              <a:t>Starting balance: $100. Two withdraw-$10 requests, T1 and T2.</a:t>
+            </a:r>
+            <a:endParaRPr/>
+          </a:p>
+          <a:p>
+            <a:pPr marL="0" marR="0" lvl="0" indent="0" algn="l" rtl="0">
+              <a:spcBef>
+                <a:spcPts val="200"/>
+              </a:spcBef>
+              <a:spcAft>
+                <a:spcPts val="0"/>
+              </a:spcAft>
+              <a:buNone/>
+            </a:pPr>
+            <a:endParaRPr sz="1800" b="1" i="0" u="none" strike="noStrike" cap="none">
+              <a:solidFill>
+                <a:srgbClr val="333344"/>
+              </a:solidFill>
+              <a:latin typeface="Courier New"/>
+              <a:ea typeface="Courier New"/>
+              <a:cs typeface="Courier New"/>
+              <a:sym typeface="Courier New"/>
+            </a:endParaRPr>
+          </a:p>
+          <a:p>
+            <a:pPr marL="0" marR="0" lvl="0" indent="0" algn="l" rtl="0">
+              <a:spcBef>
+                <a:spcPts val="200"/>
+              </a:spcBef>
+              <a:spcAft>
+                <a:spcPts val="0"/>
+              </a:spcAft>
+              <a:buNone/>
+            </a:pPr>
+            <a:r>
+              <a:rPr lang="en-US" sz="1800" b="1" i="0" u="none" strike="noStrike" cap="none">
+                <a:solidFill>
+                  <a:srgbClr val="333344"/>
+                </a:solidFill>
+                <a:latin typeface="Courier New"/>
+                <a:ea typeface="Courier New"/>
+                <a:cs typeface="Courier New"/>
+                <a:sym typeface="Courier New"/>
+              </a:rPr>
+              <a:t>T1 T2 | DB state        | What happened</a:t>
+            </a:r>
+            <a:endParaRPr/>
+          </a:p>
+          <a:p>
+            <a:pPr marL="0" marR="0" lvl="0" indent="0" algn="l" rtl="0">
+              <a:spcBef>
+                <a:spcPts val="200"/>
+              </a:spcBef>
+              <a:spcAft>
+                <a:spcPts val="0"/>
+              </a:spcAft>
+              <a:buNone/>
+            </a:pPr>
+            <a:r>
+              <a:rPr lang="en-US" sz="1800" b="1" i="0" u="none" strike="noStrike" cap="none">
+                <a:solidFill>
+                  <a:srgbClr val="333344"/>
+                </a:solidFill>
+                <a:latin typeface="Courier New"/>
+                <a:ea typeface="Courier New"/>
+                <a:cs typeface="Courier New"/>
+                <a:sym typeface="Courier New"/>
+              </a:rPr>
+              <a:t>------+-----------------+-----------------------------------</a:t>
+            </a:r>
+            <a:endParaRPr/>
+          </a:p>
+          <a:p>
+            <a:pPr marL="0" marR="0" lvl="0" indent="0" algn="l" rtl="0">
+              <a:spcBef>
+                <a:spcPts val="200"/>
+              </a:spcBef>
+              <a:spcAft>
+                <a:spcPts val="0"/>
+              </a:spcAft>
+              <a:buNone/>
+            </a:pPr>
+            <a:r>
+              <a:rPr lang="en-US" sz="1800" b="1" i="0" u="none" strike="noStrike" cap="none">
+                <a:solidFill>
+                  <a:srgbClr val="333344"/>
+                </a:solidFill>
+                <a:latin typeface="Courier New"/>
+                <a:ea typeface="Courier New"/>
+                <a:cs typeface="Courier New"/>
+                <a:sym typeface="Courier New"/>
+              </a:rPr>
+              <a:t> &gt;    | balance = 100   | T1 reads balance -&gt; sees 100</a:t>
+            </a:r>
+            <a:endParaRPr/>
+          </a:p>
+          <a:p>
+            <a:pPr marL="0" marR="0" lvl="0" indent="0" algn="l" rtl="0">
+              <a:spcBef>
+                <a:spcPts val="200"/>
+              </a:spcBef>
+              <a:spcAft>
+                <a:spcPts val="0"/>
+              </a:spcAft>
+              <a:buNone/>
+            </a:pPr>
+            <a:r>
+              <a:rPr lang="en-US" sz="1800" b="1" i="0" u="none" strike="noStrike" cap="none">
+                <a:solidFill>
+                  <a:srgbClr val="333344"/>
+                </a:solidFill>
+                <a:latin typeface="Courier New"/>
+                <a:ea typeface="Courier New"/>
+                <a:cs typeface="Courier New"/>
+                <a:sym typeface="Courier New"/>
+              </a:rPr>
+              <a:t>    &gt; | balance = 100   | T2 reads balance -&gt; sees 100</a:t>
+            </a:r>
+            <a:endParaRPr/>
+          </a:p>
+          <a:p>
+            <a:pPr marL="0" marR="0" lvl="0" indent="0" algn="l" rtl="0">
+              <a:spcBef>
+                <a:spcPts val="200"/>
+              </a:spcBef>
+              <a:spcAft>
+                <a:spcPts val="0"/>
+              </a:spcAft>
+              <a:buNone/>
+            </a:pPr>
+            <a:r>
+              <a:rPr lang="en-US" sz="1800" b="1" i="0" u="none" strike="noStrike" cap="none">
+                <a:solidFill>
+                  <a:srgbClr val="333344"/>
+                </a:solidFill>
+                <a:latin typeface="Courier New"/>
+                <a:ea typeface="Courier New"/>
+                <a:cs typeface="Courier New"/>
+                <a:sym typeface="Courier New"/>
+              </a:rPr>
+              <a:t> &gt;    | balance = 100   | T1 computes 100 - 10 = 90</a:t>
+            </a:r>
+            <a:endParaRPr/>
+          </a:p>
+          <a:p>
+            <a:pPr marL="0" marR="0" lvl="0" indent="0" algn="l" rtl="0">
+              <a:spcBef>
+                <a:spcPts val="200"/>
+              </a:spcBef>
+              <a:spcAft>
+                <a:spcPts val="0"/>
+              </a:spcAft>
+              <a:buNone/>
+            </a:pPr>
+            <a:endParaRPr/>
+          </a:p>
+        </p:txBody>
+      </p:sp>
+    </p:spTree>
+  </p:cSld>
+  <p:clrMapOvr>
+    <a:masterClrMapping/>
+  </p:clrMapOvr>
+</p:sld>
+</file>
+
+<file path=ppt/slides/slide9.xml><?xml version="1.0" encoding="utf-8"?>
+<p:sld xmlns:a="http://schemas.openxmlformats.org/drawingml/2006/main" xmlns:r="http://schemas.openxmlformats.org/officeDocument/2006/relationships" xmlns:p="http://schemas.openxmlformats.org/presentationml/2006/main">
+  <p:cSld>
+    <p:bg>
+      <p:bgPr>
+        <a:solidFill>
+          <a:srgbClr val="FFFFFF"/>
+        </a:solidFill>
+        <a:effectLst/>
+      </p:bgPr>
+    </p:bg>
+    <p:spTree>
+      <p:nvGrpSpPr>
+        <p:cNvPr id="1" name="Shape 172"/>
+        <p:cNvGrpSpPr/>
+        <p:nvPr/>
+      </p:nvGrpSpPr>
+      <p:grpSpPr>
+        <a:xfrm>
+          <a:off x="0" y="0"/>
+          <a:ext cx="0" cy="0"/>
+          <a:chOff x="0" y="0"/>
+          <a:chExt cx="0" cy="0"/>
+        </a:xfrm>
+      </p:grpSpPr>
+      <p:sp>
+        <p:nvSpPr>
+          <p:cNvPr id="173" name="Google Shape;173;g3e498caeefa_0_0"/>
+          <p:cNvSpPr txBox="1"/>
+          <p:nvPr/>
+        </p:nvSpPr>
+        <p:spPr>
+          <a:xfrm>
+            <a:off x="731520" y="365760"/>
+            <a:ext cx="10728600" cy="585000"/>
+          </a:xfrm>
+          <a:prstGeom prst="rect">
+            <a:avLst/>
+          </a:prstGeom>
+          <a:noFill/>
+          <a:ln>
+            <a:noFill/>
+          </a:ln>
+        </p:spPr>
+        <p:txBody>
+          <a:bodyPr spcFirstLastPara="1" wrap="square" lIns="91425" tIns="45700" rIns="91425" bIns="45700" anchor="t" anchorCtr="0">
+            <a:spAutoFit/>
+          </a:bodyPr>
+          <a:lstStyle/>
+          <a:p>
+            <a:pPr marL="0" marR="0" lvl="0" indent="0" algn="l" rtl="0">
+              <a:spcBef>
+                <a:spcPts val="0"/>
+              </a:spcBef>
+              <a:spcAft>
+                <a:spcPts val="0"/>
+              </a:spcAft>
+              <a:buNone/>
+            </a:pPr>
+            <a:r>
+              <a:rPr lang="en-US" sz="3200" b="1" i="0" u="none" strike="noStrike" cap="none">
+                <a:solidFill>
+                  <a:srgbClr val="1A1A2E"/>
+                </a:solidFill>
+                <a:latin typeface="Calibri"/>
+                <a:ea typeface="Calibri"/>
+                <a:cs typeface="Calibri"/>
+                <a:sym typeface="Calibri"/>
+              </a:rPr>
+              <a:t>The timeline of the race</a:t>
+            </a:r>
+            <a:endParaRPr/>
+          </a:p>
+        </p:txBody>
+      </p:sp>
+      <p:sp>
+        <p:nvSpPr>
+          <p:cNvPr id="174" name="Google Shape;174;g3e498caeefa_0_0"/>
+          <p:cNvSpPr txBox="1"/>
+          <p:nvPr/>
+        </p:nvSpPr>
+        <p:spPr>
+          <a:xfrm>
+            <a:off x="9601200" y="1188720"/>
+            <a:ext cx="1828800" cy="307800"/>
+          </a:xfrm>
+          <a:prstGeom prst="rect">
+            <a:avLst/>
+          </a:prstGeom>
+          <a:noFill/>
+          <a:ln>
+            <a:noFill/>
+          </a:ln>
+        </p:spPr>
+        <p:txBody>
+          <a:bodyPr spcFirstLastPara="1" wrap="square" lIns="91425" tIns="45700" rIns="91425" bIns="45700" anchor="t" anchorCtr="0">
+            <a:spAutoFit/>
+          </a:bodyPr>
+          <a:lstStyle/>
+          <a:p>
+            <a:pPr marL="0" marR="0" lvl="0" indent="0" algn="r" rtl="0">
+              <a:spcBef>
+                <a:spcPts val="0"/>
+              </a:spcBef>
+              <a:spcAft>
+                <a:spcPts val="0"/>
+              </a:spcAft>
+              <a:buNone/>
+            </a:pPr>
+            <a:r>
+              <a:rPr lang="en-US" sz="1400" b="0" i="0" u="none" strike="noStrike" cap="none">
+                <a:solidFill>
+                  <a:srgbClr val="5B21B6"/>
+                </a:solidFill>
+                <a:latin typeface="Courier New"/>
+                <a:ea typeface="Courier New"/>
+                <a:cs typeface="Courier New"/>
+                <a:sym typeface="Courier New"/>
+              </a:rPr>
+              <a:t>race timeline</a:t>
+            </a:r>
+            <a:endParaRPr/>
+          </a:p>
+        </p:txBody>
+      </p:sp>
+      <p:sp>
+        <p:nvSpPr>
+          <p:cNvPr id="175" name="Google Shape;175;g3e498caeefa_0_0"/>
+          <p:cNvSpPr/>
+          <p:nvPr/>
+        </p:nvSpPr>
+        <p:spPr>
+          <a:xfrm>
+            <a:off x="731520" y="1463040"/>
+            <a:ext cx="10728600" cy="4937700"/>
+          </a:xfrm>
+          <a:prstGeom prst="roundRect">
+            <a:avLst>
+              <a:gd name="adj" fmla="val 16667"/>
+            </a:avLst>
+          </a:prstGeom>
+          <a:solidFill>
+            <a:srgbClr val="F0F0F4"/>
+          </a:solidFill>
+          <a:ln w="12700" cap="flat" cmpd="sng">
+            <a:solidFill>
+              <a:srgbClr val="EEEEF0"/>
+            </a:solidFill>
+            <a:prstDash val="solid"/>
+            <a:round/>
+            <a:headEnd type="none" w="sm" len="sm"/>
+            <a:tailEnd type="none" w="sm" len="sm"/>
+          </a:ln>
+          <a:effectLst>
+            <a:outerShdw blurRad="40000" dist="23000" dir="5400000" rotWithShape="0">
+              <a:srgbClr val="000000">
+                <a:alpha val="34900"/>
+              </a:srgbClr>
+            </a:outerShdw>
+          </a:effectLst>
+        </p:spPr>
+        <p:txBody>
+          <a:bodyPr spcFirstLastPara="1" wrap="square" lIns="91425" tIns="45700" rIns="91425" bIns="45700" anchor="ctr" anchorCtr="0">
+            <a:noAutofit/>
+          </a:bodyPr>
+          <a:lstStyle/>
+          <a:p>
+            <a:pPr marL="0" marR="0" lvl="0" indent="0" algn="ctr" rtl="0">
+              <a:spcBef>
+                <a:spcPts val="0"/>
+              </a:spcBef>
+              <a:spcAft>
+                <a:spcPts val="0"/>
+              </a:spcAft>
+              <a:buNone/>
+            </a:pPr>
+            <a:endParaRPr sz="1800" b="0" i="0" u="none" strike="noStrike" cap="none">
+              <a:solidFill>
+                <a:schemeClr val="dk1"/>
+              </a:solidFill>
+              <a:latin typeface="Calibri"/>
+              <a:ea typeface="Calibri"/>
+              <a:cs typeface="Calibri"/>
+              <a:sym typeface="Calibri"/>
+            </a:endParaRPr>
+          </a:p>
+        </p:txBody>
+      </p:sp>
+      <p:sp>
+        <p:nvSpPr>
+          <p:cNvPr id="176" name="Google Shape;176;g3e498caeefa_0_0"/>
+          <p:cNvSpPr txBox="1"/>
+          <p:nvPr/>
+        </p:nvSpPr>
+        <p:spPr>
+          <a:xfrm>
+            <a:off x="1005840" y="1645920"/>
+            <a:ext cx="10179900" cy="2729400"/>
+          </a:xfrm>
+          <a:prstGeom prst="rect">
+            <a:avLst/>
+          </a:prstGeom>
+          <a:noFill/>
+          <a:ln>
+            <a:noFill/>
+          </a:ln>
+        </p:spPr>
+        <p:txBody>
+          <a:bodyPr spcFirstLastPara="1" wrap="square" lIns="91425" tIns="45700" rIns="91425" bIns="45700" anchor="t" anchorCtr="0">
+            <a:spAutoFit/>
+          </a:bodyPr>
+          <a:lstStyle/>
+          <a:p>
+            <a:pPr marL="0" marR="0" lvl="0" indent="0" algn="l" rtl="0">
+              <a:spcBef>
+                <a:spcPts val="0"/>
+              </a:spcBef>
+              <a:spcAft>
+                <a:spcPts val="0"/>
+              </a:spcAft>
+              <a:buNone/>
+            </a:pPr>
+            <a:r>
+              <a:rPr lang="en-US" sz="1800" b="1" i="0" u="none" strike="noStrike" cap="none">
+                <a:solidFill>
+                  <a:srgbClr val="333344"/>
+                </a:solidFill>
+                <a:latin typeface="Courier New"/>
+                <a:ea typeface="Courier New"/>
+                <a:cs typeface="Courier New"/>
+                <a:sym typeface="Courier New"/>
+              </a:rPr>
+              <a:t>Starting balance: $100. Two withdraw-$10 requests, T1 and T2.</a:t>
+            </a:r>
+            <a:endParaRPr/>
+          </a:p>
+          <a:p>
+            <a:pPr marL="0" marR="0" lvl="0" indent="0" algn="l" rtl="0">
+              <a:spcBef>
+                <a:spcPts val="200"/>
+              </a:spcBef>
+              <a:spcAft>
+                <a:spcPts val="0"/>
+              </a:spcAft>
+              <a:buNone/>
+            </a:pPr>
+            <a:endParaRPr sz="1800" b="1" i="0" u="none" strike="noStrike" cap="none">
+              <a:solidFill>
+                <a:srgbClr val="333344"/>
+              </a:solidFill>
+              <a:latin typeface="Courier New"/>
+              <a:ea typeface="Courier New"/>
+              <a:cs typeface="Courier New"/>
+              <a:sym typeface="Courier New"/>
+            </a:endParaRPr>
+          </a:p>
+          <a:p>
+            <a:pPr marL="0" marR="0" lvl="0" indent="0" algn="l" rtl="0">
+              <a:spcBef>
+                <a:spcPts val="200"/>
+              </a:spcBef>
+              <a:spcAft>
+                <a:spcPts val="0"/>
+              </a:spcAft>
+              <a:buNone/>
+            </a:pPr>
+            <a:r>
+              <a:rPr lang="en-US" sz="1800" b="1" i="0" u="none" strike="noStrike" cap="none">
+                <a:solidFill>
+                  <a:srgbClr val="333344"/>
+                </a:solidFill>
+                <a:latin typeface="Courier New"/>
+                <a:ea typeface="Courier New"/>
+                <a:cs typeface="Courier New"/>
+                <a:sym typeface="Courier New"/>
+              </a:rPr>
+              <a:t>T1 T2 | DB state        | What happened</a:t>
+            </a:r>
+            <a:endParaRPr/>
+          </a:p>
+          <a:p>
+            <a:pPr marL="0" marR="0" lvl="0" indent="0" algn="l" rtl="0">
+              <a:spcBef>
+                <a:spcPts val="200"/>
+              </a:spcBef>
+              <a:spcAft>
+                <a:spcPts val="0"/>
+              </a:spcAft>
+              <a:buNone/>
+            </a:pPr>
+            <a:r>
+              <a:rPr lang="en-US" sz="1800" b="1" i="0" u="none" strike="noStrike" cap="none">
+                <a:solidFill>
+                  <a:srgbClr val="333344"/>
+                </a:solidFill>
+                <a:latin typeface="Courier New"/>
+                <a:ea typeface="Courier New"/>
+                <a:cs typeface="Courier New"/>
+                <a:sym typeface="Courier New"/>
+              </a:rPr>
+              <a:t>------+-----------------+-----------------------------------</a:t>
+            </a:r>
+            <a:endParaRPr/>
+          </a:p>
+          <a:p>
+            <a:pPr marL="0" marR="0" lvl="0" indent="0" algn="l" rtl="0">
+              <a:spcBef>
+                <a:spcPts val="200"/>
+              </a:spcBef>
+              <a:spcAft>
+                <a:spcPts val="0"/>
+              </a:spcAft>
+              <a:buNone/>
+            </a:pPr>
+            <a:r>
+              <a:rPr lang="en-US" sz="1800" b="1" i="0" u="none" strike="noStrike" cap="none">
+                <a:solidFill>
+                  <a:srgbClr val="333344"/>
+                </a:solidFill>
+                <a:latin typeface="Courier New"/>
+                <a:ea typeface="Courier New"/>
+                <a:cs typeface="Courier New"/>
+                <a:sym typeface="Courier New"/>
+              </a:rPr>
+              <a:t> &gt;    | balance = 100   | T1 reads balance -&gt; sees 100</a:t>
+            </a:r>
+            <a:endParaRPr/>
+          </a:p>
+          <a:p>
+            <a:pPr marL="0" marR="0" lvl="0" indent="0" algn="l" rtl="0">
+              <a:spcBef>
+                <a:spcPts val="200"/>
+              </a:spcBef>
+              <a:spcAft>
+                <a:spcPts val="0"/>
+              </a:spcAft>
+              <a:buNone/>
+            </a:pPr>
+            <a:r>
+              <a:rPr lang="en-US" sz="1800" b="1" i="0" u="none" strike="noStrike" cap="none">
+                <a:solidFill>
+                  <a:srgbClr val="333344"/>
+                </a:solidFill>
+                <a:latin typeface="Courier New"/>
+                <a:ea typeface="Courier New"/>
+                <a:cs typeface="Courier New"/>
+                <a:sym typeface="Courier New"/>
+              </a:rPr>
+              <a:t>    &gt; | balance = 100   | T2 reads balance -&gt; sees 100</a:t>
+            </a:r>
+            <a:endParaRPr/>
+          </a:p>
+          <a:p>
+            <a:pPr marL="0" marR="0" lvl="0" indent="0" algn="l" rtl="0">
+              <a:spcBef>
+                <a:spcPts val="200"/>
+              </a:spcBef>
+              <a:spcAft>
+                <a:spcPts val="0"/>
+              </a:spcAft>
+              <a:buNone/>
+            </a:pPr>
+            <a:r>
+              <a:rPr lang="en-US" sz="1800" b="1" i="0" u="none" strike="noStrike" cap="none">
+                <a:solidFill>
+                  <a:srgbClr val="333344"/>
+                </a:solidFill>
+                <a:latin typeface="Courier New"/>
+                <a:ea typeface="Courier New"/>
+                <a:cs typeface="Courier New"/>
+                <a:sym typeface="Courier New"/>
+              </a:rPr>
+              <a:t> &gt;    | balance = 100   | T1 computes 100 - 10 = 90</a:t>
+            </a:r>
+            <a:endParaRPr/>
+          </a:p>
+          <a:p>
+            <a:pPr marL="0" marR="0" lvl="0" indent="0" algn="l" rtl="0">
+              <a:spcBef>
+                <a:spcPts val="200"/>
+              </a:spcBef>
+              <a:spcAft>
+                <a:spcPts val="0"/>
+              </a:spcAft>
+              <a:buNone/>
+            </a:pPr>
+            <a:r>
+              <a:rPr lang="en-US" sz="1800" b="1" i="0" u="none" strike="noStrike" cap="none">
+                <a:solidFill>
+                  <a:srgbClr val="333344"/>
+                </a:solidFill>
+                <a:latin typeface="Courier New"/>
+                <a:ea typeface="Courier New"/>
+                <a:cs typeface="Courier New"/>
+                <a:sym typeface="Courier New"/>
+              </a:rPr>
+              <a:t>    &gt; | balance = 100   | T2 computes 100 - 10 = 90</a:t>
+            </a:r>
             <a:endParaRPr/>
           </a:p>
           <a:p>
